--- a/examples/business-blue/deck.pptx
+++ b/examples/business-blue/deck.pptx
@@ -1945,7 +1945,7 @@
         <p:spPr>
           <a:xfrm>
             <a:off x="533400" y="285750"/>
-            <a:ext cx="6191250" cy="171450"/>
+            <a:ext cx="8096250" cy="228600"/>
           </a:xfrm>
           <a:prstGeom prst="rect">
             <a:avLst/>
@@ -1969,7 +1969,7 @@
                 <a:ea typeface="Pretendard" pitchFamily="34" charset="-122"/>
                 <a:cs typeface="Pretendard" pitchFamily="34" charset="-120"/>
               </a:rPr>
-              <a:t>업무 개선 / 비교</a:t>
+              <a:t>업무 개선 / 가상 연습</a:t>
             </a:r>
             <a:endParaRPr lang="ko-KR" sz="975" dirty="0">
               <a:ea typeface="Pretendard"/>
@@ -1979,7 +1979,89 @@
       </p:sp>
       <p:sp>
         <p:nvSpPr>
-          <p:cNvPr id="3" name="Shape 1"/>
+          <p:cNvPr id="3" name="Text 1"/>
+          <p:cNvSpPr txBox="1"/>
+          <p:nvPr/>
+        </p:nvSpPr>
+        <p:spPr>
+          <a:xfrm>
+            <a:off x="533400" y="752475"/>
+            <a:ext cx="11125200" cy="609600"/>
+          </a:xfrm>
+          <a:prstGeom prst="rect">
+            <a:avLst/>
+          </a:prstGeom>
+          <a:noFill/>
+          <a:ln/>
+        </p:spPr>
+        <p:txBody>
+          <a:bodyPr wrap="square" lIns="0" tIns="0" rIns="0" bIns="0" rtlCol="0" anchor="t"/>
+          <a:lstStyle/>
+          <a:p>
+            <a:pPr algn="l" indent="0" marL="0">
+              <a:buNone/>
+            </a:pPr>
+            <a:r>
+              <a:rPr lang="ko-KR" sz="3300" b="1" dirty="0">
+                <a:solidFill>
+                  <a:srgbClr val="192A40"/>
+                </a:solidFill>
+                <a:latin typeface="Pretendard" pitchFamily="34" charset="0"/>
+                <a:ea typeface="Pretendard" pitchFamily="34" charset="-122"/>
+                <a:cs typeface="Pretendard" pitchFamily="34" charset="-120"/>
+              </a:rPr>
+              <a:t>기록 방식의 변화</a:t>
+            </a:r>
+            <a:endParaRPr lang="ko-KR" sz="3300" dirty="0">
+              <a:ea typeface="Pretendard"/>
+            </a:endParaRPr>
+          </a:p>
+        </p:txBody>
+      </p:sp>
+      <p:sp>
+        <p:nvSpPr>
+          <p:cNvPr id="4" name="Text 2"/>
+          <p:cNvSpPr txBox="1"/>
+          <p:nvPr/>
+        </p:nvSpPr>
+        <p:spPr>
+          <a:xfrm>
+            <a:off x="533400" y="1495425"/>
+            <a:ext cx="11125200" cy="342900"/>
+          </a:xfrm>
+          <a:prstGeom prst="rect">
+            <a:avLst/>
+          </a:prstGeom>
+          <a:noFill/>
+          <a:ln/>
+        </p:spPr>
+        <p:txBody>
+          <a:bodyPr wrap="square" lIns="0" tIns="0" rIns="0" bIns="0" rtlCol="0" anchor="t"/>
+          <a:lstStyle/>
+          <a:p>
+            <a:pPr algn="l" indent="0" marL="0">
+              <a:buNone/>
+            </a:pPr>
+            <a:r>
+              <a:rPr lang="ko-KR" sz="1575" dirty="0">
+                <a:solidFill>
+                  <a:srgbClr val="526174"/>
+                </a:solidFill>
+                <a:latin typeface="Pretendard" pitchFamily="34" charset="0"/>
+                <a:ea typeface="Pretendard" pitchFamily="34" charset="-122"/>
+                <a:cs typeface="Pretendard" pitchFamily="34" charset="-120"/>
+              </a:rPr>
+              <a:t>종이에서 엑셀로 옮기던 기록을 검수 현장에서 마칩니다.</a:t>
+            </a:r>
+            <a:endParaRPr lang="ko-KR" sz="1575" dirty="0">
+              <a:ea typeface="Pretendard"/>
+            </a:endParaRPr>
+          </a:p>
+        </p:txBody>
+      </p:sp>
+      <p:sp>
+        <p:nvSpPr>
+          <p:cNvPr id="5" name="Shape 3"/>
           <p:cNvSpPr/>
           <p:nvPr/>
         </p:nvSpPr>
@@ -1992,7 +2074,7 @@
             <a:avLst/>
           </a:prstGeom>
           <a:noFill/>
-          <a:ln w="9525">
+          <a:ln w="11430">
             <a:solidFill>
               <a:srgbClr val="CDD6E1"/>
             </a:solidFill>
@@ -2002,14 +2084,14 @@
       </p:sp>
       <p:sp>
         <p:nvSpPr>
-          <p:cNvPr id="4" name="Text 2"/>
+          <p:cNvPr id="6" name="Text 4"/>
           <p:cNvSpPr txBox="1"/>
           <p:nvPr/>
         </p:nvSpPr>
         <p:spPr>
           <a:xfrm>
             <a:off x="533400" y="6496050"/>
-            <a:ext cx="7620000" cy="152400"/>
+            <a:ext cx="8096250" cy="190500"/>
           </a:xfrm>
           <a:prstGeom prst="rect">
             <a:avLst/>
@@ -2043,26 +2125,26 @@
       </p:sp>
       <p:sp>
         <p:nvSpPr>
-          <p:cNvPr id="5" name="Text 3"/>
+          <p:cNvPr id="7" name="Text 5"/>
           <p:cNvSpPr txBox="1"/>
           <p:nvPr/>
         </p:nvSpPr>
         <p:spPr>
           <a:xfrm>
             <a:off x="10763250" y="6477000"/>
-            <a:ext cx="895350" cy="190500"/>
-          </a:xfrm>
-          <a:prstGeom prst="rect">
-            <a:avLst/>
-          </a:prstGeom>
-          <a:noFill/>
-          <a:ln/>
-        </p:spPr>
-        <p:txBody>
-          <a:bodyPr wrap="square" lIns="0" tIns="0" rIns="0" bIns="0" rtlCol="0" anchor="t"/>
-          <a:lstStyle/>
-          <a:p>
-            <a:pPr algn="r" indent="0" marL="0">
+            <a:ext cx="895350" cy="228600"/>
+          </a:xfrm>
+          <a:prstGeom prst="rect">
+            <a:avLst/>
+          </a:prstGeom>
+          <a:noFill/>
+          <a:ln/>
+        </p:spPr>
+        <p:txBody>
+          <a:bodyPr wrap="square" lIns="0" tIns="0" rIns="0" bIns="0" rtlCol="0" anchor="t"/>
+          <a:lstStyle/>
+          <a:p>
+            <a:pPr algn="l" indent="0" marL="0">
               <a:buNone/>
             </a:pPr>
             <a:r>
@@ -2084,227 +2166,24 @@
       </p:sp>
       <p:sp>
         <p:nvSpPr>
-          <p:cNvPr id="6" name="Text 4"/>
-          <p:cNvSpPr txBox="1"/>
-          <p:nvPr/>
-        </p:nvSpPr>
-        <p:spPr>
-          <a:xfrm>
-            <a:off x="533400" y="752475"/>
-            <a:ext cx="11125200" cy="590550"/>
-          </a:xfrm>
-          <a:prstGeom prst="rect">
-            <a:avLst/>
-          </a:prstGeom>
-          <a:noFill/>
-          <a:ln/>
-        </p:spPr>
-        <p:txBody>
-          <a:bodyPr wrap="square" lIns="0" tIns="0" rIns="0" bIns="0" rtlCol="0" anchor="t"/>
-          <a:lstStyle/>
-          <a:p>
-            <a:pPr algn="l" indent="0" marL="0">
-              <a:buNone/>
-            </a:pPr>
-            <a:r>
-              <a:rPr lang="ko-KR" sz="3300" b="1" dirty="0">
-                <a:solidFill>
-                  <a:srgbClr val="192A40"/>
-                </a:solidFill>
-                <a:latin typeface="Pretendard" pitchFamily="34" charset="0"/>
-                <a:ea typeface="Pretendard" pitchFamily="34" charset="-122"/>
-                <a:cs typeface="Pretendard" pitchFamily="34" charset="-120"/>
-              </a:rPr>
-              <a:t>기록 방식과 개선 방향</a:t>
-            </a:r>
-            <a:endParaRPr lang="ko-KR" sz="3300" dirty="0">
-              <a:ea typeface="Pretendard"/>
-            </a:endParaRPr>
-          </a:p>
-        </p:txBody>
-      </p:sp>
-      <p:sp>
-        <p:nvSpPr>
-          <p:cNvPr id="7" name="Text 5"/>
-          <p:cNvSpPr txBox="1"/>
-          <p:nvPr/>
-        </p:nvSpPr>
-        <p:spPr>
-          <a:xfrm>
-            <a:off x="533400" y="1495425"/>
-            <a:ext cx="11125200" cy="323850"/>
-          </a:xfrm>
-          <a:prstGeom prst="rect">
-            <a:avLst/>
-          </a:prstGeom>
-          <a:noFill/>
-          <a:ln/>
-        </p:spPr>
-        <p:txBody>
-          <a:bodyPr wrap="square" lIns="0" tIns="0" rIns="0" bIns="0" rtlCol="0" anchor="t"/>
-          <a:lstStyle/>
-          <a:p>
-            <a:pPr algn="l" indent="0" marL="0">
-              <a:buNone/>
-            </a:pPr>
-            <a:r>
-              <a:rPr lang="ko-KR" sz="1575" dirty="0">
-                <a:solidFill>
-                  <a:srgbClr val="526174"/>
-                </a:solidFill>
-                <a:latin typeface="Pretendard" pitchFamily="34" charset="0"/>
-                <a:ea typeface="Pretendard" pitchFamily="34" charset="-122"/>
-                <a:cs typeface="Pretendard" pitchFamily="34" charset="-120"/>
-              </a:rPr>
-              <a:t>검수 기록을 옮겨 적는 과정을 현장 입력으로 바꿉니다.</a:t>
-            </a:r>
-            <a:endParaRPr lang="ko-KR" sz="1575" dirty="0">
-              <a:ea typeface="Pretendard"/>
-            </a:endParaRPr>
-          </a:p>
-        </p:txBody>
-      </p:sp>
-      <p:sp>
-        <p:nvSpPr>
-          <p:cNvPr id="8" name="Text 6"/>
-          <p:cNvSpPr txBox="1"/>
-          <p:nvPr/>
-        </p:nvSpPr>
-        <p:spPr>
-          <a:xfrm>
-            <a:off x="533400" y="2057400"/>
-            <a:ext cx="1428750" cy="228600"/>
-          </a:xfrm>
-          <a:prstGeom prst="rect">
-            <a:avLst/>
-          </a:prstGeom>
-          <a:noFill/>
-          <a:ln/>
-        </p:spPr>
-        <p:txBody>
-          <a:bodyPr wrap="square" lIns="0" tIns="0" rIns="0" bIns="0" rtlCol="0" anchor="t"/>
-          <a:lstStyle/>
-          <a:p>
-            <a:pPr algn="l" indent="0" marL="0">
-              <a:buNone/>
-            </a:pPr>
-            <a:r>
-              <a:rPr lang="ko-KR" sz="1125" b="1" dirty="0">
-                <a:solidFill>
-                  <a:srgbClr val="2459A6"/>
-                </a:solidFill>
-                <a:latin typeface="Pretendard" pitchFamily="34" charset="0"/>
-                <a:ea typeface="Pretendard" pitchFamily="34" charset="-122"/>
-                <a:cs typeface="Pretendard" pitchFamily="34" charset="-120"/>
-              </a:rPr>
-              <a:t>비교 항목</a:t>
-            </a:r>
-            <a:endParaRPr lang="ko-KR" sz="1125" dirty="0">
-              <a:ea typeface="Pretendard"/>
-            </a:endParaRPr>
-          </a:p>
-        </p:txBody>
-      </p:sp>
-      <p:sp>
-        <p:nvSpPr>
-          <p:cNvPr id="9" name="Text 7"/>
-          <p:cNvSpPr txBox="1"/>
-          <p:nvPr/>
-        </p:nvSpPr>
-        <p:spPr>
-          <a:xfrm>
-            <a:off x="2390775" y="2057400"/>
-            <a:ext cx="1428750" cy="228600"/>
-          </a:xfrm>
-          <a:prstGeom prst="rect">
-            <a:avLst/>
-          </a:prstGeom>
-          <a:noFill/>
-          <a:ln/>
-        </p:spPr>
-        <p:txBody>
-          <a:bodyPr wrap="square" lIns="0" tIns="0" rIns="0" bIns="0" rtlCol="0" anchor="t"/>
-          <a:lstStyle/>
-          <a:p>
-            <a:pPr algn="l" indent="0" marL="0">
-              <a:buNone/>
-            </a:pPr>
-            <a:r>
-              <a:rPr lang="ko-KR" sz="1125" b="1" dirty="0">
-                <a:solidFill>
-                  <a:srgbClr val="2459A6"/>
-                </a:solidFill>
-                <a:latin typeface="Pretendard" pitchFamily="34" charset="0"/>
-                <a:ea typeface="Pretendard" pitchFamily="34" charset="-122"/>
-                <a:cs typeface="Pretendard" pitchFamily="34" charset="-120"/>
-              </a:rPr>
-              <a:t>기존 방식</a:t>
-            </a:r>
-            <a:endParaRPr lang="ko-KR" sz="1125" dirty="0">
-              <a:ea typeface="Pretendard"/>
-            </a:endParaRPr>
-          </a:p>
-        </p:txBody>
-      </p:sp>
-      <p:sp>
-        <p:nvSpPr>
-          <p:cNvPr id="10" name="Text 8"/>
-          <p:cNvSpPr txBox="1"/>
-          <p:nvPr/>
-        </p:nvSpPr>
-        <p:spPr>
-          <a:xfrm>
-            <a:off x="7315200" y="2057400"/>
-            <a:ext cx="1428750" cy="228600"/>
-          </a:xfrm>
-          <a:prstGeom prst="rect">
-            <a:avLst/>
-          </a:prstGeom>
-          <a:noFill/>
-          <a:ln/>
-        </p:spPr>
-        <p:txBody>
-          <a:bodyPr wrap="square" lIns="0" tIns="0" rIns="0" bIns="0" rtlCol="0" anchor="t"/>
-          <a:lstStyle/>
-          <a:p>
-            <a:pPr algn="l" indent="0" marL="0">
-              <a:buNone/>
-            </a:pPr>
-            <a:r>
-              <a:rPr lang="ko-KR" sz="1125" b="1" dirty="0">
-                <a:solidFill>
-                  <a:srgbClr val="2459A6"/>
-                </a:solidFill>
-                <a:latin typeface="Pretendard" pitchFamily="34" charset="0"/>
-                <a:ea typeface="Pretendard" pitchFamily="34" charset="-122"/>
-                <a:cs typeface="Pretendard" pitchFamily="34" charset="-120"/>
-              </a:rPr>
-              <a:t>개선 후</a:t>
-            </a:r>
-            <a:endParaRPr lang="ko-KR" sz="1125" dirty="0">
-              <a:ea typeface="Pretendard"/>
-            </a:endParaRPr>
-          </a:p>
-        </p:txBody>
-      </p:sp>
-      <p:sp>
-        <p:nvSpPr>
-          <p:cNvPr id="11" name="Shape 9"/>
+          <p:cNvPr id="8" name="Shape 6"/>
           <p:cNvSpPr/>
           <p:nvPr/>
         </p:nvSpPr>
         <p:spPr>
           <a:xfrm>
-            <a:off x="533400" y="2343150"/>
-            <a:ext cx="11125200" cy="0"/>
-          </a:xfrm>
-          <a:prstGeom prst="line">
-            <a:avLst/>
-          </a:prstGeom>
-          <a:noFill/>
-          <a:ln w="14288">
+            <a:off x="2324100" y="2057400"/>
+            <a:ext cx="3981450" cy="495300"/>
+          </a:xfrm>
+          <a:prstGeom prst="rect">
+            <a:avLst/>
+          </a:prstGeom>
+          <a:solidFill>
+            <a:srgbClr val="F0F2F5"/>
+          </a:solidFill>
+          <a:ln w="12700">
             <a:solidFill>
-              <a:srgbClr val="CDD6E1"/>
+              <a:srgbClr val="F0F2F5"/>
             </a:solidFill>
             <a:prstDash val="solid"/>
           </a:ln>
@@ -2312,30 +2191,162 @@
       </p:sp>
       <p:sp>
         <p:nvSpPr>
-          <p:cNvPr id="12" name="Text 10"/>
-          <p:cNvSpPr txBox="1"/>
-          <p:nvPr/>
-        </p:nvSpPr>
-        <p:spPr>
-          <a:xfrm>
-            <a:off x="533400" y="2524125"/>
-            <a:ext cx="1619250" cy="419100"/>
-          </a:xfrm>
-          <a:prstGeom prst="rect">
-            <a:avLst/>
-          </a:prstGeom>
-          <a:noFill/>
-          <a:ln/>
-        </p:spPr>
-        <p:txBody>
-          <a:bodyPr wrap="square" lIns="0" tIns="0" rIns="0" bIns="0" rtlCol="0" anchor="t"/>
-          <a:lstStyle/>
-          <a:p>
-            <a:pPr algn="l" indent="0" marL="0">
-              <a:buNone/>
-            </a:pPr>
-            <a:r>
-              <a:rPr lang="ko-KR" sz="1875" b="1" dirty="0">
+          <p:cNvPr id="9" name="Shape 7"/>
+          <p:cNvSpPr/>
+          <p:nvPr/>
+        </p:nvSpPr>
+        <p:spPr>
+          <a:xfrm>
+            <a:off x="7067550" y="2057400"/>
+            <a:ext cx="4591050" cy="495300"/>
+          </a:xfrm>
+          <a:prstGeom prst="rect">
+            <a:avLst/>
+          </a:prstGeom>
+          <a:solidFill>
+            <a:srgbClr val="2459A6"/>
+          </a:solidFill>
+          <a:ln w="12700">
+            <a:solidFill>
+              <a:srgbClr val="2459A6"/>
+            </a:solidFill>
+            <a:prstDash val="solid"/>
+          </a:ln>
+        </p:spPr>
+      </p:sp>
+      <p:sp>
+        <p:nvSpPr>
+          <p:cNvPr id="10" name="Text 8"/>
+          <p:cNvSpPr txBox="1"/>
+          <p:nvPr/>
+        </p:nvSpPr>
+        <p:spPr>
+          <a:xfrm>
+            <a:off x="2552700" y="2171700"/>
+            <a:ext cx="3333750" cy="304800"/>
+          </a:xfrm>
+          <a:prstGeom prst="rect">
+            <a:avLst/>
+          </a:prstGeom>
+          <a:noFill/>
+          <a:ln/>
+        </p:spPr>
+        <p:txBody>
+          <a:bodyPr wrap="square" lIns="0" tIns="0" rIns="0" bIns="0" rtlCol="0" anchor="t"/>
+          <a:lstStyle/>
+          <a:p>
+            <a:pPr algn="l" indent="0" marL="0">
+              <a:buNone/>
+            </a:pPr>
+            <a:r>
+              <a:rPr lang="ko-KR" sz="1725" b="1" dirty="0">
+                <a:solidFill>
+                  <a:srgbClr val="526174"/>
+                </a:solidFill>
+                <a:latin typeface="Pretendard" pitchFamily="34" charset="0"/>
+                <a:ea typeface="Pretendard" pitchFamily="34" charset="-122"/>
+                <a:cs typeface="Pretendard" pitchFamily="34" charset="-120"/>
+              </a:rPr>
+              <a:t>기존 방식</a:t>
+            </a:r>
+            <a:endParaRPr lang="ko-KR" sz="1725" dirty="0">
+              <a:ea typeface="Pretendard"/>
+            </a:endParaRPr>
+          </a:p>
+        </p:txBody>
+      </p:sp>
+      <p:sp>
+        <p:nvSpPr>
+          <p:cNvPr id="11" name="Text 9"/>
+          <p:cNvSpPr txBox="1"/>
+          <p:nvPr/>
+        </p:nvSpPr>
+        <p:spPr>
+          <a:xfrm>
+            <a:off x="7296150" y="2171700"/>
+            <a:ext cx="4095750" cy="304800"/>
+          </a:xfrm>
+          <a:prstGeom prst="rect">
+            <a:avLst/>
+          </a:prstGeom>
+          <a:noFill/>
+          <a:ln/>
+        </p:spPr>
+        <p:txBody>
+          <a:bodyPr wrap="square" lIns="0" tIns="0" rIns="0" bIns="0" rtlCol="0" anchor="t"/>
+          <a:lstStyle/>
+          <a:p>
+            <a:pPr algn="l" indent="0" marL="0">
+              <a:buNone/>
+            </a:pPr>
+            <a:r>
+              <a:rPr lang="ko-KR" sz="1725" b="1" dirty="0">
+                <a:solidFill>
+                  <a:srgbClr val="FFFFFF"/>
+                </a:solidFill>
+                <a:latin typeface="Pretendard" pitchFamily="34" charset="0"/>
+                <a:ea typeface="Pretendard" pitchFamily="34" charset="-122"/>
+                <a:cs typeface="Pretendard" pitchFamily="34" charset="-120"/>
+              </a:rPr>
+              <a:t>개선 방식</a:t>
+            </a:r>
+            <a:endParaRPr lang="ko-KR" sz="1725" dirty="0">
+              <a:ea typeface="Pretendard"/>
+            </a:endParaRPr>
+          </a:p>
+        </p:txBody>
+      </p:sp>
+      <p:sp>
+        <p:nvSpPr>
+          <p:cNvPr id="12" name="Shape 10"/>
+          <p:cNvSpPr/>
+          <p:nvPr/>
+        </p:nvSpPr>
+        <p:spPr>
+          <a:xfrm>
+            <a:off x="7067550" y="2667000"/>
+            <a:ext cx="4591050" cy="2914650"/>
+          </a:xfrm>
+          <a:prstGeom prst="rect">
+            <a:avLst/>
+          </a:prstGeom>
+          <a:solidFill>
+            <a:srgbClr val="F4F7FB"/>
+          </a:solidFill>
+          <a:ln w="12700">
+            <a:solidFill>
+              <a:srgbClr val="F4F7FB"/>
+            </a:solidFill>
+            <a:prstDash val="solid"/>
+          </a:ln>
+        </p:spPr>
+      </p:sp>
+      <p:sp>
+        <p:nvSpPr>
+          <p:cNvPr id="13" name="Text 11"/>
+          <p:cNvSpPr txBox="1"/>
+          <p:nvPr/>
+        </p:nvSpPr>
+        <p:spPr>
+          <a:xfrm>
+            <a:off x="533400" y="2809875"/>
+            <a:ext cx="1562100" cy="361950"/>
+          </a:xfrm>
+          <a:prstGeom prst="rect">
+            <a:avLst/>
+          </a:prstGeom>
+          <a:noFill/>
+          <a:ln/>
+        </p:spPr>
+        <p:txBody>
+          <a:bodyPr wrap="square" lIns="0" tIns="0" rIns="0" bIns="0" rtlCol="0" anchor="t"/>
+          <a:lstStyle/>
+          <a:p>
+            <a:pPr algn="l" indent="0" marL="0">
+              <a:buNone/>
+            </a:pPr>
+            <a:r>
+              <a:rPr lang="ko-KR" sz="1950" b="1" dirty="0">
                 <a:solidFill>
                   <a:srgbClr val="192A40"/>
                 </a:solidFill>
@@ -2345,38 +2356,38 @@
               </a:rPr>
               <a:t>기록 도구</a:t>
             </a:r>
-            <a:endParaRPr lang="ko-KR" sz="1875" dirty="0">
-              <a:ea typeface="Pretendard"/>
-            </a:endParaRPr>
-          </a:p>
-        </p:txBody>
-      </p:sp>
-      <p:sp>
-        <p:nvSpPr>
-          <p:cNvPr id="13" name="Text 11"/>
-          <p:cNvSpPr txBox="1"/>
-          <p:nvPr/>
-        </p:nvSpPr>
-        <p:spPr>
-          <a:xfrm>
-            <a:off x="2390775" y="2466975"/>
-            <a:ext cx="4095750" cy="342900"/>
-          </a:xfrm>
-          <a:prstGeom prst="rect">
-            <a:avLst/>
-          </a:prstGeom>
-          <a:noFill/>
-          <a:ln/>
-        </p:spPr>
-        <p:txBody>
-          <a:bodyPr wrap="square" lIns="0" tIns="0" rIns="0" bIns="0" rtlCol="0" anchor="t"/>
-          <a:lstStyle/>
-          <a:p>
-            <a:pPr algn="l" indent="0" marL="0">
-              <a:buNone/>
-            </a:pPr>
-            <a:r>
-              <a:rPr lang="ko-KR" sz="1875" b="1" dirty="0">
+            <a:endParaRPr lang="ko-KR" sz="1950" dirty="0">
+              <a:ea typeface="Pretendard"/>
+            </a:endParaRPr>
+          </a:p>
+        </p:txBody>
+      </p:sp>
+      <p:sp>
+        <p:nvSpPr>
+          <p:cNvPr id="14" name="Text 12"/>
+          <p:cNvSpPr txBox="1"/>
+          <p:nvPr/>
+        </p:nvSpPr>
+        <p:spPr>
+          <a:xfrm>
+            <a:off x="2552700" y="2809875"/>
+            <a:ext cx="3524250" cy="361950"/>
+          </a:xfrm>
+          <a:prstGeom prst="rect">
+            <a:avLst/>
+          </a:prstGeom>
+          <a:noFill/>
+          <a:ln/>
+        </p:spPr>
+        <p:txBody>
+          <a:bodyPr wrap="square" lIns="0" tIns="0" rIns="0" bIns="0" rtlCol="0" anchor="t"/>
+          <a:lstStyle/>
+          <a:p>
+            <a:pPr algn="l" indent="0" marL="0">
+              <a:buNone/>
+            </a:pPr>
+            <a:r>
+              <a:rPr lang="ko-KR" sz="1950" b="1" dirty="0">
                 <a:solidFill>
                   <a:srgbClr val="192A40"/>
                 </a:solidFill>
@@ -2386,38 +2397,38 @@
               </a:rPr>
               <a:t>종이 체크리스트</a:t>
             </a:r>
-            <a:endParaRPr lang="ko-KR" sz="1875" dirty="0">
-              <a:ea typeface="Pretendard"/>
-            </a:endParaRPr>
-          </a:p>
-        </p:txBody>
-      </p:sp>
-      <p:sp>
-        <p:nvSpPr>
-          <p:cNvPr id="14" name="Text 12"/>
-          <p:cNvSpPr txBox="1"/>
-          <p:nvPr/>
-        </p:nvSpPr>
-        <p:spPr>
-          <a:xfrm>
-            <a:off x="2390775" y="2886075"/>
-            <a:ext cx="4095750" cy="352425"/>
-          </a:xfrm>
-          <a:prstGeom prst="rect">
-            <a:avLst/>
-          </a:prstGeom>
-          <a:noFill/>
-          <a:ln/>
-        </p:spPr>
-        <p:txBody>
-          <a:bodyPr wrap="square" lIns="0" tIns="0" rIns="0" bIns="0" rtlCol="0" anchor="t"/>
-          <a:lstStyle/>
-          <a:p>
-            <a:pPr algn="l" indent="0" marL="0">
-              <a:buNone/>
-            </a:pPr>
-            <a:r>
-              <a:rPr lang="ko-KR" sz="1575" dirty="0">
+            <a:endParaRPr lang="ko-KR" sz="1950" dirty="0">
+              <a:ea typeface="Pretendard"/>
+            </a:endParaRPr>
+          </a:p>
+        </p:txBody>
+      </p:sp>
+      <p:sp>
+        <p:nvSpPr>
+          <p:cNvPr id="15" name="Text 13"/>
+          <p:cNvSpPr txBox="1"/>
+          <p:nvPr/>
+        </p:nvSpPr>
+        <p:spPr>
+          <a:xfrm>
+            <a:off x="2552700" y="3209925"/>
+            <a:ext cx="3524250" cy="304800"/>
+          </a:xfrm>
+          <a:prstGeom prst="rect">
+            <a:avLst/>
+          </a:prstGeom>
+          <a:noFill/>
+          <a:ln/>
+        </p:spPr>
+        <p:txBody>
+          <a:bodyPr wrap="square" lIns="0" tIns="0" rIns="0" bIns="0" rtlCol="0" anchor="t"/>
+          <a:lstStyle/>
+          <a:p>
+            <a:pPr algn="l" indent="0" marL="0">
+              <a:buNone/>
+            </a:pPr>
+            <a:r>
+              <a:rPr lang="ko-KR" sz="1500" dirty="0">
                 <a:solidFill>
                   <a:srgbClr val="526174"/>
                 </a:solidFill>
@@ -2427,22 +2438,22 @@
               </a:rPr>
               <a:t>검수 내용을 종이에 기입</a:t>
             </a:r>
-            <a:endParaRPr lang="ko-KR" sz="1575" dirty="0">
-              <a:ea typeface="Pretendard"/>
-            </a:endParaRPr>
-          </a:p>
-        </p:txBody>
-      </p:sp>
-      <p:sp>
-        <p:nvSpPr>
-          <p:cNvPr id="15" name="Shape 13"/>
+            <a:endParaRPr lang="ko-KR" sz="1500" dirty="0">
+              <a:ea typeface="Pretendard"/>
+            </a:endParaRPr>
+          </a:p>
+        </p:txBody>
+      </p:sp>
+      <p:sp>
+        <p:nvSpPr>
+          <p:cNvPr id="16" name="Shape 14"/>
           <p:cNvSpPr/>
           <p:nvPr/>
         </p:nvSpPr>
         <p:spPr>
           <a:xfrm>
-            <a:off x="6677025" y="2733675"/>
-            <a:ext cx="361950" cy="0"/>
+            <a:off x="6515100" y="3057525"/>
+            <a:ext cx="342900" cy="0"/>
           </a:xfrm>
           <a:prstGeom prst="line">
             <a:avLst/>
@@ -2459,30 +2470,30 @@
       </p:sp>
       <p:sp>
         <p:nvSpPr>
-          <p:cNvPr id="16" name="Text 14"/>
-          <p:cNvSpPr txBox="1"/>
-          <p:nvPr/>
-        </p:nvSpPr>
-        <p:spPr>
-          <a:xfrm>
-            <a:off x="7315200" y="2466975"/>
-            <a:ext cx="4238625" cy="342900"/>
-          </a:xfrm>
-          <a:prstGeom prst="rect">
-            <a:avLst/>
-          </a:prstGeom>
-          <a:noFill/>
-          <a:ln/>
-        </p:spPr>
-        <p:txBody>
-          <a:bodyPr wrap="square" lIns="0" tIns="0" rIns="0" bIns="0" rtlCol="0" anchor="t"/>
-          <a:lstStyle/>
-          <a:p>
-            <a:pPr algn="l" indent="0" marL="0">
-              <a:buNone/>
-            </a:pPr>
-            <a:r>
-              <a:rPr lang="ko-KR" sz="1875" b="1" dirty="0">
+          <p:cNvPr id="17" name="Text 15"/>
+          <p:cNvSpPr txBox="1"/>
+          <p:nvPr/>
+        </p:nvSpPr>
+        <p:spPr>
+          <a:xfrm>
+            <a:off x="7296150" y="2809875"/>
+            <a:ext cx="4095750" cy="361950"/>
+          </a:xfrm>
+          <a:prstGeom prst="rect">
+            <a:avLst/>
+          </a:prstGeom>
+          <a:noFill/>
+          <a:ln/>
+        </p:spPr>
+        <p:txBody>
+          <a:bodyPr wrap="square" lIns="0" tIns="0" rIns="0" bIns="0" rtlCol="0" anchor="t"/>
+          <a:lstStyle/>
+          <a:p>
+            <a:pPr algn="l" indent="0" marL="0">
+              <a:buNone/>
+            </a:pPr>
+            <a:r>
+              <a:rPr lang="ko-KR" sz="1950" b="1" dirty="0">
                 <a:solidFill>
                   <a:srgbClr val="2459A6"/>
                 </a:solidFill>
@@ -2490,40 +2501,40 @@
                 <a:ea typeface="Pretendard" pitchFamily="34" charset="-122"/>
                 <a:cs typeface="Pretendard" pitchFamily="34" charset="-120"/>
               </a:rPr>
-              <a:t>태블릿에서 직접 기록</a:t>
-            </a:r>
-            <a:endParaRPr lang="ko-KR" sz="1875" dirty="0">
-              <a:ea typeface="Pretendard"/>
-            </a:endParaRPr>
-          </a:p>
-        </p:txBody>
-      </p:sp>
-      <p:sp>
-        <p:nvSpPr>
-          <p:cNvPr id="17" name="Text 15"/>
-          <p:cNvSpPr txBox="1"/>
-          <p:nvPr/>
-        </p:nvSpPr>
-        <p:spPr>
-          <a:xfrm>
-            <a:off x="7315200" y="2886075"/>
-            <a:ext cx="4238625" cy="352425"/>
-          </a:xfrm>
-          <a:prstGeom prst="rect">
-            <a:avLst/>
-          </a:prstGeom>
-          <a:noFill/>
-          <a:ln/>
-        </p:spPr>
-        <p:txBody>
-          <a:bodyPr wrap="square" lIns="0" tIns="0" rIns="0" bIns="0" rtlCol="0" anchor="t"/>
-          <a:lstStyle/>
-          <a:p>
-            <a:pPr algn="l" indent="0" marL="0">
-              <a:buNone/>
-            </a:pPr>
-            <a:r>
-              <a:rPr lang="ko-KR" sz="1575" dirty="0">
+              <a:t>태블릿 입력</a:t>
+            </a:r>
+            <a:endParaRPr lang="ko-KR" sz="1950" dirty="0">
+              <a:ea typeface="Pretendard"/>
+            </a:endParaRPr>
+          </a:p>
+        </p:txBody>
+      </p:sp>
+      <p:sp>
+        <p:nvSpPr>
+          <p:cNvPr id="18" name="Text 16"/>
+          <p:cNvSpPr txBox="1"/>
+          <p:nvPr/>
+        </p:nvSpPr>
+        <p:spPr>
+          <a:xfrm>
+            <a:off x="7296150" y="3209925"/>
+            <a:ext cx="4095750" cy="304800"/>
+          </a:xfrm>
+          <a:prstGeom prst="rect">
+            <a:avLst/>
+          </a:prstGeom>
+          <a:noFill/>
+          <a:ln/>
+        </p:spPr>
+        <p:txBody>
+          <a:bodyPr wrap="square" lIns="0" tIns="0" rIns="0" bIns="0" rtlCol="0" anchor="t"/>
+          <a:lstStyle/>
+          <a:p>
+            <a:pPr algn="l" indent="0" marL="0">
+              <a:buNone/>
+            </a:pPr>
+            <a:r>
+              <a:rPr lang="ko-KR" sz="1500" dirty="0">
                 <a:solidFill>
                   <a:srgbClr val="526174"/>
                 </a:solidFill>
@@ -2531,30 +2542,30 @@
                 <a:ea typeface="Pretendard" pitchFamily="34" charset="-122"/>
                 <a:cs typeface="Pretendard" pitchFamily="34" charset="-120"/>
               </a:rPr>
-              <a:t>상품 코드를 조회해 입력 시작</a:t>
-            </a:r>
-            <a:endParaRPr lang="ko-KR" sz="1575" dirty="0">
-              <a:ea typeface="Pretendard"/>
-            </a:endParaRPr>
-          </a:p>
-        </p:txBody>
-      </p:sp>
-      <p:sp>
-        <p:nvSpPr>
-          <p:cNvPr id="18" name="Shape 16"/>
+              <a:t>상품 코드를 조회해 기록 시작</a:t>
+            </a:r>
+            <a:endParaRPr lang="ko-KR" sz="1500" dirty="0">
+              <a:ea typeface="Pretendard"/>
+            </a:endParaRPr>
+          </a:p>
+        </p:txBody>
+      </p:sp>
+      <p:sp>
+        <p:nvSpPr>
+          <p:cNvPr id="19" name="Shape 17"/>
           <p:cNvSpPr/>
           <p:nvPr/>
         </p:nvSpPr>
         <p:spPr>
           <a:xfrm>
-            <a:off x="533400" y="3514725"/>
-            <a:ext cx="11125200" cy="0"/>
+            <a:off x="533400" y="3638550"/>
+            <a:ext cx="5772150" cy="0"/>
           </a:xfrm>
           <a:prstGeom prst="line">
             <a:avLst/>
           </a:prstGeom>
           <a:noFill/>
-          <a:ln w="14288">
+          <a:ln w="11430">
             <a:solidFill>
               <a:srgbClr val="CDD6E1"/>
             </a:solidFill>
@@ -2564,30 +2575,53 @@
       </p:sp>
       <p:sp>
         <p:nvSpPr>
-          <p:cNvPr id="19" name="Text 17"/>
-          <p:cNvSpPr txBox="1"/>
-          <p:nvPr/>
-        </p:nvSpPr>
-        <p:spPr>
-          <a:xfrm>
-            <a:off x="533400" y="3695700"/>
-            <a:ext cx="1619250" cy="419100"/>
-          </a:xfrm>
-          <a:prstGeom prst="rect">
-            <a:avLst/>
-          </a:prstGeom>
-          <a:noFill/>
-          <a:ln/>
-        </p:spPr>
-        <p:txBody>
-          <a:bodyPr wrap="square" lIns="0" tIns="0" rIns="0" bIns="0" rtlCol="0" anchor="t"/>
-          <a:lstStyle/>
-          <a:p>
-            <a:pPr algn="l" indent="0" marL="0">
-              <a:buNone/>
-            </a:pPr>
-            <a:r>
-              <a:rPr lang="ko-KR" sz="1875" b="1" dirty="0">
+          <p:cNvPr id="20" name="Shape 18"/>
+          <p:cNvSpPr/>
+          <p:nvPr/>
+        </p:nvSpPr>
+        <p:spPr>
+          <a:xfrm>
+            <a:off x="7296150" y="3638550"/>
+            <a:ext cx="4133850" cy="0"/>
+          </a:xfrm>
+          <a:prstGeom prst="line">
+            <a:avLst/>
+          </a:prstGeom>
+          <a:noFill/>
+          <a:ln w="11430">
+            <a:solidFill>
+              <a:srgbClr val="CDD6E1"/>
+            </a:solidFill>
+            <a:prstDash val="solid"/>
+          </a:ln>
+        </p:spPr>
+      </p:sp>
+      <p:sp>
+        <p:nvSpPr>
+          <p:cNvPr id="21" name="Text 19"/>
+          <p:cNvSpPr txBox="1"/>
+          <p:nvPr/>
+        </p:nvSpPr>
+        <p:spPr>
+          <a:xfrm>
+            <a:off x="533400" y="3781425"/>
+            <a:ext cx="1562100" cy="361950"/>
+          </a:xfrm>
+          <a:prstGeom prst="rect">
+            <a:avLst/>
+          </a:prstGeom>
+          <a:noFill/>
+          <a:ln/>
+        </p:spPr>
+        <p:txBody>
+          <a:bodyPr wrap="square" lIns="0" tIns="0" rIns="0" bIns="0" rtlCol="0" anchor="t"/>
+          <a:lstStyle/>
+          <a:p>
+            <a:pPr algn="l" indent="0" marL="0">
+              <a:buNone/>
+            </a:pPr>
+            <a:r>
+              <a:rPr lang="ko-KR" sz="1950" b="1" dirty="0">
                 <a:solidFill>
                   <a:srgbClr val="192A40"/>
                 </a:solidFill>
@@ -2597,38 +2631,38 @@
               </a:rPr>
               <a:t>업무 순서</a:t>
             </a:r>
-            <a:endParaRPr lang="ko-KR" sz="1875" dirty="0">
-              <a:ea typeface="Pretendard"/>
-            </a:endParaRPr>
-          </a:p>
-        </p:txBody>
-      </p:sp>
-      <p:sp>
-        <p:nvSpPr>
-          <p:cNvPr id="20" name="Text 18"/>
-          <p:cNvSpPr txBox="1"/>
-          <p:nvPr/>
-        </p:nvSpPr>
-        <p:spPr>
-          <a:xfrm>
-            <a:off x="2390775" y="3638550"/>
-            <a:ext cx="4095750" cy="342900"/>
-          </a:xfrm>
-          <a:prstGeom prst="rect">
-            <a:avLst/>
-          </a:prstGeom>
-          <a:noFill/>
-          <a:ln/>
-        </p:spPr>
-        <p:txBody>
-          <a:bodyPr wrap="square" lIns="0" tIns="0" rIns="0" bIns="0" rtlCol="0" anchor="t"/>
-          <a:lstStyle/>
-          <a:p>
-            <a:pPr algn="l" indent="0" marL="0">
-              <a:buNone/>
-            </a:pPr>
-            <a:r>
-              <a:rPr lang="ko-KR" sz="1875" b="1" dirty="0">
+            <a:endParaRPr lang="ko-KR" sz="1950" dirty="0">
+              <a:ea typeface="Pretendard"/>
+            </a:endParaRPr>
+          </a:p>
+        </p:txBody>
+      </p:sp>
+      <p:sp>
+        <p:nvSpPr>
+          <p:cNvPr id="22" name="Text 20"/>
+          <p:cNvSpPr txBox="1"/>
+          <p:nvPr/>
+        </p:nvSpPr>
+        <p:spPr>
+          <a:xfrm>
+            <a:off x="2552700" y="3781425"/>
+            <a:ext cx="3524250" cy="361950"/>
+          </a:xfrm>
+          <a:prstGeom prst="rect">
+            <a:avLst/>
+          </a:prstGeom>
+          <a:noFill/>
+          <a:ln/>
+        </p:spPr>
+        <p:txBody>
+          <a:bodyPr wrap="square" lIns="0" tIns="0" rIns="0" bIns="0" rtlCol="0" anchor="t"/>
+          <a:lstStyle/>
+          <a:p>
+            <a:pPr algn="l" indent="0" marL="0">
+              <a:buNone/>
+            </a:pPr>
+            <a:r>
+              <a:rPr lang="ko-KR" sz="1950" b="1" dirty="0">
                 <a:solidFill>
                   <a:srgbClr val="192A40"/>
                 </a:solidFill>
@@ -2636,40 +2670,40 @@
                 <a:ea typeface="Pretendard" pitchFamily="34" charset="-122"/>
                 <a:cs typeface="Pretendard" pitchFamily="34" charset="-120"/>
               </a:rPr>
-              <a:t>검수 후 엑셀에 재입력</a:t>
-            </a:r>
-            <a:endParaRPr lang="ko-KR" sz="1875" dirty="0">
-              <a:ea typeface="Pretendard"/>
-            </a:endParaRPr>
-          </a:p>
-        </p:txBody>
-      </p:sp>
-      <p:sp>
-        <p:nvSpPr>
-          <p:cNvPr id="21" name="Text 19"/>
-          <p:cNvSpPr txBox="1"/>
-          <p:nvPr/>
-        </p:nvSpPr>
-        <p:spPr>
-          <a:xfrm>
-            <a:off x="2390775" y="4057650"/>
-            <a:ext cx="4095750" cy="352425"/>
-          </a:xfrm>
-          <a:prstGeom prst="rect">
-            <a:avLst/>
-          </a:prstGeom>
-          <a:noFill/>
-          <a:ln/>
-        </p:spPr>
-        <p:txBody>
-          <a:bodyPr wrap="square" lIns="0" tIns="0" rIns="0" bIns="0" rtlCol="0" anchor="t"/>
-          <a:lstStyle/>
-          <a:p>
-            <a:pPr algn="l" indent="0" marL="0">
-              <a:buNone/>
-            </a:pPr>
-            <a:r>
-              <a:rPr lang="ko-KR" sz="1575" dirty="0">
+              <a:t>검수 후 재입력</a:t>
+            </a:r>
+            <a:endParaRPr lang="ko-KR" sz="1950" dirty="0">
+              <a:ea typeface="Pretendard"/>
+            </a:endParaRPr>
+          </a:p>
+        </p:txBody>
+      </p:sp>
+      <p:sp>
+        <p:nvSpPr>
+          <p:cNvPr id="23" name="Text 21"/>
+          <p:cNvSpPr txBox="1"/>
+          <p:nvPr/>
+        </p:nvSpPr>
+        <p:spPr>
+          <a:xfrm>
+            <a:off x="2552700" y="4181475"/>
+            <a:ext cx="3524250" cy="304800"/>
+          </a:xfrm>
+          <a:prstGeom prst="rect">
+            <a:avLst/>
+          </a:prstGeom>
+          <a:noFill/>
+          <a:ln/>
+        </p:spPr>
+        <p:txBody>
+          <a:bodyPr wrap="square" lIns="0" tIns="0" rIns="0" bIns="0" rtlCol="0" anchor="t"/>
+          <a:lstStyle/>
+          <a:p>
+            <a:pPr algn="l" indent="0" marL="0">
+              <a:buNone/>
+            </a:pPr>
+            <a:r>
+              <a:rPr lang="ko-KR" sz="1500" dirty="0">
                 <a:solidFill>
                   <a:srgbClr val="526174"/>
                 </a:solidFill>
@@ -2677,24 +2711,24 @@
                 <a:ea typeface="Pretendard" pitchFamily="34" charset="-122"/>
                 <a:cs typeface="Pretendard" pitchFamily="34" charset="-120"/>
               </a:rPr>
-              <a:t>검수와 기록 시점이 분리</a:t>
-            </a:r>
-            <a:endParaRPr lang="ko-KR" sz="1575" dirty="0">
-              <a:ea typeface="Pretendard"/>
-            </a:endParaRPr>
-          </a:p>
-        </p:txBody>
-      </p:sp>
-      <p:sp>
-        <p:nvSpPr>
-          <p:cNvPr id="22" name="Shape 20"/>
+              <a:t>종이 기록을 엑셀로 옮겨 작성</a:t>
+            </a:r>
+            <a:endParaRPr lang="ko-KR" sz="1500" dirty="0">
+              <a:ea typeface="Pretendard"/>
+            </a:endParaRPr>
+          </a:p>
+        </p:txBody>
+      </p:sp>
+      <p:sp>
+        <p:nvSpPr>
+          <p:cNvPr id="24" name="Shape 22"/>
           <p:cNvSpPr/>
           <p:nvPr/>
         </p:nvSpPr>
         <p:spPr>
           <a:xfrm>
-            <a:off x="6677025" y="3905250"/>
-            <a:ext cx="361950" cy="0"/>
+            <a:off x="6515100" y="4029075"/>
+            <a:ext cx="342900" cy="0"/>
           </a:xfrm>
           <a:prstGeom prst="line">
             <a:avLst/>
@@ -2711,30 +2745,30 @@
       </p:sp>
       <p:sp>
         <p:nvSpPr>
-          <p:cNvPr id="23" name="Text 21"/>
-          <p:cNvSpPr txBox="1"/>
-          <p:nvPr/>
-        </p:nvSpPr>
-        <p:spPr>
-          <a:xfrm>
-            <a:off x="7315200" y="3638550"/>
-            <a:ext cx="4238625" cy="342900"/>
-          </a:xfrm>
-          <a:prstGeom prst="rect">
-            <a:avLst/>
-          </a:prstGeom>
-          <a:noFill/>
-          <a:ln/>
-        </p:spPr>
-        <p:txBody>
-          <a:bodyPr wrap="square" lIns="0" tIns="0" rIns="0" bIns="0" rtlCol="0" anchor="t"/>
-          <a:lstStyle/>
-          <a:p>
-            <a:pPr algn="l" indent="0" marL="0">
-              <a:buNone/>
-            </a:pPr>
-            <a:r>
-              <a:rPr lang="ko-KR" sz="1875" b="1" dirty="0">
+          <p:cNvPr id="25" name="Text 23"/>
+          <p:cNvSpPr txBox="1"/>
+          <p:nvPr/>
+        </p:nvSpPr>
+        <p:spPr>
+          <a:xfrm>
+            <a:off x="7296150" y="3781425"/>
+            <a:ext cx="4095750" cy="361950"/>
+          </a:xfrm>
+          <a:prstGeom prst="rect">
+            <a:avLst/>
+          </a:prstGeom>
+          <a:noFill/>
+          <a:ln/>
+        </p:spPr>
+        <p:txBody>
+          <a:bodyPr wrap="square" lIns="0" tIns="0" rIns="0" bIns="0" rtlCol="0" anchor="t"/>
+          <a:lstStyle/>
+          <a:p>
+            <a:pPr algn="l" indent="0" marL="0">
+              <a:buNone/>
+            </a:pPr>
+            <a:r>
+              <a:rPr lang="ko-KR" sz="1950" b="1" dirty="0">
                 <a:solidFill>
                   <a:srgbClr val="2459A6"/>
                 </a:solidFill>
@@ -2742,40 +2776,40 @@
                 <a:ea typeface="Pretendard" pitchFamily="34" charset="-122"/>
                 <a:cs typeface="Pretendard" pitchFamily="34" charset="-120"/>
               </a:rPr>
-              <a:t>검수 단계에서 바로 저장</a:t>
-            </a:r>
-            <a:endParaRPr lang="ko-KR" sz="1875" dirty="0">
-              <a:ea typeface="Pretendard"/>
-            </a:endParaRPr>
-          </a:p>
-        </p:txBody>
-      </p:sp>
-      <p:sp>
-        <p:nvSpPr>
-          <p:cNvPr id="24" name="Text 22"/>
-          <p:cNvSpPr txBox="1"/>
-          <p:nvPr/>
-        </p:nvSpPr>
-        <p:spPr>
-          <a:xfrm>
-            <a:off x="7315200" y="4057650"/>
-            <a:ext cx="4238625" cy="352425"/>
-          </a:xfrm>
-          <a:prstGeom prst="rect">
-            <a:avLst/>
-          </a:prstGeom>
-          <a:noFill/>
-          <a:ln/>
-        </p:spPr>
-        <p:txBody>
-          <a:bodyPr wrap="square" lIns="0" tIns="0" rIns="0" bIns="0" rtlCol="0" anchor="t"/>
-          <a:lstStyle/>
-          <a:p>
-            <a:pPr algn="l" indent="0" marL="0">
-              <a:buNone/>
-            </a:pPr>
-            <a:r>
-              <a:rPr lang="ko-KR" sz="1575" dirty="0">
+              <a:t>현장에서 저장</a:t>
+            </a:r>
+            <a:endParaRPr lang="ko-KR" sz="1950" dirty="0">
+              <a:ea typeface="Pretendard"/>
+            </a:endParaRPr>
+          </a:p>
+        </p:txBody>
+      </p:sp>
+      <p:sp>
+        <p:nvSpPr>
+          <p:cNvPr id="26" name="Text 24"/>
+          <p:cNvSpPr txBox="1"/>
+          <p:nvPr/>
+        </p:nvSpPr>
+        <p:spPr>
+          <a:xfrm>
+            <a:off x="7296150" y="4181475"/>
+            <a:ext cx="4095750" cy="304800"/>
+          </a:xfrm>
+          <a:prstGeom prst="rect">
+            <a:avLst/>
+          </a:prstGeom>
+          <a:noFill/>
+          <a:ln/>
+        </p:spPr>
+        <p:txBody>
+          <a:bodyPr wrap="square" lIns="0" tIns="0" rIns="0" bIns="0" rtlCol="0" anchor="t"/>
+          <a:lstStyle/>
+          <a:p>
+            <a:pPr algn="l" indent="0" marL="0">
+              <a:buNone/>
+            </a:pPr>
+            <a:r>
+              <a:rPr lang="ko-KR" sz="1500" dirty="0">
                 <a:solidFill>
                   <a:srgbClr val="526174"/>
                 </a:solidFill>
@@ -2783,30 +2817,30 @@
                 <a:ea typeface="Pretendard" pitchFamily="34" charset="-122"/>
                 <a:cs typeface="Pretendard" pitchFamily="34" charset="-120"/>
               </a:rPr>
-              <a:t>현장에서 상태와 사진을 함께 입력</a:t>
-            </a:r>
-            <a:endParaRPr lang="ko-KR" sz="1575" dirty="0">
-              <a:ea typeface="Pretendard"/>
-            </a:endParaRPr>
-          </a:p>
-        </p:txBody>
-      </p:sp>
-      <p:sp>
-        <p:nvSpPr>
-          <p:cNvPr id="25" name="Shape 23"/>
+              <a:t>검수 단계에서 입력까지 완료</a:t>
+            </a:r>
+            <a:endParaRPr lang="ko-KR" sz="1500" dirty="0">
+              <a:ea typeface="Pretendard"/>
+            </a:endParaRPr>
+          </a:p>
+        </p:txBody>
+      </p:sp>
+      <p:sp>
+        <p:nvSpPr>
+          <p:cNvPr id="27" name="Shape 25"/>
           <p:cNvSpPr/>
           <p:nvPr/>
         </p:nvSpPr>
         <p:spPr>
           <a:xfrm>
-            <a:off x="533400" y="4686300"/>
-            <a:ext cx="11125200" cy="0"/>
+            <a:off x="533400" y="4610100"/>
+            <a:ext cx="5772150" cy="0"/>
           </a:xfrm>
           <a:prstGeom prst="line">
             <a:avLst/>
           </a:prstGeom>
           <a:noFill/>
-          <a:ln w="14288">
+          <a:ln w="11430">
             <a:solidFill>
               <a:srgbClr val="CDD6E1"/>
             </a:solidFill>
@@ -2816,30 +2850,53 @@
       </p:sp>
       <p:sp>
         <p:nvSpPr>
-          <p:cNvPr id="26" name="Text 24"/>
-          <p:cNvSpPr txBox="1"/>
-          <p:nvPr/>
-        </p:nvSpPr>
-        <p:spPr>
-          <a:xfrm>
-            <a:off x="533400" y="4867275"/>
-            <a:ext cx="1619250" cy="419100"/>
-          </a:xfrm>
-          <a:prstGeom prst="rect">
-            <a:avLst/>
-          </a:prstGeom>
-          <a:noFill/>
-          <a:ln/>
-        </p:spPr>
-        <p:txBody>
-          <a:bodyPr wrap="square" lIns="0" tIns="0" rIns="0" bIns="0" rtlCol="0" anchor="t"/>
-          <a:lstStyle/>
-          <a:p>
-            <a:pPr algn="l" indent="0" marL="0">
-              <a:buNone/>
-            </a:pPr>
-            <a:r>
-              <a:rPr lang="ko-KR" sz="1875" b="1" dirty="0">
+          <p:cNvPr id="28" name="Shape 26"/>
+          <p:cNvSpPr/>
+          <p:nvPr/>
+        </p:nvSpPr>
+        <p:spPr>
+          <a:xfrm>
+            <a:off x="7296150" y="4610100"/>
+            <a:ext cx="4133850" cy="0"/>
+          </a:xfrm>
+          <a:prstGeom prst="line">
+            <a:avLst/>
+          </a:prstGeom>
+          <a:noFill/>
+          <a:ln w="11430">
+            <a:solidFill>
+              <a:srgbClr val="CDD6E1"/>
+            </a:solidFill>
+            <a:prstDash val="solid"/>
+          </a:ln>
+        </p:spPr>
+      </p:sp>
+      <p:sp>
+        <p:nvSpPr>
+          <p:cNvPr id="29" name="Text 27"/>
+          <p:cNvSpPr txBox="1"/>
+          <p:nvPr/>
+        </p:nvSpPr>
+        <p:spPr>
+          <a:xfrm>
+            <a:off x="533400" y="4752975"/>
+            <a:ext cx="1562100" cy="361950"/>
+          </a:xfrm>
+          <a:prstGeom prst="rect">
+            <a:avLst/>
+          </a:prstGeom>
+          <a:noFill/>
+          <a:ln/>
+        </p:spPr>
+        <p:txBody>
+          <a:bodyPr wrap="square" lIns="0" tIns="0" rIns="0" bIns="0" rtlCol="0" anchor="t"/>
+          <a:lstStyle/>
+          <a:p>
+            <a:pPr algn="l" indent="0" marL="0">
+              <a:buNone/>
+            </a:pPr>
+            <a:r>
+              <a:rPr lang="ko-KR" sz="1950" b="1" dirty="0">
                 <a:solidFill>
                   <a:srgbClr val="192A40"/>
                 </a:solidFill>
@@ -2849,38 +2906,38 @@
               </a:rPr>
               <a:t>기록 구성</a:t>
             </a:r>
-            <a:endParaRPr lang="ko-KR" sz="1875" dirty="0">
-              <a:ea typeface="Pretendard"/>
-            </a:endParaRPr>
-          </a:p>
-        </p:txBody>
-      </p:sp>
-      <p:sp>
-        <p:nvSpPr>
-          <p:cNvPr id="27" name="Text 25"/>
-          <p:cNvSpPr txBox="1"/>
-          <p:nvPr/>
-        </p:nvSpPr>
-        <p:spPr>
-          <a:xfrm>
-            <a:off x="2390775" y="4810125"/>
-            <a:ext cx="4095750" cy="342900"/>
-          </a:xfrm>
-          <a:prstGeom prst="rect">
-            <a:avLst/>
-          </a:prstGeom>
-          <a:noFill/>
-          <a:ln/>
-        </p:spPr>
-        <p:txBody>
-          <a:bodyPr wrap="square" lIns="0" tIns="0" rIns="0" bIns="0" rtlCol="0" anchor="t"/>
-          <a:lstStyle/>
-          <a:p>
-            <a:pPr algn="l" indent="0" marL="0">
-              <a:buNone/>
-            </a:pPr>
-            <a:r>
-              <a:rPr lang="ko-KR" sz="1875" b="1" dirty="0">
+            <a:endParaRPr lang="ko-KR" sz="1950" dirty="0">
+              <a:ea typeface="Pretendard"/>
+            </a:endParaRPr>
+          </a:p>
+        </p:txBody>
+      </p:sp>
+      <p:sp>
+        <p:nvSpPr>
+          <p:cNvPr id="30" name="Text 28"/>
+          <p:cNvSpPr txBox="1"/>
+          <p:nvPr/>
+        </p:nvSpPr>
+        <p:spPr>
+          <a:xfrm>
+            <a:off x="2552700" y="4752975"/>
+            <a:ext cx="3524250" cy="361950"/>
+          </a:xfrm>
+          <a:prstGeom prst="rect">
+            <a:avLst/>
+          </a:prstGeom>
+          <a:noFill/>
+          <a:ln/>
+        </p:spPr>
+        <p:txBody>
+          <a:bodyPr wrap="square" lIns="0" tIns="0" rIns="0" bIns="0" rtlCol="0" anchor="t"/>
+          <a:lstStyle/>
+          <a:p>
+            <a:pPr algn="l" indent="0" marL="0">
+              <a:buNone/>
+            </a:pPr>
+            <a:r>
+              <a:rPr lang="ko-KR" sz="1950" b="1" dirty="0">
                 <a:solidFill>
                   <a:srgbClr val="192A40"/>
                 </a:solidFill>
@@ -2888,40 +2945,40 @@
                 <a:ea typeface="Pretendard" pitchFamily="34" charset="-122"/>
                 <a:cs typeface="Pretendard" pitchFamily="34" charset="-120"/>
               </a:rPr>
-              <a:t>체크리스트 내용 입력</a:t>
-            </a:r>
-            <a:endParaRPr lang="ko-KR" sz="1875" dirty="0">
-              <a:ea typeface="Pretendard"/>
-            </a:endParaRPr>
-          </a:p>
-        </p:txBody>
-      </p:sp>
-      <p:sp>
-        <p:nvSpPr>
-          <p:cNvPr id="28" name="Text 26"/>
-          <p:cNvSpPr txBox="1"/>
-          <p:nvPr/>
-        </p:nvSpPr>
-        <p:spPr>
-          <a:xfrm>
-            <a:off x="2390775" y="5229225"/>
-            <a:ext cx="4095750" cy="352425"/>
-          </a:xfrm>
-          <a:prstGeom prst="rect">
-            <a:avLst/>
-          </a:prstGeom>
-          <a:noFill/>
-          <a:ln/>
-        </p:spPr>
-        <p:txBody>
-          <a:bodyPr wrap="square" lIns="0" tIns="0" rIns="0" bIns="0" rtlCol="0" anchor="t"/>
-          <a:lstStyle/>
-          <a:p>
-            <a:pPr algn="l" indent="0" marL="0">
-              <a:buNone/>
-            </a:pPr>
-            <a:r>
-              <a:rPr lang="ko-KR" sz="1575" dirty="0">
+              <a:t>체크리스트 중심</a:t>
+            </a:r>
+            <a:endParaRPr lang="ko-KR" sz="1950" dirty="0">
+              <a:ea typeface="Pretendard"/>
+            </a:endParaRPr>
+          </a:p>
+        </p:txBody>
+      </p:sp>
+      <p:sp>
+        <p:nvSpPr>
+          <p:cNvPr id="31" name="Text 29"/>
+          <p:cNvSpPr txBox="1"/>
+          <p:nvPr/>
+        </p:nvSpPr>
+        <p:spPr>
+          <a:xfrm>
+            <a:off x="2552700" y="5153025"/>
+            <a:ext cx="3524250" cy="304800"/>
+          </a:xfrm>
+          <a:prstGeom prst="rect">
+            <a:avLst/>
+          </a:prstGeom>
+          <a:noFill/>
+          <a:ln/>
+        </p:spPr>
+        <p:txBody>
+          <a:bodyPr wrap="square" lIns="0" tIns="0" rIns="0" bIns="0" rtlCol="0" anchor="t"/>
+          <a:lstStyle/>
+          <a:p>
+            <a:pPr algn="l" indent="0" marL="0">
+              <a:buNone/>
+            </a:pPr>
+            <a:r>
+              <a:rPr lang="ko-KR" sz="1500" dirty="0">
                 <a:solidFill>
                   <a:srgbClr val="526174"/>
                 </a:solidFill>
@@ -2929,24 +2986,24 @@
                 <a:ea typeface="Pretendard" pitchFamily="34" charset="-122"/>
                 <a:cs typeface="Pretendard" pitchFamily="34" charset="-120"/>
               </a:rPr>
-              <a:t>종이에서 엑셀로 옮겨 작성</a:t>
-            </a:r>
-            <a:endParaRPr lang="ko-KR" sz="1575" dirty="0">
-              <a:ea typeface="Pretendard"/>
-            </a:endParaRPr>
-          </a:p>
-        </p:txBody>
-      </p:sp>
-      <p:sp>
-        <p:nvSpPr>
-          <p:cNvPr id="29" name="Shape 27"/>
+              <a:t>검수 내용을 문서에 기록</a:t>
+            </a:r>
+            <a:endParaRPr lang="ko-KR" sz="1500" dirty="0">
+              <a:ea typeface="Pretendard"/>
+            </a:endParaRPr>
+          </a:p>
+        </p:txBody>
+      </p:sp>
+      <p:sp>
+        <p:nvSpPr>
+          <p:cNvPr id="32" name="Shape 30"/>
           <p:cNvSpPr/>
           <p:nvPr/>
         </p:nvSpPr>
         <p:spPr>
           <a:xfrm>
-            <a:off x="6677025" y="5076825"/>
-            <a:ext cx="361950" cy="0"/>
+            <a:off x="6515100" y="5000625"/>
+            <a:ext cx="342900" cy="0"/>
           </a:xfrm>
           <a:prstGeom prst="line">
             <a:avLst/>
@@ -2963,30 +3020,30 @@
       </p:sp>
       <p:sp>
         <p:nvSpPr>
-          <p:cNvPr id="30" name="Text 28"/>
-          <p:cNvSpPr txBox="1"/>
-          <p:nvPr/>
-        </p:nvSpPr>
-        <p:spPr>
-          <a:xfrm>
-            <a:off x="7315200" y="4810125"/>
-            <a:ext cx="4238625" cy="342900"/>
-          </a:xfrm>
-          <a:prstGeom prst="rect">
-            <a:avLst/>
-          </a:prstGeom>
-          <a:noFill/>
-          <a:ln/>
-        </p:spPr>
-        <p:txBody>
-          <a:bodyPr wrap="square" lIns="0" tIns="0" rIns="0" bIns="0" rtlCol="0" anchor="t"/>
-          <a:lstStyle/>
-          <a:p>
-            <a:pPr algn="l" indent="0" marL="0">
-              <a:buNone/>
-            </a:pPr>
-            <a:r>
-              <a:rPr lang="ko-KR" sz="1875" b="1" dirty="0">
+          <p:cNvPr id="33" name="Text 31"/>
+          <p:cNvSpPr txBox="1"/>
+          <p:nvPr/>
+        </p:nvSpPr>
+        <p:spPr>
+          <a:xfrm>
+            <a:off x="7296150" y="4752975"/>
+            <a:ext cx="4095750" cy="361950"/>
+          </a:xfrm>
+          <a:prstGeom prst="rect">
+            <a:avLst/>
+          </a:prstGeom>
+          <a:noFill/>
+          <a:ln/>
+        </p:spPr>
+        <p:txBody>
+          <a:bodyPr wrap="square" lIns="0" tIns="0" rIns="0" bIns="0" rtlCol="0" anchor="t"/>
+          <a:lstStyle/>
+          <a:p>
+            <a:pPr algn="l" indent="0" marL="0">
+              <a:buNone/>
+            </a:pPr>
+            <a:r>
+              <a:rPr lang="ko-KR" sz="1950" b="1" dirty="0">
                 <a:solidFill>
                   <a:srgbClr val="2459A6"/>
                 </a:solidFill>
@@ -2994,24 +3051,106 @@
                 <a:ea typeface="Pretendard" pitchFamily="34" charset="-122"/>
                 <a:cs typeface="Pretendard" pitchFamily="34" charset="-120"/>
               </a:rPr>
-              <a:t>상태와 사진을 함께 저장</a:t>
-            </a:r>
-            <a:endParaRPr lang="ko-KR" sz="1875" dirty="0">
-              <a:ea typeface="Pretendard"/>
-            </a:endParaRPr>
-          </a:p>
-        </p:txBody>
-      </p:sp>
-      <p:sp>
-        <p:nvSpPr>
-          <p:cNvPr id="31" name="Text 29"/>
-          <p:cNvSpPr txBox="1"/>
-          <p:nvPr/>
-        </p:nvSpPr>
-        <p:spPr>
-          <a:xfrm>
-            <a:off x="7315200" y="5229225"/>
-            <a:ext cx="4238625" cy="352425"/>
+              <a:t>상태와 사진</a:t>
+            </a:r>
+            <a:endParaRPr lang="ko-KR" sz="1950" dirty="0">
+              <a:ea typeface="Pretendard"/>
+            </a:endParaRPr>
+          </a:p>
+        </p:txBody>
+      </p:sp>
+      <p:sp>
+        <p:nvSpPr>
+          <p:cNvPr id="34" name="Text 32"/>
+          <p:cNvSpPr txBox="1"/>
+          <p:nvPr/>
+        </p:nvSpPr>
+        <p:spPr>
+          <a:xfrm>
+            <a:off x="7296150" y="5153025"/>
+            <a:ext cx="4095750" cy="304800"/>
+          </a:xfrm>
+          <a:prstGeom prst="rect">
+            <a:avLst/>
+          </a:prstGeom>
+          <a:noFill/>
+          <a:ln/>
+        </p:spPr>
+        <p:txBody>
+          <a:bodyPr wrap="square" lIns="0" tIns="0" rIns="0" bIns="0" rtlCol="0" anchor="t"/>
+          <a:lstStyle/>
+          <a:p>
+            <a:pPr algn="l" indent="0" marL="0">
+              <a:buNone/>
+            </a:pPr>
+            <a:r>
+              <a:rPr lang="ko-KR" sz="1500" dirty="0">
+                <a:solidFill>
+                  <a:srgbClr val="526174"/>
+                </a:solidFill>
+                <a:latin typeface="Pretendard" pitchFamily="34" charset="0"/>
+                <a:ea typeface="Pretendard" pitchFamily="34" charset="-122"/>
+                <a:cs typeface="Pretendard" pitchFamily="34" charset="-120"/>
+              </a:rPr>
+              <a:t>확인한 상태와 사진을 함께 저장</a:t>
+            </a:r>
+            <a:endParaRPr lang="ko-KR" sz="1500" dirty="0">
+              <a:ea typeface="Pretendard"/>
+            </a:endParaRPr>
+          </a:p>
+        </p:txBody>
+      </p:sp>
+      <p:sp>
+        <p:nvSpPr>
+          <p:cNvPr id="35" name="Text 33"/>
+          <p:cNvSpPr txBox="1"/>
+          <p:nvPr/>
+        </p:nvSpPr>
+        <p:spPr>
+          <a:xfrm>
+            <a:off x="533400" y="5867400"/>
+            <a:ext cx="1428750" cy="285750"/>
+          </a:xfrm>
+          <a:prstGeom prst="rect">
+            <a:avLst/>
+          </a:prstGeom>
+          <a:noFill/>
+          <a:ln/>
+        </p:spPr>
+        <p:txBody>
+          <a:bodyPr wrap="square" lIns="0" tIns="0" rIns="0" bIns="0" rtlCol="0" anchor="t"/>
+          <a:lstStyle/>
+          <a:p>
+            <a:pPr algn="l" indent="0" marL="0">
+              <a:buNone/>
+            </a:pPr>
+            <a:r>
+              <a:rPr lang="ko-KR" sz="1350" b="1" dirty="0">
+                <a:solidFill>
+                  <a:srgbClr val="2459A6"/>
+                </a:solidFill>
+                <a:latin typeface="Pretendard" pitchFamily="34" charset="0"/>
+                <a:ea typeface="Pretendard" pitchFamily="34" charset="-122"/>
+                <a:cs typeface="Pretendard" pitchFamily="34" charset="-120"/>
+              </a:rPr>
+              <a:t>업무 책임</a:t>
+            </a:r>
+            <a:endParaRPr lang="ko-KR" sz="1350" dirty="0">
+              <a:ea typeface="Pretendard"/>
+            </a:endParaRPr>
+          </a:p>
+        </p:txBody>
+      </p:sp>
+      <p:sp>
+        <p:nvSpPr>
+          <p:cNvPr id="36" name="Text 34"/>
+          <p:cNvSpPr txBox="1"/>
+          <p:nvPr/>
+        </p:nvSpPr>
+        <p:spPr>
+          <a:xfrm>
+            <a:off x="2324100" y="5838825"/>
+            <a:ext cx="9334500" cy="333375"/>
           </a:xfrm>
           <a:prstGeom prst="rect">
             <a:avLst/>
@@ -3029,13 +3168,13 @@
             <a:r>
               <a:rPr lang="ko-KR" sz="1575" dirty="0">
                 <a:solidFill>
-                  <a:srgbClr val="526174"/>
-                </a:solidFill>
-                <a:latin typeface="Pretendard" pitchFamily="34" charset="0"/>
-                <a:ea typeface="Pretendard" pitchFamily="34" charset="-122"/>
-                <a:cs typeface="Pretendard" pitchFamily="34" charset="-120"/>
-              </a:rPr>
-              <a:t>담당자가 최종 검수를 확정</a:t>
+                  <a:srgbClr val="192A40"/>
+                </a:solidFill>
+                <a:latin typeface="Pretendard" pitchFamily="34" charset="0"/>
+                <a:ea typeface="Pretendard" pitchFamily="34" charset="-122"/>
+                <a:cs typeface="Pretendard" pitchFamily="34" charset="-120"/>
+              </a:rPr>
+              <a:t>최종 검수는 담당자가 확정합니다. 자동 환불은 수행하지 않습니다.</a:t>
             </a:r>
             <a:endParaRPr lang="ko-KR" sz="1575" dirty="0">
               <a:ea typeface="Pretendard"/>
@@ -3885,7 +4024,7 @@
         <p:spPr>
           <a:xfrm>
             <a:off x="533400" y="285750"/>
-            <a:ext cx="6191250" cy="171450"/>
+            <a:ext cx="8096250" cy="228600"/>
           </a:xfrm>
           <a:prstGeom prst="rect">
             <a:avLst/>
@@ -3909,7 +4048,7 @@
                 <a:ea typeface="Pretendard" pitchFamily="34" charset="-122"/>
                 <a:cs typeface="Pretendard" pitchFamily="34" charset="-120"/>
               </a:rPr>
-              <a:t>업무 개선 / 연습 비교</a:t>
+              <a:t>업무 개선 / 가상 연습</a:t>
             </a:r>
             <a:endParaRPr lang="ko-KR" sz="975" dirty="0">
               <a:ea typeface="Pretendard"/>
@@ -3919,7 +4058,89 @@
       </p:sp>
       <p:sp>
         <p:nvSpPr>
-          <p:cNvPr id="3" name="Shape 1"/>
+          <p:cNvPr id="3" name="Text 1"/>
+          <p:cNvSpPr txBox="1"/>
+          <p:nvPr/>
+        </p:nvSpPr>
+        <p:spPr>
+          <a:xfrm>
+            <a:off x="533400" y="752475"/>
+            <a:ext cx="11125200" cy="609600"/>
+          </a:xfrm>
+          <a:prstGeom prst="rect">
+            <a:avLst/>
+          </a:prstGeom>
+          <a:noFill/>
+          <a:ln/>
+        </p:spPr>
+        <p:txBody>
+          <a:bodyPr wrap="square" lIns="0" tIns="0" rIns="0" bIns="0" rtlCol="0" anchor="t"/>
+          <a:lstStyle/>
+          <a:p>
+            <a:pPr algn="l" indent="0" marL="0">
+              <a:buNone/>
+            </a:pPr>
+            <a:r>
+              <a:rPr lang="ko-KR" sz="3300" b="1" dirty="0">
+                <a:solidFill>
+                  <a:srgbClr val="192A40"/>
+                </a:solidFill>
+                <a:latin typeface="Pretendard" pitchFamily="34" charset="0"/>
+                <a:ea typeface="Pretendard" pitchFamily="34" charset="-122"/>
+                <a:cs typeface="Pretendard" pitchFamily="34" charset="-120"/>
+              </a:rPr>
+              <a:t>검수 시간과 입력 누락</a:t>
+            </a:r>
+            <a:endParaRPr lang="ko-KR" sz="3300" dirty="0">
+              <a:ea typeface="Pretendard"/>
+            </a:endParaRPr>
+          </a:p>
+        </p:txBody>
+      </p:sp>
+      <p:sp>
+        <p:nvSpPr>
+          <p:cNvPr id="4" name="Text 2"/>
+          <p:cNvSpPr txBox="1"/>
+          <p:nvPr/>
+        </p:nvSpPr>
+        <p:spPr>
+          <a:xfrm>
+            <a:off x="533400" y="1495425"/>
+            <a:ext cx="11125200" cy="342900"/>
+          </a:xfrm>
+          <a:prstGeom prst="rect">
+            <a:avLst/>
+          </a:prstGeom>
+          <a:noFill/>
+          <a:ln/>
+        </p:spPr>
+        <p:txBody>
+          <a:bodyPr wrap="square" lIns="0" tIns="0" rIns="0" bIns="0" rtlCol="0" anchor="t"/>
+          <a:lstStyle/>
+          <a:p>
+            <a:pPr algn="l" indent="0" marL="0">
+              <a:buNone/>
+            </a:pPr>
+            <a:r>
+              <a:rPr lang="ko-KR" sz="1575" dirty="0">
+                <a:solidFill>
+                  <a:srgbClr val="526174"/>
+                </a:solidFill>
+                <a:latin typeface="Pretendard" pitchFamily="34" charset="0"/>
+                <a:ea typeface="Pretendard" pitchFamily="34" charset="-122"/>
+                <a:cs typeface="Pretendard" pitchFamily="34" charset="-120"/>
+              </a:rPr>
+              <a:t>기존 방식과 개선 방식을 각각 20건씩 비교한 연습 자료입니다.</a:t>
+            </a:r>
+            <a:endParaRPr lang="ko-KR" sz="1575" dirty="0">
+              <a:ea typeface="Pretendard"/>
+            </a:endParaRPr>
+          </a:p>
+        </p:txBody>
+      </p:sp>
+      <p:sp>
+        <p:nvSpPr>
+          <p:cNvPr id="5" name="Shape 3"/>
           <p:cNvSpPr/>
           <p:nvPr/>
         </p:nvSpPr>
@@ -3932,7 +4153,7 @@
             <a:avLst/>
           </a:prstGeom>
           <a:noFill/>
-          <a:ln w="9525">
+          <a:ln w="11430">
             <a:solidFill>
               <a:srgbClr val="CDD6E1"/>
             </a:solidFill>
@@ -3942,14 +4163,14 @@
       </p:sp>
       <p:sp>
         <p:nvSpPr>
-          <p:cNvPr id="4" name="Text 2"/>
+          <p:cNvPr id="6" name="Text 4"/>
           <p:cNvSpPr txBox="1"/>
           <p:nvPr/>
         </p:nvSpPr>
         <p:spPr>
           <a:xfrm>
             <a:off x="533400" y="6496050"/>
-            <a:ext cx="7620000" cy="152400"/>
+            <a:ext cx="8096250" cy="190500"/>
           </a:xfrm>
           <a:prstGeom prst="rect">
             <a:avLst/>
@@ -3983,26 +4204,26 @@
       </p:sp>
       <p:sp>
         <p:nvSpPr>
-          <p:cNvPr id="5" name="Text 3"/>
+          <p:cNvPr id="7" name="Text 5"/>
           <p:cNvSpPr txBox="1"/>
           <p:nvPr/>
         </p:nvSpPr>
         <p:spPr>
           <a:xfrm>
             <a:off x="10763250" y="6477000"/>
-            <a:ext cx="895350" cy="190500"/>
-          </a:xfrm>
-          <a:prstGeom prst="rect">
-            <a:avLst/>
-          </a:prstGeom>
-          <a:noFill/>
-          <a:ln/>
-        </p:spPr>
-        <p:txBody>
-          <a:bodyPr wrap="square" lIns="0" tIns="0" rIns="0" bIns="0" rtlCol="0" anchor="t"/>
-          <a:lstStyle/>
-          <a:p>
-            <a:pPr algn="r" indent="0" marL="0">
+            <a:ext cx="895350" cy="228600"/>
+          </a:xfrm>
+          <a:prstGeom prst="rect">
+            <a:avLst/>
+          </a:prstGeom>
+          <a:noFill/>
+          <a:ln/>
+        </p:spPr>
+        <p:txBody>
+          <a:bodyPr wrap="square" lIns="0" tIns="0" rIns="0" bIns="0" rtlCol="0" anchor="t"/>
+          <a:lstStyle/>
+          <a:p>
+            <a:pPr algn="l" indent="0" marL="0">
               <a:buNone/>
             </a:pPr>
             <a:r>
@@ -4017,88 +4238,6 @@
               <a:t>04 / 06</a:t>
             </a:r>
             <a:endParaRPr lang="ko-KR" sz="1050" dirty="0">
-              <a:ea typeface="Pretendard"/>
-            </a:endParaRPr>
-          </a:p>
-        </p:txBody>
-      </p:sp>
-      <p:sp>
-        <p:nvSpPr>
-          <p:cNvPr id="6" name="Text 4"/>
-          <p:cNvSpPr txBox="1"/>
-          <p:nvPr/>
-        </p:nvSpPr>
-        <p:spPr>
-          <a:xfrm>
-            <a:off x="533400" y="752475"/>
-            <a:ext cx="11125200" cy="590550"/>
-          </a:xfrm>
-          <a:prstGeom prst="rect">
-            <a:avLst/>
-          </a:prstGeom>
-          <a:noFill/>
-          <a:ln/>
-        </p:spPr>
-        <p:txBody>
-          <a:bodyPr wrap="square" lIns="0" tIns="0" rIns="0" bIns="0" rtlCol="0" anchor="t"/>
-          <a:lstStyle/>
-          <a:p>
-            <a:pPr algn="l" indent="0" marL="0">
-              <a:buNone/>
-            </a:pPr>
-            <a:r>
-              <a:rPr lang="ko-KR" sz="3300" b="1" dirty="0">
-                <a:solidFill>
-                  <a:srgbClr val="192A40"/>
-                </a:solidFill>
-                <a:latin typeface="Pretendard" pitchFamily="34" charset="0"/>
-                <a:ea typeface="Pretendard" pitchFamily="34" charset="-122"/>
-                <a:cs typeface="Pretendard" pitchFamily="34" charset="-120"/>
-              </a:rPr>
-              <a:t>연습 결과와 확인 범위</a:t>
-            </a:r>
-            <a:endParaRPr lang="ko-KR" sz="3300" dirty="0">
-              <a:ea typeface="Pretendard"/>
-            </a:endParaRPr>
-          </a:p>
-        </p:txBody>
-      </p:sp>
-      <p:sp>
-        <p:nvSpPr>
-          <p:cNvPr id="7" name="Text 5"/>
-          <p:cNvSpPr txBox="1"/>
-          <p:nvPr/>
-        </p:nvSpPr>
-        <p:spPr>
-          <a:xfrm>
-            <a:off x="533400" y="1495425"/>
-            <a:ext cx="11125200" cy="323850"/>
-          </a:xfrm>
-          <a:prstGeom prst="rect">
-            <a:avLst/>
-          </a:prstGeom>
-          <a:noFill/>
-          <a:ln/>
-        </p:spPr>
-        <p:txBody>
-          <a:bodyPr wrap="square" lIns="0" tIns="0" rIns="0" bIns="0" rtlCol="0" anchor="t"/>
-          <a:lstStyle/>
-          <a:p>
-            <a:pPr algn="l" indent="0" marL="0">
-              <a:buNone/>
-            </a:pPr>
-            <a:r>
-              <a:rPr lang="ko-KR" sz="1575" dirty="0">
-                <a:solidFill>
-                  <a:srgbClr val="526174"/>
-                </a:solidFill>
-                <a:latin typeface="Pretendard" pitchFamily="34" charset="0"/>
-                <a:ea typeface="Pretendard" pitchFamily="34" charset="-122"/>
-                <a:cs typeface="Pretendard" pitchFamily="34" charset="-120"/>
-              </a:rPr>
-              <a:t>기존 20건과 개선 20건을 같은 기준으로 비교한 가상 자료입니다.</a:t>
-            </a:r>
-            <a:endParaRPr lang="ko-KR" sz="1575" dirty="0">
               <a:ea typeface="Pretendard"/>
             </a:endParaRPr>
           </a:p>
@@ -4112,8 +4251,1017 @@
         </p:nvSpPr>
         <p:spPr>
           <a:xfrm>
-            <a:off x="533400" y="2085975"/>
-            <a:ext cx="11125200" cy="1152525"/>
+            <a:off x="6096000" y="2133600"/>
+            <a:ext cx="0" cy="3467100"/>
+          </a:xfrm>
+          <a:prstGeom prst="line">
+            <a:avLst/>
+          </a:prstGeom>
+          <a:noFill/>
+          <a:ln w="11430">
+            <a:solidFill>
+              <a:srgbClr val="CDD6E1"/>
+            </a:solidFill>
+            <a:prstDash val="solid"/>
+          </a:ln>
+        </p:spPr>
+      </p:sp>
+      <p:sp>
+        <p:nvSpPr>
+          <p:cNvPr id="9" name="Text 7"/>
+          <p:cNvSpPr txBox="1"/>
+          <p:nvPr/>
+        </p:nvSpPr>
+        <p:spPr>
+          <a:xfrm>
+            <a:off x="533400" y="2114550"/>
+            <a:ext cx="4953000" cy="400050"/>
+          </a:xfrm>
+          <a:prstGeom prst="rect">
+            <a:avLst/>
+          </a:prstGeom>
+          <a:noFill/>
+          <a:ln/>
+        </p:spPr>
+        <p:txBody>
+          <a:bodyPr wrap="square" lIns="0" tIns="0" rIns="0" bIns="0" rtlCol="0" anchor="t"/>
+          <a:lstStyle/>
+          <a:p>
+            <a:pPr algn="l" indent="0" marL="0">
+              <a:buNone/>
+            </a:pPr>
+            <a:r>
+              <a:rPr lang="ko-KR" sz="2100" b="1" dirty="0">
+                <a:solidFill>
+                  <a:srgbClr val="192A40"/>
+                </a:solidFill>
+                <a:latin typeface="Pretendard" pitchFamily="34" charset="0"/>
+                <a:ea typeface="Pretendard" pitchFamily="34" charset="-122"/>
+                <a:cs typeface="Pretendard" pitchFamily="34" charset="-120"/>
+              </a:rPr>
+              <a:t>건당 평균 검수 시간</a:t>
+            </a:r>
+            <a:endParaRPr lang="ko-KR" sz="2100" dirty="0">
+              <a:ea typeface="Pretendard"/>
+            </a:endParaRPr>
+          </a:p>
+        </p:txBody>
+      </p:sp>
+      <p:sp>
+        <p:nvSpPr>
+          <p:cNvPr id="10" name="Text 8"/>
+          <p:cNvSpPr txBox="1"/>
+          <p:nvPr/>
+        </p:nvSpPr>
+        <p:spPr>
+          <a:xfrm>
+            <a:off x="533400" y="2762250"/>
+            <a:ext cx="1524000" cy="266700"/>
+          </a:xfrm>
+          <a:prstGeom prst="rect">
+            <a:avLst/>
+          </a:prstGeom>
+          <a:noFill/>
+          <a:ln/>
+        </p:spPr>
+        <p:txBody>
+          <a:bodyPr wrap="square" lIns="0" tIns="0" rIns="0" bIns="0" rtlCol="0" anchor="t"/>
+          <a:lstStyle/>
+          <a:p>
+            <a:pPr algn="l" indent="0" marL="0">
+              <a:buNone/>
+            </a:pPr>
+            <a:r>
+              <a:rPr lang="ko-KR" sz="1350" b="1" dirty="0">
+                <a:solidFill>
+                  <a:srgbClr val="526174"/>
+                </a:solidFill>
+                <a:latin typeface="Pretendard" pitchFamily="34" charset="0"/>
+                <a:ea typeface="Pretendard" pitchFamily="34" charset="-122"/>
+                <a:cs typeface="Pretendard" pitchFamily="34" charset="-120"/>
+              </a:rPr>
+              <a:t>기존</a:t>
+            </a:r>
+            <a:endParaRPr lang="ko-KR" sz="1350" dirty="0">
+              <a:ea typeface="Pretendard"/>
+            </a:endParaRPr>
+          </a:p>
+        </p:txBody>
+      </p:sp>
+      <p:sp>
+        <p:nvSpPr>
+          <p:cNvPr id="11" name="Text 9"/>
+          <p:cNvSpPr txBox="1"/>
+          <p:nvPr/>
+        </p:nvSpPr>
+        <p:spPr>
+          <a:xfrm>
+            <a:off x="3314700" y="2762250"/>
+            <a:ext cx="1905000" cy="266700"/>
+          </a:xfrm>
+          <a:prstGeom prst="rect">
+            <a:avLst/>
+          </a:prstGeom>
+          <a:noFill/>
+          <a:ln/>
+        </p:spPr>
+        <p:txBody>
+          <a:bodyPr wrap="square" lIns="0" tIns="0" rIns="0" bIns="0" rtlCol="0" anchor="t"/>
+          <a:lstStyle/>
+          <a:p>
+            <a:pPr algn="l" indent="0" marL="0">
+              <a:buNone/>
+            </a:pPr>
+            <a:r>
+              <a:rPr lang="ko-KR" sz="1350" b="1" dirty="0">
+                <a:solidFill>
+                  <a:srgbClr val="2459A6"/>
+                </a:solidFill>
+                <a:latin typeface="Pretendard" pitchFamily="34" charset="0"/>
+                <a:ea typeface="Pretendard" pitchFamily="34" charset="-122"/>
+                <a:cs typeface="Pretendard" pitchFamily="34" charset="-120"/>
+              </a:rPr>
+              <a:t>개선</a:t>
+            </a:r>
+            <a:endParaRPr lang="ko-KR" sz="1350" dirty="0">
+              <a:ea typeface="Pretendard"/>
+            </a:endParaRPr>
+          </a:p>
+        </p:txBody>
+      </p:sp>
+      <p:sp>
+        <p:nvSpPr>
+          <p:cNvPr id="12" name="Text 10"/>
+          <p:cNvSpPr txBox="1"/>
+          <p:nvPr/>
+        </p:nvSpPr>
+        <p:spPr>
+          <a:xfrm>
+            <a:off x="533400" y="3095625"/>
+            <a:ext cx="1333500" cy="914400"/>
+          </a:xfrm>
+          <a:prstGeom prst="rect">
+            <a:avLst/>
+          </a:prstGeom>
+          <a:noFill/>
+          <a:ln/>
+        </p:spPr>
+        <p:txBody>
+          <a:bodyPr wrap="square" lIns="0" tIns="0" rIns="0" bIns="0" rtlCol="0" anchor="t"/>
+          <a:lstStyle/>
+          <a:p>
+            <a:pPr algn="l" indent="0" marL="0">
+              <a:buNone/>
+            </a:pPr>
+            <a:r>
+              <a:rPr lang="ko-KR" sz="5250" b="1" dirty="0">
+                <a:solidFill>
+                  <a:srgbClr val="526174"/>
+                </a:solidFill>
+                <a:latin typeface="Pretendard" pitchFamily="34" charset="0"/>
+                <a:ea typeface="Pretendard" pitchFamily="34" charset="-122"/>
+                <a:cs typeface="Pretendard" pitchFamily="34" charset="-120"/>
+              </a:rPr>
+              <a:t>16</a:t>
+            </a:r>
+            <a:endParaRPr lang="ko-KR" sz="5250" dirty="0">
+              <a:ea typeface="Pretendard"/>
+            </a:endParaRPr>
+          </a:p>
+        </p:txBody>
+      </p:sp>
+      <p:sp>
+        <p:nvSpPr>
+          <p:cNvPr id="13" name="Text 11"/>
+          <p:cNvSpPr txBox="1"/>
+          <p:nvPr/>
+        </p:nvSpPr>
+        <p:spPr>
+          <a:xfrm>
+            <a:off x="1562100" y="3467100"/>
+            <a:ext cx="571500" cy="428625"/>
+          </a:xfrm>
+          <a:prstGeom prst="rect">
+            <a:avLst/>
+          </a:prstGeom>
+          <a:noFill/>
+          <a:ln/>
+        </p:spPr>
+        <p:txBody>
+          <a:bodyPr wrap="square" lIns="0" tIns="0" rIns="0" bIns="0" rtlCol="0" anchor="t"/>
+          <a:lstStyle/>
+          <a:p>
+            <a:pPr algn="l" indent="0" marL="0">
+              <a:buNone/>
+            </a:pPr>
+            <a:r>
+              <a:rPr lang="ko-KR" sz="2100" dirty="0">
+                <a:solidFill>
+                  <a:srgbClr val="526174"/>
+                </a:solidFill>
+                <a:latin typeface="Pretendard" pitchFamily="34" charset="0"/>
+                <a:ea typeface="Pretendard" pitchFamily="34" charset="-122"/>
+                <a:cs typeface="Pretendard" pitchFamily="34" charset="-120"/>
+              </a:rPr>
+              <a:t>분</a:t>
+            </a:r>
+            <a:endParaRPr lang="ko-KR" sz="2100" dirty="0">
+              <a:ea typeface="Pretendard"/>
+            </a:endParaRPr>
+          </a:p>
+        </p:txBody>
+      </p:sp>
+      <p:sp>
+        <p:nvSpPr>
+          <p:cNvPr id="14" name="Shape 12"/>
+          <p:cNvSpPr/>
+          <p:nvPr/>
+        </p:nvSpPr>
+        <p:spPr>
+          <a:xfrm>
+            <a:off x="2324100" y="3552825"/>
+            <a:ext cx="609600" cy="0"/>
+          </a:xfrm>
+          <a:prstGeom prst="line">
+            <a:avLst/>
+          </a:prstGeom>
+          <a:noFill/>
+          <a:ln w="19050">
+            <a:solidFill>
+              <a:srgbClr val="2459A6"/>
+            </a:solidFill>
+            <a:prstDash val="solid"/>
+            <a:tailEnd type="triangle"/>
+          </a:ln>
+        </p:spPr>
+      </p:sp>
+      <p:sp>
+        <p:nvSpPr>
+          <p:cNvPr id="15" name="Text 13"/>
+          <p:cNvSpPr txBox="1"/>
+          <p:nvPr/>
+        </p:nvSpPr>
+        <p:spPr>
+          <a:xfrm>
+            <a:off x="3314700" y="3019425"/>
+            <a:ext cx="1238250" cy="1000125"/>
+          </a:xfrm>
+          <a:prstGeom prst="rect">
+            <a:avLst/>
+          </a:prstGeom>
+          <a:noFill/>
+          <a:ln/>
+        </p:spPr>
+        <p:txBody>
+          <a:bodyPr wrap="square" lIns="0" tIns="0" rIns="0" bIns="0" rtlCol="0" anchor="t"/>
+          <a:lstStyle/>
+          <a:p>
+            <a:pPr algn="l" indent="0" marL="0">
+              <a:buNone/>
+            </a:pPr>
+            <a:r>
+              <a:rPr lang="ko-KR" sz="6150" b="1" dirty="0">
+                <a:solidFill>
+                  <a:srgbClr val="2459A6"/>
+                </a:solidFill>
+                <a:latin typeface="Pretendard" pitchFamily="34" charset="0"/>
+                <a:ea typeface="Pretendard" pitchFamily="34" charset="-122"/>
+                <a:cs typeface="Pretendard" pitchFamily="34" charset="-120"/>
+              </a:rPr>
+              <a:t>9</a:t>
+            </a:r>
+            <a:endParaRPr lang="ko-KR" sz="6150" dirty="0">
+              <a:ea typeface="Pretendard"/>
+            </a:endParaRPr>
+          </a:p>
+        </p:txBody>
+      </p:sp>
+      <p:sp>
+        <p:nvSpPr>
+          <p:cNvPr id="16" name="Text 14"/>
+          <p:cNvSpPr txBox="1"/>
+          <p:nvPr/>
+        </p:nvSpPr>
+        <p:spPr>
+          <a:xfrm>
+            <a:off x="3886200" y="3467100"/>
+            <a:ext cx="571500" cy="428625"/>
+          </a:xfrm>
+          <a:prstGeom prst="rect">
+            <a:avLst/>
+          </a:prstGeom>
+          <a:noFill/>
+          <a:ln/>
+        </p:spPr>
+        <p:txBody>
+          <a:bodyPr wrap="square" lIns="0" tIns="0" rIns="0" bIns="0" rtlCol="0" anchor="t"/>
+          <a:lstStyle/>
+          <a:p>
+            <a:pPr algn="l" indent="0" marL="0">
+              <a:buNone/>
+            </a:pPr>
+            <a:r>
+              <a:rPr lang="ko-KR" sz="2100" dirty="0">
+                <a:solidFill>
+                  <a:srgbClr val="2459A6"/>
+                </a:solidFill>
+                <a:latin typeface="Pretendard" pitchFamily="34" charset="0"/>
+                <a:ea typeface="Pretendard" pitchFamily="34" charset="-122"/>
+                <a:cs typeface="Pretendard" pitchFamily="34" charset="-120"/>
+              </a:rPr>
+              <a:t>분</a:t>
+            </a:r>
+            <a:endParaRPr lang="ko-KR" sz="2100" dirty="0">
+              <a:ea typeface="Pretendard"/>
+            </a:endParaRPr>
+          </a:p>
+        </p:txBody>
+      </p:sp>
+      <p:sp>
+        <p:nvSpPr>
+          <p:cNvPr id="17" name="Text 15"/>
+          <p:cNvSpPr txBox="1"/>
+          <p:nvPr/>
+        </p:nvSpPr>
+        <p:spPr>
+          <a:xfrm>
+            <a:off x="533400" y="4533900"/>
+            <a:ext cx="619125" cy="285750"/>
+          </a:xfrm>
+          <a:prstGeom prst="rect">
+            <a:avLst/>
+          </a:prstGeom>
+          <a:noFill/>
+          <a:ln/>
+        </p:spPr>
+        <p:txBody>
+          <a:bodyPr wrap="square" lIns="0" tIns="0" rIns="0" bIns="0" rtlCol="0" anchor="t"/>
+          <a:lstStyle/>
+          <a:p>
+            <a:pPr algn="l" indent="0" marL="0">
+              <a:buNone/>
+            </a:pPr>
+            <a:r>
+              <a:rPr lang="ko-KR" sz="1350" dirty="0">
+                <a:solidFill>
+                  <a:srgbClr val="526174"/>
+                </a:solidFill>
+                <a:latin typeface="Pretendard" pitchFamily="34" charset="0"/>
+                <a:ea typeface="Pretendard" pitchFamily="34" charset="-122"/>
+                <a:cs typeface="Pretendard" pitchFamily="34" charset="-120"/>
+              </a:rPr>
+              <a:t>기존</a:t>
+            </a:r>
+            <a:endParaRPr lang="ko-KR" sz="1350" dirty="0">
+              <a:ea typeface="Pretendard"/>
+            </a:endParaRPr>
+          </a:p>
+        </p:txBody>
+      </p:sp>
+      <p:sp>
+        <p:nvSpPr>
+          <p:cNvPr id="18" name="Shape 16"/>
+          <p:cNvSpPr/>
+          <p:nvPr/>
+        </p:nvSpPr>
+        <p:spPr>
+          <a:xfrm>
+            <a:off x="1257300" y="4552950"/>
+            <a:ext cx="4191000" cy="171450"/>
+          </a:xfrm>
+          <a:prstGeom prst="rect">
+            <a:avLst/>
+          </a:prstGeom>
+          <a:solidFill>
+            <a:srgbClr val="F0F3F7"/>
+          </a:solidFill>
+          <a:ln w="12700">
+            <a:solidFill>
+              <a:srgbClr val="F0F3F7"/>
+            </a:solidFill>
+            <a:prstDash val="solid"/>
+          </a:ln>
+        </p:spPr>
+      </p:sp>
+      <p:sp>
+        <p:nvSpPr>
+          <p:cNvPr id="19" name="Shape 17"/>
+          <p:cNvSpPr/>
+          <p:nvPr/>
+        </p:nvSpPr>
+        <p:spPr>
+          <a:xfrm>
+            <a:off x="1257300" y="4552950"/>
+            <a:ext cx="4191000" cy="171450"/>
+          </a:xfrm>
+          <a:prstGeom prst="rect">
+            <a:avLst/>
+          </a:prstGeom>
+          <a:solidFill>
+            <a:srgbClr val="BCC8D8"/>
+          </a:solidFill>
+          <a:ln w="12700">
+            <a:solidFill>
+              <a:srgbClr val="BCC8D8"/>
+            </a:solidFill>
+            <a:prstDash val="solid"/>
+          </a:ln>
+        </p:spPr>
+      </p:sp>
+      <p:sp>
+        <p:nvSpPr>
+          <p:cNvPr id="20" name="Text 18"/>
+          <p:cNvSpPr txBox="1"/>
+          <p:nvPr/>
+        </p:nvSpPr>
+        <p:spPr>
+          <a:xfrm>
+            <a:off x="533400" y="5038725"/>
+            <a:ext cx="619125" cy="285750"/>
+          </a:xfrm>
+          <a:prstGeom prst="rect">
+            <a:avLst/>
+          </a:prstGeom>
+          <a:noFill/>
+          <a:ln/>
+        </p:spPr>
+        <p:txBody>
+          <a:bodyPr wrap="square" lIns="0" tIns="0" rIns="0" bIns="0" rtlCol="0" anchor="t"/>
+          <a:lstStyle/>
+          <a:p>
+            <a:pPr algn="l" indent="0" marL="0">
+              <a:buNone/>
+            </a:pPr>
+            <a:r>
+              <a:rPr lang="ko-KR" sz="1350" dirty="0">
+                <a:solidFill>
+                  <a:srgbClr val="526174"/>
+                </a:solidFill>
+                <a:latin typeface="Pretendard" pitchFamily="34" charset="0"/>
+                <a:ea typeface="Pretendard" pitchFamily="34" charset="-122"/>
+                <a:cs typeface="Pretendard" pitchFamily="34" charset="-120"/>
+              </a:rPr>
+              <a:t>개선</a:t>
+            </a:r>
+            <a:endParaRPr lang="ko-KR" sz="1350" dirty="0">
+              <a:ea typeface="Pretendard"/>
+            </a:endParaRPr>
+          </a:p>
+        </p:txBody>
+      </p:sp>
+      <p:sp>
+        <p:nvSpPr>
+          <p:cNvPr id="21" name="Shape 19"/>
+          <p:cNvSpPr/>
+          <p:nvPr/>
+        </p:nvSpPr>
+        <p:spPr>
+          <a:xfrm>
+            <a:off x="1257300" y="5057775"/>
+            <a:ext cx="4191000" cy="171450"/>
+          </a:xfrm>
+          <a:prstGeom prst="rect">
+            <a:avLst/>
+          </a:prstGeom>
+          <a:solidFill>
+            <a:srgbClr val="F0F3F7"/>
+          </a:solidFill>
+          <a:ln w="12700">
+            <a:solidFill>
+              <a:srgbClr val="F0F3F7"/>
+            </a:solidFill>
+            <a:prstDash val="solid"/>
+          </a:ln>
+        </p:spPr>
+      </p:sp>
+      <p:sp>
+        <p:nvSpPr>
+          <p:cNvPr id="22" name="Shape 20"/>
+          <p:cNvSpPr/>
+          <p:nvPr/>
+        </p:nvSpPr>
+        <p:spPr>
+          <a:xfrm>
+            <a:off x="1257300" y="5057775"/>
+            <a:ext cx="2357438" cy="171450"/>
+          </a:xfrm>
+          <a:prstGeom prst="rect">
+            <a:avLst/>
+          </a:prstGeom>
+          <a:solidFill>
+            <a:srgbClr val="2459A6"/>
+          </a:solidFill>
+          <a:ln w="12700">
+            <a:solidFill>
+              <a:srgbClr val="2459A6"/>
+            </a:solidFill>
+            <a:prstDash val="solid"/>
+          </a:ln>
+        </p:spPr>
+      </p:sp>
+      <p:sp>
+        <p:nvSpPr>
+          <p:cNvPr id="23" name="Text 21"/>
+          <p:cNvSpPr txBox="1"/>
+          <p:nvPr/>
+        </p:nvSpPr>
+        <p:spPr>
+          <a:xfrm>
+            <a:off x="6705600" y="2114550"/>
+            <a:ext cx="4953000" cy="400050"/>
+          </a:xfrm>
+          <a:prstGeom prst="rect">
+            <a:avLst/>
+          </a:prstGeom>
+          <a:noFill/>
+          <a:ln/>
+        </p:spPr>
+        <p:txBody>
+          <a:bodyPr wrap="square" lIns="0" tIns="0" rIns="0" bIns="0" rtlCol="0" anchor="t"/>
+          <a:lstStyle/>
+          <a:p>
+            <a:pPr algn="l" indent="0" marL="0">
+              <a:buNone/>
+            </a:pPr>
+            <a:r>
+              <a:rPr lang="ko-KR" sz="2100" b="1" dirty="0">
+                <a:solidFill>
+                  <a:srgbClr val="192A40"/>
+                </a:solidFill>
+                <a:latin typeface="Pretendard" pitchFamily="34" charset="0"/>
+                <a:ea typeface="Pretendard" pitchFamily="34" charset="-122"/>
+                <a:cs typeface="Pretendard" pitchFamily="34" charset="-120"/>
+              </a:rPr>
+              <a:t>입력 누락</a:t>
+            </a:r>
+            <a:endParaRPr lang="ko-KR" sz="2100" dirty="0">
+              <a:ea typeface="Pretendard"/>
+            </a:endParaRPr>
+          </a:p>
+        </p:txBody>
+      </p:sp>
+      <p:sp>
+        <p:nvSpPr>
+          <p:cNvPr id="24" name="Text 22"/>
+          <p:cNvSpPr txBox="1"/>
+          <p:nvPr/>
+        </p:nvSpPr>
+        <p:spPr>
+          <a:xfrm>
+            <a:off x="6705600" y="2762250"/>
+            <a:ext cx="1524000" cy="266700"/>
+          </a:xfrm>
+          <a:prstGeom prst="rect">
+            <a:avLst/>
+          </a:prstGeom>
+          <a:noFill/>
+          <a:ln/>
+        </p:spPr>
+        <p:txBody>
+          <a:bodyPr wrap="square" lIns="0" tIns="0" rIns="0" bIns="0" rtlCol="0" anchor="t"/>
+          <a:lstStyle/>
+          <a:p>
+            <a:pPr algn="l" indent="0" marL="0">
+              <a:buNone/>
+            </a:pPr>
+            <a:r>
+              <a:rPr lang="ko-KR" sz="1350" b="1" dirty="0">
+                <a:solidFill>
+                  <a:srgbClr val="526174"/>
+                </a:solidFill>
+                <a:latin typeface="Pretendard" pitchFamily="34" charset="0"/>
+                <a:ea typeface="Pretendard" pitchFamily="34" charset="-122"/>
+                <a:cs typeface="Pretendard" pitchFamily="34" charset="-120"/>
+              </a:rPr>
+              <a:t>기존</a:t>
+            </a:r>
+            <a:endParaRPr lang="ko-KR" sz="1350" dirty="0">
+              <a:ea typeface="Pretendard"/>
+            </a:endParaRPr>
+          </a:p>
+        </p:txBody>
+      </p:sp>
+      <p:sp>
+        <p:nvSpPr>
+          <p:cNvPr id="25" name="Text 23"/>
+          <p:cNvSpPr txBox="1"/>
+          <p:nvPr/>
+        </p:nvSpPr>
+        <p:spPr>
+          <a:xfrm>
+            <a:off x="9486900" y="2762250"/>
+            <a:ext cx="1905000" cy="266700"/>
+          </a:xfrm>
+          <a:prstGeom prst="rect">
+            <a:avLst/>
+          </a:prstGeom>
+          <a:noFill/>
+          <a:ln/>
+        </p:spPr>
+        <p:txBody>
+          <a:bodyPr wrap="square" lIns="0" tIns="0" rIns="0" bIns="0" rtlCol="0" anchor="t"/>
+          <a:lstStyle/>
+          <a:p>
+            <a:pPr algn="l" indent="0" marL="0">
+              <a:buNone/>
+            </a:pPr>
+            <a:r>
+              <a:rPr lang="ko-KR" sz="1350" b="1" dirty="0">
+                <a:solidFill>
+                  <a:srgbClr val="2459A6"/>
+                </a:solidFill>
+                <a:latin typeface="Pretendard" pitchFamily="34" charset="0"/>
+                <a:ea typeface="Pretendard" pitchFamily="34" charset="-122"/>
+                <a:cs typeface="Pretendard" pitchFamily="34" charset="-120"/>
+              </a:rPr>
+              <a:t>개선</a:t>
+            </a:r>
+            <a:endParaRPr lang="ko-KR" sz="1350" dirty="0">
+              <a:ea typeface="Pretendard"/>
+            </a:endParaRPr>
+          </a:p>
+        </p:txBody>
+      </p:sp>
+      <p:sp>
+        <p:nvSpPr>
+          <p:cNvPr id="26" name="Text 24"/>
+          <p:cNvSpPr txBox="1"/>
+          <p:nvPr/>
+        </p:nvSpPr>
+        <p:spPr>
+          <a:xfrm>
+            <a:off x="6705600" y="3095625"/>
+            <a:ext cx="1333500" cy="914400"/>
+          </a:xfrm>
+          <a:prstGeom prst="rect">
+            <a:avLst/>
+          </a:prstGeom>
+          <a:noFill/>
+          <a:ln/>
+        </p:spPr>
+        <p:txBody>
+          <a:bodyPr wrap="square" lIns="0" tIns="0" rIns="0" bIns="0" rtlCol="0" anchor="t"/>
+          <a:lstStyle/>
+          <a:p>
+            <a:pPr algn="l" indent="0" marL="0">
+              <a:buNone/>
+            </a:pPr>
+            <a:r>
+              <a:rPr lang="ko-KR" sz="5250" b="1" dirty="0">
+                <a:solidFill>
+                  <a:srgbClr val="526174"/>
+                </a:solidFill>
+                <a:latin typeface="Pretendard" pitchFamily="34" charset="0"/>
+                <a:ea typeface="Pretendard" pitchFamily="34" charset="-122"/>
+                <a:cs typeface="Pretendard" pitchFamily="34" charset="-120"/>
+              </a:rPr>
+              <a:t>7</a:t>
+            </a:r>
+            <a:endParaRPr lang="ko-KR" sz="5250" dirty="0">
+              <a:ea typeface="Pretendard"/>
+            </a:endParaRPr>
+          </a:p>
+        </p:txBody>
+      </p:sp>
+      <p:sp>
+        <p:nvSpPr>
+          <p:cNvPr id="27" name="Text 25"/>
+          <p:cNvSpPr txBox="1"/>
+          <p:nvPr/>
+        </p:nvSpPr>
+        <p:spPr>
+          <a:xfrm>
+            <a:off x="7277100" y="3467100"/>
+            <a:ext cx="571500" cy="428625"/>
+          </a:xfrm>
+          <a:prstGeom prst="rect">
+            <a:avLst/>
+          </a:prstGeom>
+          <a:noFill/>
+          <a:ln/>
+        </p:spPr>
+        <p:txBody>
+          <a:bodyPr wrap="square" lIns="0" tIns="0" rIns="0" bIns="0" rtlCol="0" anchor="t"/>
+          <a:lstStyle/>
+          <a:p>
+            <a:pPr algn="l" indent="0" marL="0">
+              <a:buNone/>
+            </a:pPr>
+            <a:r>
+              <a:rPr lang="ko-KR" sz="2100" dirty="0">
+                <a:solidFill>
+                  <a:srgbClr val="526174"/>
+                </a:solidFill>
+                <a:latin typeface="Pretendard" pitchFamily="34" charset="0"/>
+                <a:ea typeface="Pretendard" pitchFamily="34" charset="-122"/>
+                <a:cs typeface="Pretendard" pitchFamily="34" charset="-120"/>
+              </a:rPr>
+              <a:t>건</a:t>
+            </a:r>
+            <a:endParaRPr lang="ko-KR" sz="2100" dirty="0">
+              <a:ea typeface="Pretendard"/>
+            </a:endParaRPr>
+          </a:p>
+        </p:txBody>
+      </p:sp>
+      <p:sp>
+        <p:nvSpPr>
+          <p:cNvPr id="28" name="Shape 26"/>
+          <p:cNvSpPr/>
+          <p:nvPr/>
+        </p:nvSpPr>
+        <p:spPr>
+          <a:xfrm>
+            <a:off x="8496300" y="3552825"/>
+            <a:ext cx="609600" cy="0"/>
+          </a:xfrm>
+          <a:prstGeom prst="line">
+            <a:avLst/>
+          </a:prstGeom>
+          <a:noFill/>
+          <a:ln w="19050">
+            <a:solidFill>
+              <a:srgbClr val="2459A6"/>
+            </a:solidFill>
+            <a:prstDash val="solid"/>
+            <a:tailEnd type="triangle"/>
+          </a:ln>
+        </p:spPr>
+      </p:sp>
+      <p:sp>
+        <p:nvSpPr>
+          <p:cNvPr id="29" name="Text 27"/>
+          <p:cNvSpPr txBox="1"/>
+          <p:nvPr/>
+        </p:nvSpPr>
+        <p:spPr>
+          <a:xfrm>
+            <a:off x="9486900" y="3019425"/>
+            <a:ext cx="1238250" cy="1000125"/>
+          </a:xfrm>
+          <a:prstGeom prst="rect">
+            <a:avLst/>
+          </a:prstGeom>
+          <a:noFill/>
+          <a:ln/>
+        </p:spPr>
+        <p:txBody>
+          <a:bodyPr wrap="square" lIns="0" tIns="0" rIns="0" bIns="0" rtlCol="0" anchor="t"/>
+          <a:lstStyle/>
+          <a:p>
+            <a:pPr algn="l" indent="0" marL="0">
+              <a:buNone/>
+            </a:pPr>
+            <a:r>
+              <a:rPr lang="ko-KR" sz="6150" b="1" dirty="0">
+                <a:solidFill>
+                  <a:srgbClr val="2459A6"/>
+                </a:solidFill>
+                <a:latin typeface="Pretendard" pitchFamily="34" charset="0"/>
+                <a:ea typeface="Pretendard" pitchFamily="34" charset="-122"/>
+                <a:cs typeface="Pretendard" pitchFamily="34" charset="-120"/>
+              </a:rPr>
+              <a:t>3</a:t>
+            </a:r>
+            <a:endParaRPr lang="ko-KR" sz="6150" dirty="0">
+              <a:ea typeface="Pretendard"/>
+            </a:endParaRPr>
+          </a:p>
+        </p:txBody>
+      </p:sp>
+      <p:sp>
+        <p:nvSpPr>
+          <p:cNvPr id="30" name="Text 28"/>
+          <p:cNvSpPr txBox="1"/>
+          <p:nvPr/>
+        </p:nvSpPr>
+        <p:spPr>
+          <a:xfrm>
+            <a:off x="10058400" y="3467100"/>
+            <a:ext cx="571500" cy="428625"/>
+          </a:xfrm>
+          <a:prstGeom prst="rect">
+            <a:avLst/>
+          </a:prstGeom>
+          <a:noFill/>
+          <a:ln/>
+        </p:spPr>
+        <p:txBody>
+          <a:bodyPr wrap="square" lIns="0" tIns="0" rIns="0" bIns="0" rtlCol="0" anchor="t"/>
+          <a:lstStyle/>
+          <a:p>
+            <a:pPr algn="l" indent="0" marL="0">
+              <a:buNone/>
+            </a:pPr>
+            <a:r>
+              <a:rPr lang="ko-KR" sz="2100" dirty="0">
+                <a:solidFill>
+                  <a:srgbClr val="2459A6"/>
+                </a:solidFill>
+                <a:latin typeface="Pretendard" pitchFamily="34" charset="0"/>
+                <a:ea typeface="Pretendard" pitchFamily="34" charset="-122"/>
+                <a:cs typeface="Pretendard" pitchFamily="34" charset="-120"/>
+              </a:rPr>
+              <a:t>건</a:t>
+            </a:r>
+            <a:endParaRPr lang="ko-KR" sz="2100" dirty="0">
+              <a:ea typeface="Pretendard"/>
+            </a:endParaRPr>
+          </a:p>
+        </p:txBody>
+      </p:sp>
+      <p:sp>
+        <p:nvSpPr>
+          <p:cNvPr id="31" name="Text 29"/>
+          <p:cNvSpPr txBox="1"/>
+          <p:nvPr/>
+        </p:nvSpPr>
+        <p:spPr>
+          <a:xfrm>
+            <a:off x="6705600" y="4533900"/>
+            <a:ext cx="619125" cy="285750"/>
+          </a:xfrm>
+          <a:prstGeom prst="rect">
+            <a:avLst/>
+          </a:prstGeom>
+          <a:noFill/>
+          <a:ln/>
+        </p:spPr>
+        <p:txBody>
+          <a:bodyPr wrap="square" lIns="0" tIns="0" rIns="0" bIns="0" rtlCol="0" anchor="t"/>
+          <a:lstStyle/>
+          <a:p>
+            <a:pPr algn="l" indent="0" marL="0">
+              <a:buNone/>
+            </a:pPr>
+            <a:r>
+              <a:rPr lang="ko-KR" sz="1350" dirty="0">
+                <a:solidFill>
+                  <a:srgbClr val="526174"/>
+                </a:solidFill>
+                <a:latin typeface="Pretendard" pitchFamily="34" charset="0"/>
+                <a:ea typeface="Pretendard" pitchFamily="34" charset="-122"/>
+                <a:cs typeface="Pretendard" pitchFamily="34" charset="-120"/>
+              </a:rPr>
+              <a:t>기존</a:t>
+            </a:r>
+            <a:endParaRPr lang="ko-KR" sz="1350" dirty="0">
+              <a:ea typeface="Pretendard"/>
+            </a:endParaRPr>
+          </a:p>
+        </p:txBody>
+      </p:sp>
+      <p:sp>
+        <p:nvSpPr>
+          <p:cNvPr id="32" name="Shape 30"/>
+          <p:cNvSpPr/>
+          <p:nvPr/>
+        </p:nvSpPr>
+        <p:spPr>
+          <a:xfrm>
+            <a:off x="7429500" y="4552950"/>
+            <a:ext cx="4191000" cy="171450"/>
+          </a:xfrm>
+          <a:prstGeom prst="rect">
+            <a:avLst/>
+          </a:prstGeom>
+          <a:solidFill>
+            <a:srgbClr val="F0F3F7"/>
+          </a:solidFill>
+          <a:ln w="12700">
+            <a:solidFill>
+              <a:srgbClr val="F0F3F7"/>
+            </a:solidFill>
+            <a:prstDash val="solid"/>
+          </a:ln>
+        </p:spPr>
+      </p:sp>
+      <p:sp>
+        <p:nvSpPr>
+          <p:cNvPr id="33" name="Shape 31"/>
+          <p:cNvSpPr/>
+          <p:nvPr/>
+        </p:nvSpPr>
+        <p:spPr>
+          <a:xfrm>
+            <a:off x="7429500" y="4552950"/>
+            <a:ext cx="4191000" cy="171450"/>
+          </a:xfrm>
+          <a:prstGeom prst="rect">
+            <a:avLst/>
+          </a:prstGeom>
+          <a:solidFill>
+            <a:srgbClr val="BCC8D8"/>
+          </a:solidFill>
+          <a:ln w="12700">
+            <a:solidFill>
+              <a:srgbClr val="BCC8D8"/>
+            </a:solidFill>
+            <a:prstDash val="solid"/>
+          </a:ln>
+        </p:spPr>
+      </p:sp>
+      <p:sp>
+        <p:nvSpPr>
+          <p:cNvPr id="34" name="Text 32"/>
+          <p:cNvSpPr txBox="1"/>
+          <p:nvPr/>
+        </p:nvSpPr>
+        <p:spPr>
+          <a:xfrm>
+            <a:off x="6705600" y="5038725"/>
+            <a:ext cx="619125" cy="285750"/>
+          </a:xfrm>
+          <a:prstGeom prst="rect">
+            <a:avLst/>
+          </a:prstGeom>
+          <a:noFill/>
+          <a:ln/>
+        </p:spPr>
+        <p:txBody>
+          <a:bodyPr wrap="square" lIns="0" tIns="0" rIns="0" bIns="0" rtlCol="0" anchor="t"/>
+          <a:lstStyle/>
+          <a:p>
+            <a:pPr algn="l" indent="0" marL="0">
+              <a:buNone/>
+            </a:pPr>
+            <a:r>
+              <a:rPr lang="ko-KR" sz="1350" dirty="0">
+                <a:solidFill>
+                  <a:srgbClr val="526174"/>
+                </a:solidFill>
+                <a:latin typeface="Pretendard" pitchFamily="34" charset="0"/>
+                <a:ea typeface="Pretendard" pitchFamily="34" charset="-122"/>
+                <a:cs typeface="Pretendard" pitchFamily="34" charset="-120"/>
+              </a:rPr>
+              <a:t>개선</a:t>
+            </a:r>
+            <a:endParaRPr lang="ko-KR" sz="1350" dirty="0">
+              <a:ea typeface="Pretendard"/>
+            </a:endParaRPr>
+          </a:p>
+        </p:txBody>
+      </p:sp>
+      <p:sp>
+        <p:nvSpPr>
+          <p:cNvPr id="35" name="Shape 33"/>
+          <p:cNvSpPr/>
+          <p:nvPr/>
+        </p:nvSpPr>
+        <p:spPr>
+          <a:xfrm>
+            <a:off x="7429500" y="5057775"/>
+            <a:ext cx="4191000" cy="171450"/>
+          </a:xfrm>
+          <a:prstGeom prst="rect">
+            <a:avLst/>
+          </a:prstGeom>
+          <a:solidFill>
+            <a:srgbClr val="F0F3F7"/>
+          </a:solidFill>
+          <a:ln w="12700">
+            <a:solidFill>
+              <a:srgbClr val="F0F3F7"/>
+            </a:solidFill>
+            <a:prstDash val="solid"/>
+          </a:ln>
+        </p:spPr>
+      </p:sp>
+      <p:sp>
+        <p:nvSpPr>
+          <p:cNvPr id="36" name="Shape 34"/>
+          <p:cNvSpPr/>
+          <p:nvPr/>
+        </p:nvSpPr>
+        <p:spPr>
+          <a:xfrm>
+            <a:off x="7429500" y="5057775"/>
+            <a:ext cx="1796143" cy="171450"/>
+          </a:xfrm>
+          <a:prstGeom prst="rect">
+            <a:avLst/>
+          </a:prstGeom>
+          <a:solidFill>
+            <a:srgbClr val="2459A6"/>
+          </a:solidFill>
+          <a:ln w="12700">
+            <a:solidFill>
+              <a:srgbClr val="2459A6"/>
+            </a:solidFill>
+            <a:prstDash val="solid"/>
+          </a:ln>
+        </p:spPr>
+      </p:sp>
+      <p:sp>
+        <p:nvSpPr>
+          <p:cNvPr id="37" name="Shape 35"/>
+          <p:cNvSpPr/>
+          <p:nvPr/>
+        </p:nvSpPr>
+        <p:spPr>
+          <a:xfrm>
+            <a:off x="533400" y="5753100"/>
+            <a:ext cx="11125200" cy="400050"/>
           </a:xfrm>
           <a:prstGeom prst="rect">
             <a:avLst/>
@@ -4131,30 +5279,30 @@
       </p:sp>
       <p:sp>
         <p:nvSpPr>
-          <p:cNvPr id="9" name="Text 7"/>
-          <p:cNvSpPr txBox="1"/>
-          <p:nvPr/>
-        </p:nvSpPr>
-        <p:spPr>
-          <a:xfrm>
-            <a:off x="742950" y="2295525"/>
-            <a:ext cx="1219200" cy="647700"/>
-          </a:xfrm>
-          <a:prstGeom prst="rect">
-            <a:avLst/>
-          </a:prstGeom>
-          <a:noFill/>
-          <a:ln/>
-        </p:spPr>
-        <p:txBody>
-          <a:bodyPr wrap="square" lIns="0" tIns="0" rIns="0" bIns="0" rtlCol="0" anchor="t"/>
-          <a:lstStyle/>
-          <a:p>
-            <a:pPr algn="l" indent="0" marL="0">
-              <a:buNone/>
-            </a:pPr>
-            <a:r>
-              <a:rPr lang="ko-KR" sz="3525" b="1" dirty="0">
+          <p:cNvPr id="38" name="Text 36"/>
+          <p:cNvSpPr txBox="1"/>
+          <p:nvPr/>
+        </p:nvSpPr>
+        <p:spPr>
+          <a:xfrm>
+            <a:off x="704850" y="5848350"/>
+            <a:ext cx="1714500" cy="238125"/>
+          </a:xfrm>
+          <a:prstGeom prst="rect">
+            <a:avLst/>
+          </a:prstGeom>
+          <a:noFill/>
+          <a:ln/>
+        </p:spPr>
+        <p:txBody>
+          <a:bodyPr wrap="square" lIns="0" tIns="0" rIns="0" bIns="0" rtlCol="0" anchor="t"/>
+          <a:lstStyle/>
+          <a:p>
+            <a:pPr algn="l" indent="0" marL="0">
+              <a:buNone/>
+            </a:pPr>
+            <a:r>
+              <a:rPr lang="ko-KR" sz="1275" b="1" dirty="0">
                 <a:solidFill>
                   <a:srgbClr val="2459A6"/>
                 </a:solidFill>
@@ -4162,122 +5310,40 @@
                 <a:ea typeface="Pretendard" pitchFamily="34" charset="-122"/>
                 <a:cs typeface="Pretendard" pitchFamily="34" charset="-120"/>
               </a:rPr>
-              <a:t>9분</a:t>
-            </a:r>
-            <a:endParaRPr lang="ko-KR" sz="3525" dirty="0">
-              <a:ea typeface="Pretendard"/>
-            </a:endParaRPr>
-          </a:p>
-        </p:txBody>
-      </p:sp>
-      <p:sp>
-        <p:nvSpPr>
-          <p:cNvPr id="10" name="Text 8"/>
-          <p:cNvSpPr txBox="1"/>
-          <p:nvPr/>
-        </p:nvSpPr>
-        <p:spPr>
-          <a:xfrm>
-            <a:off x="2143125" y="2314575"/>
-            <a:ext cx="3286125" cy="333375"/>
-          </a:xfrm>
-          <a:prstGeom prst="rect">
-            <a:avLst/>
-          </a:prstGeom>
-          <a:noFill/>
-          <a:ln/>
-        </p:spPr>
-        <p:txBody>
-          <a:bodyPr wrap="square" lIns="0" tIns="0" rIns="0" bIns="0" rtlCol="0" anchor="t"/>
-          <a:lstStyle/>
-          <a:p>
-            <a:pPr algn="l" indent="0" marL="0">
-              <a:buNone/>
-            </a:pPr>
-            <a:r>
-              <a:rPr lang="ko-KR" sz="1725" b="1" dirty="0">
-                <a:solidFill>
-                  <a:srgbClr val="192A40"/>
-                </a:solidFill>
-                <a:latin typeface="Pretendard" pitchFamily="34" charset="0"/>
-                <a:ea typeface="Pretendard" pitchFamily="34" charset="-122"/>
-                <a:cs typeface="Pretendard" pitchFamily="34" charset="-120"/>
-              </a:rPr>
-              <a:t>건당 평균 검수 시간</a:t>
-            </a:r>
-            <a:endParaRPr lang="ko-KR" sz="1725" dirty="0">
-              <a:ea typeface="Pretendard"/>
-            </a:endParaRPr>
-          </a:p>
-        </p:txBody>
-      </p:sp>
-      <p:sp>
-        <p:nvSpPr>
-          <p:cNvPr id="11" name="Text 9"/>
-          <p:cNvSpPr txBox="1"/>
-          <p:nvPr/>
-        </p:nvSpPr>
-        <p:spPr>
-          <a:xfrm>
-            <a:off x="5981700" y="2276475"/>
-            <a:ext cx="5410200" cy="352425"/>
-          </a:xfrm>
-          <a:prstGeom prst="rect">
-            <a:avLst/>
-          </a:prstGeom>
-          <a:noFill/>
-          <a:ln/>
-        </p:spPr>
-        <p:txBody>
-          <a:bodyPr wrap="square" lIns="0" tIns="0" rIns="0" bIns="0" rtlCol="0" anchor="t"/>
-          <a:lstStyle/>
-          <a:p>
-            <a:pPr algn="l" indent="0" marL="0">
-              <a:buNone/>
-            </a:pPr>
-            <a:r>
-              <a:rPr lang="ko-KR" sz="1875" b="1" dirty="0">
-                <a:solidFill>
-                  <a:srgbClr val="192A40"/>
-                </a:solidFill>
-                <a:latin typeface="Pretendard" pitchFamily="34" charset="0"/>
-                <a:ea typeface="Pretendard" pitchFamily="34" charset="-122"/>
-                <a:cs typeface="Pretendard" pitchFamily="34" charset="-120"/>
-              </a:rPr>
-              <a:t>기존 16분 → 개선 9분</a:t>
-            </a:r>
-            <a:endParaRPr lang="ko-KR" sz="1875" dirty="0">
-              <a:ea typeface="Pretendard"/>
-            </a:endParaRPr>
-          </a:p>
-        </p:txBody>
-      </p:sp>
-      <p:sp>
-        <p:nvSpPr>
-          <p:cNvPr id="12" name="Text 10"/>
-          <p:cNvSpPr txBox="1"/>
-          <p:nvPr/>
-        </p:nvSpPr>
-        <p:spPr>
-          <a:xfrm>
-            <a:off x="5981700" y="2724150"/>
-            <a:ext cx="5410200" cy="381000"/>
-          </a:xfrm>
-          <a:prstGeom prst="rect">
-            <a:avLst/>
-          </a:prstGeom>
-          <a:noFill/>
-          <a:ln/>
-        </p:spPr>
-        <p:txBody>
-          <a:bodyPr wrap="square" lIns="0" tIns="0" rIns="0" bIns="0" rtlCol="0" anchor="t"/>
-          <a:lstStyle/>
-          <a:p>
-            <a:pPr algn="l" indent="0" marL="0">
-              <a:buNone/>
-            </a:pPr>
-            <a:r>
-              <a:rPr lang="ko-KR" sz="1575" dirty="0">
+              <a:t>가상 연습 자료</a:t>
+            </a:r>
+            <a:endParaRPr lang="ko-KR" sz="1275" dirty="0">
+              <a:ea typeface="Pretendard"/>
+            </a:endParaRPr>
+          </a:p>
+        </p:txBody>
+      </p:sp>
+      <p:sp>
+        <p:nvSpPr>
+          <p:cNvPr id="39" name="Text 37"/>
+          <p:cNvSpPr txBox="1"/>
+          <p:nvPr/>
+        </p:nvSpPr>
+        <p:spPr>
+          <a:xfrm>
+            <a:off x="2514600" y="5829300"/>
+            <a:ext cx="8763000" cy="285750"/>
+          </a:xfrm>
+          <a:prstGeom prst="rect">
+            <a:avLst/>
+          </a:prstGeom>
+          <a:noFill/>
+          <a:ln/>
+        </p:spPr>
+        <p:txBody>
+          <a:bodyPr wrap="square" lIns="0" tIns="0" rIns="0" bIns="0" rtlCol="0" anchor="t"/>
+          <a:lstStyle/>
+          <a:p>
+            <a:pPr algn="l" indent="0" marL="0">
+              <a:buNone/>
+            </a:pPr>
+            <a:r>
+              <a:rPr lang="ko-KR" sz="1500" dirty="0">
                 <a:solidFill>
                   <a:srgbClr val="526174"/>
                 </a:solidFill>
@@ -4285,403 +5351,9 @@
                 <a:ea typeface="Pretendard" pitchFamily="34" charset="-122"/>
                 <a:cs typeface="Pretendard" pitchFamily="34" charset="-120"/>
               </a:rPr>
-              <a:t>검수와 기록을 한 기기에서 진행</a:t>
-            </a:r>
-            <a:endParaRPr lang="ko-KR" sz="1575" dirty="0">
-              <a:ea typeface="Pretendard"/>
-            </a:endParaRPr>
-          </a:p>
-        </p:txBody>
-      </p:sp>
-      <p:sp>
-        <p:nvSpPr>
-          <p:cNvPr id="13" name="Text 11"/>
-          <p:cNvSpPr txBox="1"/>
-          <p:nvPr/>
-        </p:nvSpPr>
-        <p:spPr>
-          <a:xfrm>
-            <a:off x="742950" y="3600450"/>
-            <a:ext cx="1219200" cy="647700"/>
-          </a:xfrm>
-          <a:prstGeom prst="rect">
-            <a:avLst/>
-          </a:prstGeom>
-          <a:noFill/>
-          <a:ln/>
-        </p:spPr>
-        <p:txBody>
-          <a:bodyPr wrap="square" lIns="0" tIns="0" rIns="0" bIns="0" rtlCol="0" anchor="t"/>
-          <a:lstStyle/>
-          <a:p>
-            <a:pPr algn="l" indent="0" marL="0">
-              <a:buNone/>
-            </a:pPr>
-            <a:r>
-              <a:rPr lang="ko-KR" sz="3525" b="1" dirty="0">
-                <a:solidFill>
-                  <a:srgbClr val="2459A6"/>
-                </a:solidFill>
-                <a:latin typeface="Pretendard" pitchFamily="34" charset="0"/>
-                <a:ea typeface="Pretendard" pitchFamily="34" charset="-122"/>
-                <a:cs typeface="Pretendard" pitchFamily="34" charset="-120"/>
-              </a:rPr>
-              <a:t>3건</a:t>
-            </a:r>
-            <a:endParaRPr lang="ko-KR" sz="3525" dirty="0">
-              <a:ea typeface="Pretendard"/>
-            </a:endParaRPr>
-          </a:p>
-        </p:txBody>
-      </p:sp>
-      <p:sp>
-        <p:nvSpPr>
-          <p:cNvPr id="14" name="Text 12"/>
-          <p:cNvSpPr txBox="1"/>
-          <p:nvPr/>
-        </p:nvSpPr>
-        <p:spPr>
-          <a:xfrm>
-            <a:off x="2143125" y="3619500"/>
-            <a:ext cx="3286125" cy="333375"/>
-          </a:xfrm>
-          <a:prstGeom prst="rect">
-            <a:avLst/>
-          </a:prstGeom>
-          <a:noFill/>
-          <a:ln/>
-        </p:spPr>
-        <p:txBody>
-          <a:bodyPr wrap="square" lIns="0" tIns="0" rIns="0" bIns="0" rtlCol="0" anchor="t"/>
-          <a:lstStyle/>
-          <a:p>
-            <a:pPr algn="l" indent="0" marL="0">
-              <a:buNone/>
-            </a:pPr>
-            <a:r>
-              <a:rPr lang="ko-KR" sz="1725" b="1" dirty="0">
-                <a:solidFill>
-                  <a:srgbClr val="192A40"/>
-                </a:solidFill>
-                <a:latin typeface="Pretendard" pitchFamily="34" charset="0"/>
-                <a:ea typeface="Pretendard" pitchFamily="34" charset="-122"/>
-                <a:cs typeface="Pretendard" pitchFamily="34" charset="-120"/>
-              </a:rPr>
-              <a:t>입력 누락 건수</a:t>
-            </a:r>
-            <a:endParaRPr lang="ko-KR" sz="1725" dirty="0">
-              <a:ea typeface="Pretendard"/>
-            </a:endParaRPr>
-          </a:p>
-        </p:txBody>
-      </p:sp>
-      <p:sp>
-        <p:nvSpPr>
-          <p:cNvPr id="15" name="Text 13"/>
-          <p:cNvSpPr txBox="1"/>
-          <p:nvPr/>
-        </p:nvSpPr>
-        <p:spPr>
-          <a:xfrm>
-            <a:off x="5981700" y="3581400"/>
-            <a:ext cx="5410200" cy="352425"/>
-          </a:xfrm>
-          <a:prstGeom prst="rect">
-            <a:avLst/>
-          </a:prstGeom>
-          <a:noFill/>
-          <a:ln/>
-        </p:spPr>
-        <p:txBody>
-          <a:bodyPr wrap="square" lIns="0" tIns="0" rIns="0" bIns="0" rtlCol="0" anchor="t"/>
-          <a:lstStyle/>
-          <a:p>
-            <a:pPr algn="l" indent="0" marL="0">
-              <a:buNone/>
-            </a:pPr>
-            <a:r>
-              <a:rPr lang="ko-KR" sz="1875" b="1" dirty="0">
-                <a:solidFill>
-                  <a:srgbClr val="192A40"/>
-                </a:solidFill>
-                <a:latin typeface="Pretendard" pitchFamily="34" charset="0"/>
-                <a:ea typeface="Pretendard" pitchFamily="34" charset="-122"/>
-                <a:cs typeface="Pretendard" pitchFamily="34" charset="-120"/>
-              </a:rPr>
-              <a:t>기존 7건 → 개선 3건</a:t>
-            </a:r>
-            <a:endParaRPr lang="ko-KR" sz="1875" dirty="0">
-              <a:ea typeface="Pretendard"/>
-            </a:endParaRPr>
-          </a:p>
-        </p:txBody>
-      </p:sp>
-      <p:sp>
-        <p:nvSpPr>
-          <p:cNvPr id="16" name="Text 14"/>
-          <p:cNvSpPr txBox="1"/>
-          <p:nvPr/>
-        </p:nvSpPr>
-        <p:spPr>
-          <a:xfrm>
-            <a:off x="5981700" y="4029075"/>
-            <a:ext cx="5410200" cy="381000"/>
-          </a:xfrm>
-          <a:prstGeom prst="rect">
-            <a:avLst/>
-          </a:prstGeom>
-          <a:noFill/>
-          <a:ln/>
-        </p:spPr>
-        <p:txBody>
-          <a:bodyPr wrap="square" lIns="0" tIns="0" rIns="0" bIns="0" rtlCol="0" anchor="t"/>
-          <a:lstStyle/>
-          <a:p>
-            <a:pPr algn="l" indent="0" marL="0">
-              <a:buNone/>
-            </a:pPr>
-            <a:r>
-              <a:rPr lang="ko-KR" sz="1575" dirty="0">
-                <a:solidFill>
-                  <a:srgbClr val="526174"/>
-                </a:solidFill>
-                <a:latin typeface="Pretendard" pitchFamily="34" charset="0"/>
-                <a:ea typeface="Pretendard" pitchFamily="34" charset="-122"/>
-                <a:cs typeface="Pretendard" pitchFamily="34" charset="-120"/>
-              </a:rPr>
-              <a:t>표본이 작아 일반 성능으로 확대하지 않음</a:t>
-            </a:r>
-            <a:endParaRPr lang="ko-KR" sz="1575" dirty="0">
-              <a:ea typeface="Pretendard"/>
-            </a:endParaRPr>
-          </a:p>
-        </p:txBody>
-      </p:sp>
-      <p:sp>
-        <p:nvSpPr>
-          <p:cNvPr id="17" name="Shape 15"/>
-          <p:cNvSpPr/>
-          <p:nvPr/>
-        </p:nvSpPr>
-        <p:spPr>
-          <a:xfrm>
-            <a:off x="533400" y="4695825"/>
-            <a:ext cx="11125200" cy="1152525"/>
-          </a:xfrm>
-          <a:prstGeom prst="rect">
-            <a:avLst/>
-          </a:prstGeom>
-          <a:solidFill>
-            <a:srgbClr val="EEF3F9"/>
-          </a:solidFill>
-          <a:ln w="12700">
-            <a:solidFill>
-              <a:srgbClr val="EEF3F9"/>
-            </a:solidFill>
-            <a:prstDash val="solid"/>
-          </a:ln>
-        </p:spPr>
-      </p:sp>
-      <p:sp>
-        <p:nvSpPr>
-          <p:cNvPr id="18" name="Text 16"/>
-          <p:cNvSpPr txBox="1"/>
-          <p:nvPr/>
-        </p:nvSpPr>
-        <p:spPr>
-          <a:xfrm>
-            <a:off x="742950" y="4905375"/>
-            <a:ext cx="1219200" cy="647700"/>
-          </a:xfrm>
-          <a:prstGeom prst="rect">
-            <a:avLst/>
-          </a:prstGeom>
-          <a:noFill/>
-          <a:ln/>
-        </p:spPr>
-        <p:txBody>
-          <a:bodyPr wrap="square" lIns="0" tIns="0" rIns="0" bIns="0" rtlCol="0" anchor="t"/>
-          <a:lstStyle/>
-          <a:p>
-            <a:pPr algn="l" indent="0" marL="0">
-              <a:buNone/>
-            </a:pPr>
-            <a:r>
-              <a:rPr lang="ko-KR" sz="2475" b="1" dirty="0">
-                <a:solidFill>
-                  <a:srgbClr val="2459A6"/>
-                </a:solidFill>
-                <a:latin typeface="Pretendard" pitchFamily="34" charset="0"/>
-                <a:ea typeface="Pretendard" pitchFamily="34" charset="-122"/>
-                <a:cs typeface="Pretendard" pitchFamily="34" charset="-120"/>
-              </a:rPr>
-              <a:t>담당자</a:t>
-            </a:r>
-            <a:endParaRPr lang="ko-KR" sz="2475" dirty="0">
-              <a:ea typeface="Pretendard"/>
-            </a:endParaRPr>
-          </a:p>
-        </p:txBody>
-      </p:sp>
-      <p:sp>
-        <p:nvSpPr>
-          <p:cNvPr id="19" name="Text 17"/>
-          <p:cNvSpPr txBox="1"/>
-          <p:nvPr/>
-        </p:nvSpPr>
-        <p:spPr>
-          <a:xfrm>
-            <a:off x="2143125" y="4924425"/>
-            <a:ext cx="3286125" cy="333375"/>
-          </a:xfrm>
-          <a:prstGeom prst="rect">
-            <a:avLst/>
-          </a:prstGeom>
-          <a:noFill/>
-          <a:ln/>
-        </p:spPr>
-        <p:txBody>
-          <a:bodyPr wrap="square" lIns="0" tIns="0" rIns="0" bIns="0" rtlCol="0" anchor="t"/>
-          <a:lstStyle/>
-          <a:p>
-            <a:pPr algn="l" indent="0" marL="0">
-              <a:buNone/>
-            </a:pPr>
-            <a:r>
-              <a:rPr lang="ko-KR" sz="1725" b="1" dirty="0">
-                <a:solidFill>
-                  <a:srgbClr val="192A40"/>
-                </a:solidFill>
-                <a:latin typeface="Pretendard" pitchFamily="34" charset="0"/>
-                <a:ea typeface="Pretendard" pitchFamily="34" charset="-122"/>
-                <a:cs typeface="Pretendard" pitchFamily="34" charset="-120"/>
-              </a:rPr>
-              <a:t>최종 검수 확정</a:t>
-            </a:r>
-            <a:endParaRPr lang="ko-KR" sz="1725" dirty="0">
-              <a:ea typeface="Pretendard"/>
-            </a:endParaRPr>
-          </a:p>
-        </p:txBody>
-      </p:sp>
-      <p:sp>
-        <p:nvSpPr>
-          <p:cNvPr id="20" name="Text 18"/>
-          <p:cNvSpPr txBox="1"/>
-          <p:nvPr/>
-        </p:nvSpPr>
-        <p:spPr>
-          <a:xfrm>
-            <a:off x="5981700" y="4886325"/>
-            <a:ext cx="5410200" cy="352425"/>
-          </a:xfrm>
-          <a:prstGeom prst="rect">
-            <a:avLst/>
-          </a:prstGeom>
-          <a:noFill/>
-          <a:ln/>
-        </p:spPr>
-        <p:txBody>
-          <a:bodyPr wrap="square" lIns="0" tIns="0" rIns="0" bIns="0" rtlCol="0" anchor="t"/>
-          <a:lstStyle/>
-          <a:p>
-            <a:pPr algn="l" indent="0" marL="0">
-              <a:buNone/>
-            </a:pPr>
-            <a:r>
-              <a:rPr lang="ko-KR" sz="1875" b="1" dirty="0">
-                <a:solidFill>
-                  <a:srgbClr val="192A40"/>
-                </a:solidFill>
-                <a:latin typeface="Pretendard" pitchFamily="34" charset="0"/>
-                <a:ea typeface="Pretendard" pitchFamily="34" charset="-122"/>
-                <a:cs typeface="Pretendard" pitchFamily="34" charset="-120"/>
-              </a:rPr>
-              <a:t>자동 환불은 수행하지 않음</a:t>
-            </a:r>
-            <a:endParaRPr lang="ko-KR" sz="1875" dirty="0">
-              <a:ea typeface="Pretendard"/>
-            </a:endParaRPr>
-          </a:p>
-        </p:txBody>
-      </p:sp>
-      <p:sp>
-        <p:nvSpPr>
-          <p:cNvPr id="21" name="Text 19"/>
-          <p:cNvSpPr txBox="1"/>
-          <p:nvPr/>
-        </p:nvSpPr>
-        <p:spPr>
-          <a:xfrm>
-            <a:off x="5981700" y="5334000"/>
-            <a:ext cx="5410200" cy="381000"/>
-          </a:xfrm>
-          <a:prstGeom prst="rect">
-            <a:avLst/>
-          </a:prstGeom>
-          <a:noFill/>
-          <a:ln/>
-        </p:spPr>
-        <p:txBody>
-          <a:bodyPr wrap="square" lIns="0" tIns="0" rIns="0" bIns="0" rtlCol="0" anchor="t"/>
-          <a:lstStyle/>
-          <a:p>
-            <a:pPr algn="l" indent="0" marL="0">
-              <a:buNone/>
-            </a:pPr>
-            <a:r>
-              <a:rPr lang="ko-KR" sz="1575" dirty="0">
-                <a:solidFill>
-                  <a:srgbClr val="526174"/>
-                </a:solidFill>
-                <a:latin typeface="Pretendard" pitchFamily="34" charset="0"/>
-                <a:ea typeface="Pretendard" pitchFamily="34" charset="-122"/>
-                <a:cs typeface="Pretendard" pitchFamily="34" charset="-120"/>
-              </a:rPr>
-              <a:t>판단과 최종 확인은 담당자의 업무</a:t>
-            </a:r>
-            <a:endParaRPr lang="ko-KR" sz="1575" dirty="0">
-              <a:ea typeface="Pretendard"/>
-            </a:endParaRPr>
-          </a:p>
-        </p:txBody>
-      </p:sp>
-      <p:sp>
-        <p:nvSpPr>
-          <p:cNvPr id="22" name="Text 20"/>
-          <p:cNvSpPr txBox="1"/>
-          <p:nvPr/>
-        </p:nvSpPr>
-        <p:spPr>
-          <a:xfrm>
-            <a:off x="647700" y="6096000"/>
-            <a:ext cx="10668000" cy="209550"/>
-          </a:xfrm>
-          <a:prstGeom prst="rect">
-            <a:avLst/>
-          </a:prstGeom>
-          <a:noFill/>
-          <a:ln/>
-        </p:spPr>
-        <p:txBody>
-          <a:bodyPr wrap="square" lIns="0" tIns="0" rIns="0" bIns="0" rtlCol="0" anchor="t"/>
-          <a:lstStyle/>
-          <a:p>
-            <a:pPr algn="l" indent="0" marL="0">
-              <a:buNone/>
-            </a:pPr>
-            <a:r>
-              <a:rPr lang="ko-KR" sz="1200" dirty="0">
-                <a:solidFill>
-                  <a:srgbClr val="526174"/>
-                </a:solidFill>
-                <a:latin typeface="Pretendard" pitchFamily="34" charset="0"/>
-                <a:ea typeface="Pretendard" pitchFamily="34" charset="-122"/>
-                <a:cs typeface="Pretendard" pitchFamily="34" charset="-120"/>
-              </a:rPr>
-              <a:t>확인 범위: 가상 연습 자료, 실제 고객 및 운영 실적 아님</a:t>
-            </a:r>
-            <a:endParaRPr lang="ko-KR" sz="1200" dirty="0">
+              <a:t>표본이 작아 일반 성능으로 확대하지 않습니다.</a:t>
+            </a:r>
+            <a:endParaRPr lang="ko-KR" sz="1500" dirty="0">
               <a:ea typeface="Pretendard"/>
             </a:endParaRPr>
           </a:p>

--- a/examples/business-blue/deck.pptx
+++ b/examples/business-blue/deck.pptx
@@ -541,7 +541,7 @@
               <a:rPr lang="ko-KR" dirty="0">
                 <a:ea typeface="Pretendard"/>
               </a:rPr>
-              <a:t>약 30초. 종이 체크리스트를 작성한 뒤 엑셀로 다시 옮기는 과정에서 기록이 누락됩니다. 검수 현장에서 태블릿으로 기록을 마치는 개선안을 소개합니다. 이후 수치는 실제 운영 성과가 아닌 가상 연습 비교입니다.</a:t>
+              <a:t>현장의 문제부터 적용 범위까지</a:t>
             </a:r>
             <a:endParaRPr lang="ko-KR" dirty="0">
               <a:ea typeface="Pretendard"/>
@@ -733,7 +733,7 @@
               <a:rPr lang="ko-KR" dirty="0">
                 <a:ea typeface="Pretendard"/>
               </a:rPr>
-              <a:t>약 45초. 왼쪽부터 상품 코드를 조회하고 상태를 체크한 뒤 사진을 첨부해 기록을 저장합니다. 이 네 단계가 개선안입니다. 저장과 최종 확정은 구분하며 담당자가 최종 검수를 확정합니다. 자동 환불은 수행하지 않습니다.</a:t>
+              <a:t>태블릿 입력은 기록을 돕고, 최종 판단은 담당자가 맡습니다.</a:t>
             </a:r>
             <a:endParaRPr lang="ko-KR" dirty="0">
               <a:ea typeface="Pretendard"/>
@@ -925,7 +925,7 @@
               <a:rPr lang="ko-KR" dirty="0">
                 <a:ea typeface="Pretendard"/>
               </a:rPr>
-              <a:t>약 40초. 세 가지 경계를 함께 기억해야 합니다. 수치는 가상 연습 자료이고, 표본은 각각 20건입니다. 이 개선은 기록 자동화이며 최종 검수 확정은 담당자에게 있습니다. 자동 환불 기능으로 해석하지 않습니다.</a:t>
+              <a:t>자동화할 기록과 사람이 판단할 업무를 구분합니다.</a:t>
             </a:r>
             <a:endParaRPr lang="ko-KR" dirty="0">
               <a:ea typeface="Pretendard"/>
@@ -1021,7 +1021,7 @@
               <a:rPr lang="ko-KR" dirty="0">
                 <a:ea typeface="Pretendard"/>
               </a:rPr>
-              <a:t>약 35초. 다음 단계는 다른 품목으로 1주간 시험 운영하는 것입니다. 현재 연습에서 본 평균 시간과 입력 누락을 다음 시험에서도 확인하는 것을 제안합니다. 최종 검수 확정은 계속 담당자가 수행합니다. 이를 통해 품목이 달라도 기록 방식이 도움이 되는지 살펴보겠습니다.</a:t>
+              <a:t>다른 제품군에서도 같은 기록 방식이 맞는지 확인합니다.</a:t>
             </a:r>
             <a:endParaRPr lang="ko-KR" dirty="0">
               <a:ea typeface="Pretendard"/>
@@ -1411,33 +1411,33 @@
         <p:spPr>
           <a:xfrm>
             <a:off x="533400" y="285750"/>
-            <a:ext cx="11125200" cy="228600"/>
-          </a:xfrm>
-          <a:prstGeom prst="rect">
-            <a:avLst/>
-          </a:prstGeom>
-          <a:noFill/>
-          <a:ln/>
-        </p:spPr>
-        <p:txBody>
-          <a:bodyPr wrap="square" lIns="0" tIns="0" rIns="0" bIns="0" rtlCol="0" anchor="t"/>
-          <a:lstStyle/>
-          <a:p>
-            <a:pPr algn="l" indent="0" marL="0">
-              <a:buNone/>
-            </a:pPr>
-            <a:r>
-              <a:rPr lang="ko-KR" sz="975" dirty="0">
-                <a:solidFill>
-                  <a:srgbClr val="526174"/>
-                </a:solidFill>
-                <a:latin typeface="Pretendard" pitchFamily="34" charset="0"/>
-                <a:ea typeface="Pretendard" pitchFamily="34" charset="-122"/>
-                <a:cs typeface="Pretendard" pitchFamily="34" charset="-120"/>
-              </a:rPr>
-              <a:t>현장 업무 개선 · 가상 연습</a:t>
-            </a:r>
-            <a:endParaRPr lang="ko-KR" sz="975" dirty="0">
+            <a:ext cx="10477500" cy="228600"/>
+          </a:xfrm>
+          <a:prstGeom prst="rect">
+            <a:avLst/>
+          </a:prstGeom>
+          <a:noFill/>
+          <a:ln/>
+        </p:spPr>
+        <p:txBody>
+          <a:bodyPr wrap="square" lIns="0" tIns="0" rIns="0" bIns="0" rtlCol="0" anchor="t"/>
+          <a:lstStyle/>
+          <a:p>
+            <a:pPr algn="l" indent="0" marL="0">
+              <a:buNone/>
+            </a:pPr>
+            <a:r>
+              <a:rPr lang="ko-KR" sz="1200" b="1" dirty="0">
+                <a:solidFill>
+                  <a:srgbClr val="2459A6"/>
+                </a:solidFill>
+                <a:latin typeface="Pretendard" pitchFamily="34" charset="0"/>
+                <a:ea typeface="Pretendard" pitchFamily="34" charset="-122"/>
+                <a:cs typeface="Pretendard" pitchFamily="34" charset="-120"/>
+              </a:rPr>
+              <a:t>CLEAN PPT  /  BUSINESS PRESENTATION</a:t>
+            </a:r>
+            <a:endParaRPr lang="ko-KR" sz="1200" dirty="0">
               <a:ea typeface="Pretendard"/>
             </a:endParaRPr>
           </a:p>
@@ -1476,7 +1476,7 @@
                 <a:ea typeface="Pretendard" pitchFamily="34" charset="-122"/>
                 <a:cs typeface="Pretendard" pitchFamily="34" charset="-120"/>
               </a:rPr>
-              <a:t>반품 검수 기록 자동화</a:t>
+              <a:t>업무 개선 발표</a:t>
             </a:r>
             <a:endParaRPr lang="ko-KR" sz="3300" dirty="0">
               <a:ea typeface="Pretendard"/>
@@ -1492,24 +1492,24 @@
         </p:nvSpPr>
         <p:spPr>
           <a:xfrm>
-            <a:off x="10668000" y="6438900"/>
-            <a:ext cx="990600" cy="190500"/>
-          </a:xfrm>
-          <a:prstGeom prst="rect">
-            <a:avLst/>
-          </a:prstGeom>
-          <a:noFill/>
-          <a:ln/>
-        </p:spPr>
-        <p:txBody>
-          <a:bodyPr wrap="square" lIns="0" tIns="0" rIns="0" bIns="0" rtlCol="0" anchor="t"/>
-          <a:lstStyle/>
-          <a:p>
-            <a:pPr algn="r" indent="0" marL="0">
-              <a:buNone/>
-            </a:pPr>
-            <a:r>
-              <a:rPr lang="ko-KR" sz="975" dirty="0">
+            <a:off x="533400" y="1495425"/>
+            <a:ext cx="11125200" cy="381000"/>
+          </a:xfrm>
+          <a:prstGeom prst="rect">
+            <a:avLst/>
+          </a:prstGeom>
+          <a:noFill/>
+          <a:ln/>
+        </p:spPr>
+        <p:txBody>
+          <a:bodyPr wrap="square" lIns="0" tIns="0" rIns="0" bIns="0" rtlCol="0" anchor="t"/>
+          <a:lstStyle/>
+          <a:p>
+            <a:pPr algn="l" indent="0" marL="0">
+              <a:buNone/>
+            </a:pPr>
+            <a:r>
+              <a:rPr lang="ko-KR" sz="1575" dirty="0">
                 <a:solidFill>
                   <a:srgbClr val="526174"/>
                 </a:solidFill>
@@ -1517,9 +1517,9 @@
                 <a:ea typeface="Pretendard" pitchFamily="34" charset="-122"/>
                 <a:cs typeface="Pretendard" pitchFamily="34" charset="-120"/>
               </a:rPr>
-              <a:t>1 / 6</a:t>
-            </a:r>
-            <a:endParaRPr lang="ko-KR" sz="975" dirty="0">
+              <a:t>현장의 문제부터 적용 범위까지</a:t>
+            </a:r>
+            <a:endParaRPr lang="ko-KR" sz="1575" dirty="0">
               <a:ea typeface="Pretendard"/>
             </a:endParaRPr>
           </a:p>
@@ -1533,24 +1533,24 @@
         </p:nvSpPr>
         <p:spPr>
           <a:xfrm>
-            <a:off x="533400" y="1657350"/>
-            <a:ext cx="10477500" cy="476250"/>
-          </a:xfrm>
-          <a:prstGeom prst="rect">
-            <a:avLst/>
-          </a:prstGeom>
-          <a:noFill/>
-          <a:ln/>
-        </p:spPr>
-        <p:txBody>
-          <a:bodyPr wrap="square" lIns="0" tIns="0" rIns="0" bIns="0" rtlCol="0" anchor="t"/>
-          <a:lstStyle/>
-          <a:p>
-            <a:pPr algn="l" indent="0" marL="0">
-              <a:buNone/>
-            </a:pPr>
-            <a:r>
-              <a:rPr lang="ko-KR" sz="2250" dirty="0">
+            <a:off x="533400" y="2000250"/>
+            <a:ext cx="6667500" cy="1428750"/>
+          </a:xfrm>
+          <a:prstGeom prst="rect">
+            <a:avLst/>
+          </a:prstGeom>
+          <a:noFill/>
+          <a:ln/>
+        </p:spPr>
+        <p:txBody>
+          <a:bodyPr wrap="square" lIns="0" tIns="0" rIns="0" bIns="0" rtlCol="0" anchor="t"/>
+          <a:lstStyle/>
+          <a:p>
+            <a:pPr algn="l" indent="0" marL="0">
+              <a:buNone/>
+            </a:pPr>
+            <a:r>
+              <a:rPr lang="ko-KR" sz="4500" b="1" dirty="0">
                 <a:solidFill>
                   <a:srgbClr val="192A40"/>
                 </a:solidFill>
@@ -1558,34 +1558,154 @@
                 <a:ea typeface="Pretendard" pitchFamily="34" charset="-122"/>
                 <a:cs typeface="Pretendard" pitchFamily="34" charset="-120"/>
               </a:rPr>
-              <a:t>현장에서 확인하고, 현장에서 기록합니다.</a:t>
-            </a:r>
-            <a:endParaRPr lang="ko-KR" sz="2250" dirty="0">
-              <a:ea typeface="Pretendard"/>
-            </a:endParaRPr>
-          </a:p>
-        </p:txBody>
-      </p:sp>
-      <p:sp>
-        <p:nvSpPr>
-          <p:cNvPr id="6" name="Shape 4"/>
+              <a:t>반품 검수</a:t>
+            </a:r>
+            <a:endParaRPr lang="ko-KR" sz="4500" dirty="0">
+              <a:ea typeface="Pretendard"/>
+            </a:endParaRPr>
+          </a:p>
+          <a:p>
+            <a:pPr algn="l" indent="0" marL="0">
+              <a:buNone/>
+            </a:pPr>
+            <a:r>
+              <a:rPr lang="ko-KR" sz="4500" b="1" dirty="0">
+                <a:solidFill>
+                  <a:srgbClr val="192A40"/>
+                </a:solidFill>
+                <a:latin typeface="Pretendard" pitchFamily="34" charset="0"/>
+                <a:ea typeface="Pretendard" pitchFamily="34" charset="-122"/>
+                <a:cs typeface="Pretendard" pitchFamily="34" charset="-120"/>
+              </a:rPr>
+              <a:t>기록 자동화</a:t>
+            </a:r>
+            <a:endParaRPr lang="ko-KR" sz="4500" dirty="0">
+              <a:ea typeface="Pretendard"/>
+            </a:endParaRPr>
+          </a:p>
+        </p:txBody>
+      </p:sp>
+      <p:sp>
+        <p:nvSpPr>
+          <p:cNvPr id="6" name="Text 4"/>
+          <p:cNvSpPr txBox="1"/>
+          <p:nvPr/>
+        </p:nvSpPr>
+        <p:spPr>
+          <a:xfrm>
+            <a:off x="533400" y="3743325"/>
+            <a:ext cx="6191250" cy="876300"/>
+          </a:xfrm>
+          <a:prstGeom prst="rect">
+            <a:avLst/>
+          </a:prstGeom>
+          <a:noFill/>
+          <a:ln/>
+        </p:spPr>
+        <p:txBody>
+          <a:bodyPr wrap="square" lIns="0" tIns="0" rIns="0" bIns="0" rtlCol="0" anchor="t"/>
+          <a:lstStyle/>
+          <a:p>
+            <a:pPr algn="l" indent="0" marL="0">
+              <a:buNone/>
+            </a:pPr>
+            <a:r>
+              <a:rPr lang="ko-KR" sz="1950" dirty="0">
+                <a:solidFill>
+                  <a:srgbClr val="526174"/>
+                </a:solidFill>
+                <a:latin typeface="Pretendard" pitchFamily="34" charset="0"/>
+                <a:ea typeface="Pretendard" pitchFamily="34" charset="-122"/>
+                <a:cs typeface="Pretendard" pitchFamily="34" charset="-120"/>
+              </a:rPr>
+              <a:t>종이에 적고 다시 옮기던 기록을</a:t>
+            </a:r>
+            <a:endParaRPr lang="ko-KR" sz="1950" dirty="0">
+              <a:ea typeface="Pretendard"/>
+            </a:endParaRPr>
+          </a:p>
+          <a:p>
+            <a:pPr algn="l" indent="0" marL="0">
+              <a:buNone/>
+            </a:pPr>
+            <a:r>
+              <a:rPr lang="ko-KR" sz="1950" dirty="0">
+                <a:solidFill>
+                  <a:srgbClr val="526174"/>
+                </a:solidFill>
+                <a:latin typeface="Pretendard" pitchFamily="34" charset="0"/>
+                <a:ea typeface="Pretendard" pitchFamily="34" charset="-122"/>
+                <a:cs typeface="Pretendard" pitchFamily="34" charset="-120"/>
+              </a:rPr>
+              <a:t>검수 현장에서 마치는 개선안입니다.</a:t>
+            </a:r>
+            <a:endParaRPr lang="ko-KR" sz="1950" dirty="0">
+              <a:ea typeface="Pretendard"/>
+            </a:endParaRPr>
+          </a:p>
+        </p:txBody>
+      </p:sp>
+      <p:sp>
+        <p:nvSpPr>
+          <p:cNvPr id="7" name="Text 5"/>
+          <p:cNvSpPr txBox="1"/>
+          <p:nvPr/>
+        </p:nvSpPr>
+        <p:spPr>
+          <a:xfrm>
+            <a:off x="533400" y="5495925"/>
+            <a:ext cx="6000750" cy="381000"/>
+          </a:xfrm>
+          <a:prstGeom prst="rect">
+            <a:avLst/>
+          </a:prstGeom>
+          <a:noFill/>
+          <a:ln/>
+        </p:spPr>
+        <p:txBody>
+          <a:bodyPr wrap="square" lIns="0" tIns="0" rIns="0" bIns="0" rtlCol="0" anchor="t"/>
+          <a:lstStyle/>
+          <a:p>
+            <a:pPr algn="l" indent="0" marL="0">
+              <a:buNone/>
+            </a:pPr>
+            <a:r>
+              <a:rPr lang="ko-KR" sz="1500" b="1" dirty="0">
+                <a:solidFill>
+                  <a:srgbClr val="2459A6"/>
+                </a:solidFill>
+                <a:latin typeface="Pretendard" pitchFamily="34" charset="0"/>
+                <a:ea typeface="Pretendard" pitchFamily="34" charset="-122"/>
+                <a:cs typeface="Pretendard" pitchFamily="34" charset="-120"/>
+              </a:rPr>
+              <a:t>업무 개선 제안  /  발표 구성 예시</a:t>
+            </a:r>
+            <a:endParaRPr lang="ko-KR" sz="1500" dirty="0">
+              <a:ea typeface="Pretendard"/>
+            </a:endParaRPr>
+          </a:p>
+        </p:txBody>
+      </p:sp>
+      <p:sp>
+        <p:nvSpPr>
+          <p:cNvPr id="8" name="Shape 6"/>
           <p:cNvSpPr/>
           <p:nvPr/>
         </p:nvSpPr>
         <p:spPr>
           <a:xfrm>
-            <a:off x="533400" y="2619375"/>
-            <a:ext cx="5238750" cy="2524125"/>
+            <a:off x="7848600" y="1952625"/>
+            <a:ext cx="3810000" cy="3848100"/>
           </a:xfrm>
           <a:prstGeom prst="rect">
             <a:avLst/>
           </a:prstGeom>
           <a:solidFill>
-            <a:srgbClr val="EEF3F9"/>
+            <a:srgbClr val="F3F6FA"/>
           </a:solidFill>
-          <a:ln w="9525">
+          <a:ln w="12700">
             <a:solidFill>
-              <a:srgbClr val="EEF3F9"/>
+              <a:srgbClr val="F3F6FA"/>
             </a:solidFill>
             <a:prstDash val="solid"/>
           </a:ln>
@@ -1593,30 +1713,71 @@
       </p:sp>
       <p:sp>
         <p:nvSpPr>
-          <p:cNvPr id="7" name="Text 5"/>
-          <p:cNvSpPr txBox="1"/>
-          <p:nvPr/>
-        </p:nvSpPr>
-        <p:spPr>
-          <a:xfrm>
-            <a:off x="838200" y="2952750"/>
-            <a:ext cx="4476750" cy="523875"/>
-          </a:xfrm>
-          <a:prstGeom prst="rect">
-            <a:avLst/>
-          </a:prstGeom>
-          <a:noFill/>
-          <a:ln/>
-        </p:spPr>
-        <p:txBody>
-          <a:bodyPr wrap="square" lIns="0" tIns="0" rIns="0" bIns="0" rtlCol="0" anchor="t"/>
-          <a:lstStyle/>
-          <a:p>
-            <a:pPr algn="l" indent="0" marL="0">
-              <a:buNone/>
-            </a:pPr>
-            <a:r>
-              <a:rPr lang="ko-KR" sz="2700" b="1" dirty="0">
+          <p:cNvPr id="9" name="Text 7"/>
+          <p:cNvSpPr txBox="1"/>
+          <p:nvPr/>
+        </p:nvSpPr>
+        <p:spPr>
+          <a:xfrm>
+            <a:off x="8096250" y="2257425"/>
+            <a:ext cx="419100" cy="342900"/>
+          </a:xfrm>
+          <a:prstGeom prst="rect">
+            <a:avLst/>
+          </a:prstGeom>
+          <a:noFill/>
+          <a:ln/>
+        </p:spPr>
+        <p:txBody>
+          <a:bodyPr wrap="square" lIns="0" tIns="0" rIns="0" bIns="0" rtlCol="0" anchor="t"/>
+          <a:lstStyle/>
+          <a:p>
+            <a:pPr algn="l" indent="0" marL="0">
+              <a:buNone/>
+            </a:pPr>
+            <a:r>
+              <a:rPr lang="ko-KR" sz="1650" b="1" dirty="0">
+                <a:solidFill>
+                  <a:srgbClr val="2459A6"/>
+                </a:solidFill>
+                <a:latin typeface="Pretendard" pitchFamily="34" charset="0"/>
+                <a:ea typeface="Pretendard" pitchFamily="34" charset="-122"/>
+                <a:cs typeface="Pretendard" pitchFamily="34" charset="-120"/>
+              </a:rPr>
+              <a:t>01</a:t>
+            </a:r>
+            <a:endParaRPr lang="ko-KR" sz="1650" dirty="0">
+              <a:ea typeface="Pretendard"/>
+            </a:endParaRPr>
+          </a:p>
+        </p:txBody>
+      </p:sp>
+      <p:sp>
+        <p:nvSpPr>
+          <p:cNvPr id="10" name="Text 8"/>
+          <p:cNvSpPr txBox="1"/>
+          <p:nvPr/>
+        </p:nvSpPr>
+        <p:spPr>
+          <a:xfrm>
+            <a:off x="8667750" y="2257425"/>
+            <a:ext cx="2743200" cy="381000"/>
+          </a:xfrm>
+          <a:prstGeom prst="rect">
+            <a:avLst/>
+          </a:prstGeom>
+          <a:noFill/>
+          <a:ln/>
+        </p:spPr>
+        <p:txBody>
+          <a:bodyPr wrap="square" lIns="0" tIns="0" rIns="0" bIns="0" rtlCol="0" anchor="t"/>
+          <a:lstStyle/>
+          <a:p>
+            <a:pPr algn="l" indent="0" marL="0">
+              <a:buNone/>
+            </a:pPr>
+            <a:r>
+              <a:rPr lang="ko-KR" sz="2025" b="1" dirty="0">
                 <a:solidFill>
                   <a:srgbClr val="192A40"/>
                 </a:solidFill>
@@ -1624,40 +1785,122 @@
                 <a:ea typeface="Pretendard" pitchFamily="34" charset="-122"/>
                 <a:cs typeface="Pretendard" pitchFamily="34" charset="-120"/>
               </a:rPr>
-              <a:t>종이 → 엑셀 재입력</a:t>
-            </a:r>
-            <a:endParaRPr lang="ko-KR" sz="2700" dirty="0">
-              <a:ea typeface="Pretendard"/>
-            </a:endParaRPr>
-          </a:p>
-        </p:txBody>
-      </p:sp>
-      <p:sp>
-        <p:nvSpPr>
-          <p:cNvPr id="8" name="Text 6"/>
-          <p:cNvSpPr txBox="1"/>
-          <p:nvPr/>
-        </p:nvSpPr>
-        <p:spPr>
-          <a:xfrm>
-            <a:off x="838200" y="3762375"/>
-            <a:ext cx="4381500" cy="857250"/>
-          </a:xfrm>
-          <a:prstGeom prst="rect">
-            <a:avLst/>
-          </a:prstGeom>
-          <a:noFill/>
-          <a:ln/>
-        </p:spPr>
-        <p:txBody>
-          <a:bodyPr wrap="square" lIns="0" tIns="0" rIns="0" bIns="0" rtlCol="0" anchor="t"/>
-          <a:lstStyle/>
-          <a:p>
-            <a:pPr algn="l" indent="0" marL="0">
-              <a:buNone/>
-            </a:pPr>
-            <a:r>
-              <a:rPr lang="ko-KR" sz="2175" dirty="0">
+              <a:t>기록 방식</a:t>
+            </a:r>
+            <a:endParaRPr lang="ko-KR" sz="2025" dirty="0">
+              <a:ea typeface="Pretendard"/>
+            </a:endParaRPr>
+          </a:p>
+        </p:txBody>
+      </p:sp>
+      <p:sp>
+        <p:nvSpPr>
+          <p:cNvPr id="11" name="Text 9"/>
+          <p:cNvSpPr txBox="1"/>
+          <p:nvPr/>
+        </p:nvSpPr>
+        <p:spPr>
+          <a:xfrm>
+            <a:off x="8667750" y="2686050"/>
+            <a:ext cx="2667000" cy="428625"/>
+          </a:xfrm>
+          <a:prstGeom prst="rect">
+            <a:avLst/>
+          </a:prstGeom>
+          <a:noFill/>
+          <a:ln/>
+        </p:spPr>
+        <p:txBody>
+          <a:bodyPr wrap="square" lIns="0" tIns="0" rIns="0" bIns="0" rtlCol="0" anchor="t"/>
+          <a:lstStyle/>
+          <a:p>
+            <a:pPr algn="l" indent="0" marL="0">
+              <a:buNone/>
+            </a:pPr>
+            <a:r>
+              <a:rPr lang="ko-KR" sz="1425" dirty="0">
+                <a:solidFill>
+                  <a:srgbClr val="526174"/>
+                </a:solidFill>
+                <a:latin typeface="Pretendard" pitchFamily="34" charset="0"/>
+                <a:ea typeface="Pretendard" pitchFamily="34" charset="-122"/>
+                <a:cs typeface="Pretendard" pitchFamily="34" charset="-120"/>
+              </a:rPr>
+              <a:t>기존과 개선 비교</a:t>
+            </a:r>
+            <a:endParaRPr lang="ko-KR" sz="1425" dirty="0">
+              <a:ea typeface="Pretendard"/>
+            </a:endParaRPr>
+          </a:p>
+        </p:txBody>
+      </p:sp>
+      <p:sp>
+        <p:nvSpPr>
+          <p:cNvPr id="12" name="Text 10"/>
+          <p:cNvSpPr txBox="1"/>
+          <p:nvPr/>
+        </p:nvSpPr>
+        <p:spPr>
+          <a:xfrm>
+            <a:off x="8096250" y="3390900"/>
+            <a:ext cx="419100" cy="342900"/>
+          </a:xfrm>
+          <a:prstGeom prst="rect">
+            <a:avLst/>
+          </a:prstGeom>
+          <a:noFill/>
+          <a:ln/>
+        </p:spPr>
+        <p:txBody>
+          <a:bodyPr wrap="square" lIns="0" tIns="0" rIns="0" bIns="0" rtlCol="0" anchor="t"/>
+          <a:lstStyle/>
+          <a:p>
+            <a:pPr algn="l" indent="0" marL="0">
+              <a:buNone/>
+            </a:pPr>
+            <a:r>
+              <a:rPr lang="ko-KR" sz="1650" b="1" dirty="0">
+                <a:solidFill>
+                  <a:srgbClr val="2459A6"/>
+                </a:solidFill>
+                <a:latin typeface="Pretendard" pitchFamily="34" charset="0"/>
+                <a:ea typeface="Pretendard" pitchFamily="34" charset="-122"/>
+                <a:cs typeface="Pretendard" pitchFamily="34" charset="-120"/>
+              </a:rPr>
+              <a:t>02</a:t>
+            </a:r>
+            <a:endParaRPr lang="ko-KR" sz="1650" dirty="0">
+              <a:ea typeface="Pretendard"/>
+            </a:endParaRPr>
+          </a:p>
+        </p:txBody>
+      </p:sp>
+      <p:sp>
+        <p:nvSpPr>
+          <p:cNvPr id="13" name="Text 11"/>
+          <p:cNvSpPr txBox="1"/>
+          <p:nvPr/>
+        </p:nvSpPr>
+        <p:spPr>
+          <a:xfrm>
+            <a:off x="8667750" y="3390900"/>
+            <a:ext cx="2743200" cy="381000"/>
+          </a:xfrm>
+          <a:prstGeom prst="rect">
+            <a:avLst/>
+          </a:prstGeom>
+          <a:noFill/>
+          <a:ln/>
+        </p:spPr>
+        <p:txBody>
+          <a:bodyPr wrap="square" lIns="0" tIns="0" rIns="0" bIns="0" rtlCol="0" anchor="t"/>
+          <a:lstStyle/>
+          <a:p>
+            <a:pPr algn="l" indent="0" marL="0">
+              <a:buNone/>
+            </a:pPr>
+            <a:r>
+              <a:rPr lang="ko-KR" sz="2025" b="1" dirty="0">
                 <a:solidFill>
                   <a:srgbClr val="192A40"/>
                 </a:solidFill>
@@ -1665,18 +1908,122 @@
                 <a:ea typeface="Pretendard" pitchFamily="34" charset="-122"/>
                 <a:cs typeface="Pretendard" pitchFamily="34" charset="-120"/>
               </a:rPr>
-              <a:t>검수와 기록이 나뉘면서</a:t>
-            </a:r>
-            <a:endParaRPr lang="ko-KR" sz="2175" dirty="0">
-              <a:ea typeface="Pretendard"/>
-            </a:endParaRPr>
-          </a:p>
-          <a:p>
-            <a:pPr algn="l" indent="0" marL="0">
-              <a:buNone/>
-            </a:pPr>
-            <a:r>
-              <a:rPr lang="ko-KR" sz="2175" dirty="0">
+              <a:t>업무 흐름</a:t>
+            </a:r>
+            <a:endParaRPr lang="ko-KR" sz="2025" dirty="0">
+              <a:ea typeface="Pretendard"/>
+            </a:endParaRPr>
+          </a:p>
+        </p:txBody>
+      </p:sp>
+      <p:sp>
+        <p:nvSpPr>
+          <p:cNvPr id="14" name="Text 12"/>
+          <p:cNvSpPr txBox="1"/>
+          <p:nvPr/>
+        </p:nvSpPr>
+        <p:spPr>
+          <a:xfrm>
+            <a:off x="8667750" y="3819525"/>
+            <a:ext cx="2667000" cy="428625"/>
+          </a:xfrm>
+          <a:prstGeom prst="rect">
+            <a:avLst/>
+          </a:prstGeom>
+          <a:noFill/>
+          <a:ln/>
+        </p:spPr>
+        <p:txBody>
+          <a:bodyPr wrap="square" lIns="0" tIns="0" rIns="0" bIns="0" rtlCol="0" anchor="t"/>
+          <a:lstStyle/>
+          <a:p>
+            <a:pPr algn="l" indent="0" marL="0">
+              <a:buNone/>
+            </a:pPr>
+            <a:r>
+              <a:rPr lang="ko-KR" sz="1425" dirty="0">
+                <a:solidFill>
+                  <a:srgbClr val="526174"/>
+                </a:solidFill>
+                <a:latin typeface="Pretendard" pitchFamily="34" charset="0"/>
+                <a:ea typeface="Pretendard" pitchFamily="34" charset="-122"/>
+                <a:cs typeface="Pretendard" pitchFamily="34" charset="-120"/>
+              </a:rPr>
+              <a:t>입력부터 최종 검수까지</a:t>
+            </a:r>
+            <a:endParaRPr lang="ko-KR" sz="1425" dirty="0">
+              <a:ea typeface="Pretendard"/>
+            </a:endParaRPr>
+          </a:p>
+        </p:txBody>
+      </p:sp>
+      <p:sp>
+        <p:nvSpPr>
+          <p:cNvPr id="15" name="Text 13"/>
+          <p:cNvSpPr txBox="1"/>
+          <p:nvPr/>
+        </p:nvSpPr>
+        <p:spPr>
+          <a:xfrm>
+            <a:off x="8096250" y="4524375"/>
+            <a:ext cx="419100" cy="342900"/>
+          </a:xfrm>
+          <a:prstGeom prst="rect">
+            <a:avLst/>
+          </a:prstGeom>
+          <a:noFill/>
+          <a:ln/>
+        </p:spPr>
+        <p:txBody>
+          <a:bodyPr wrap="square" lIns="0" tIns="0" rIns="0" bIns="0" rtlCol="0" anchor="t"/>
+          <a:lstStyle/>
+          <a:p>
+            <a:pPr algn="l" indent="0" marL="0">
+              <a:buNone/>
+            </a:pPr>
+            <a:r>
+              <a:rPr lang="ko-KR" sz="1650" b="1" dirty="0">
+                <a:solidFill>
+                  <a:srgbClr val="2459A6"/>
+                </a:solidFill>
+                <a:latin typeface="Pretendard" pitchFamily="34" charset="0"/>
+                <a:ea typeface="Pretendard" pitchFamily="34" charset="-122"/>
+                <a:cs typeface="Pretendard" pitchFamily="34" charset="-120"/>
+              </a:rPr>
+              <a:t>03</a:t>
+            </a:r>
+            <a:endParaRPr lang="ko-KR" sz="1650" dirty="0">
+              <a:ea typeface="Pretendard"/>
+            </a:endParaRPr>
+          </a:p>
+        </p:txBody>
+      </p:sp>
+      <p:sp>
+        <p:nvSpPr>
+          <p:cNvPr id="16" name="Text 14"/>
+          <p:cNvSpPr txBox="1"/>
+          <p:nvPr/>
+        </p:nvSpPr>
+        <p:spPr>
+          <a:xfrm>
+            <a:off x="8667750" y="4524375"/>
+            <a:ext cx="2743200" cy="381000"/>
+          </a:xfrm>
+          <a:prstGeom prst="rect">
+            <a:avLst/>
+          </a:prstGeom>
+          <a:noFill/>
+          <a:ln/>
+        </p:spPr>
+        <p:txBody>
+          <a:bodyPr wrap="square" lIns="0" tIns="0" rIns="0" bIns="0" rtlCol="0" anchor="t"/>
+          <a:lstStyle/>
+          <a:p>
+            <a:pPr algn="l" indent="0" marL="0">
+              <a:buNone/>
+            </a:pPr>
+            <a:r>
+              <a:rPr lang="ko-KR" sz="2025" b="1" dirty="0">
                 <a:solidFill>
                   <a:srgbClr val="192A40"/>
                 </a:solidFill>
@@ -1684,34 +2031,73 @@
                 <a:ea typeface="Pretendard" pitchFamily="34" charset="-122"/>
                 <a:cs typeface="Pretendard" pitchFamily="34" charset="-120"/>
               </a:rPr>
-              <a:t>입력 누락 발생</a:t>
-            </a:r>
-            <a:endParaRPr lang="ko-KR" sz="2175" dirty="0">
-              <a:ea typeface="Pretendard"/>
-            </a:endParaRPr>
-          </a:p>
-        </p:txBody>
-      </p:sp>
-      <p:sp>
-        <p:nvSpPr>
-          <p:cNvPr id="9" name="Shape 7"/>
+              <a:t>적용 판단</a:t>
+            </a:r>
+            <a:endParaRPr lang="ko-KR" sz="2025" dirty="0">
+              <a:ea typeface="Pretendard"/>
+            </a:endParaRPr>
+          </a:p>
+        </p:txBody>
+      </p:sp>
+      <p:sp>
+        <p:nvSpPr>
+          <p:cNvPr id="17" name="Text 15"/>
+          <p:cNvSpPr txBox="1"/>
+          <p:nvPr/>
+        </p:nvSpPr>
+        <p:spPr>
+          <a:xfrm>
+            <a:off x="8667750" y="4953000"/>
+            <a:ext cx="2667000" cy="428625"/>
+          </a:xfrm>
+          <a:prstGeom prst="rect">
+            <a:avLst/>
+          </a:prstGeom>
+          <a:noFill/>
+          <a:ln/>
+        </p:spPr>
+        <p:txBody>
+          <a:bodyPr wrap="square" lIns="0" tIns="0" rIns="0" bIns="0" rtlCol="0" anchor="t"/>
+          <a:lstStyle/>
+          <a:p>
+            <a:pPr algn="l" indent="0" marL="0">
+              <a:buNone/>
+            </a:pPr>
+            <a:r>
+              <a:rPr lang="ko-KR" sz="1425" dirty="0">
+                <a:solidFill>
+                  <a:srgbClr val="526174"/>
+                </a:solidFill>
+                <a:latin typeface="Pretendard" pitchFamily="34" charset="0"/>
+                <a:ea typeface="Pretendard" pitchFamily="34" charset="-122"/>
+                <a:cs typeface="Pretendard" pitchFamily="34" charset="-120"/>
+              </a:rPr>
+              <a:t>연습 수치와 다음 시험</a:t>
+            </a:r>
+            <a:endParaRPr lang="ko-KR" sz="1425" dirty="0">
+              <a:ea typeface="Pretendard"/>
+            </a:endParaRPr>
+          </a:p>
+        </p:txBody>
+      </p:sp>
+      <p:sp>
+        <p:nvSpPr>
+          <p:cNvPr id="18" name="Shape 16"/>
           <p:cNvSpPr/>
           <p:nvPr/>
         </p:nvSpPr>
         <p:spPr>
           <a:xfrm>
-            <a:off x="6477000" y="2314575"/>
-            <a:ext cx="5181600" cy="3143250"/>
-          </a:xfrm>
-          <a:prstGeom prst="rect">
-            <a:avLst/>
-          </a:prstGeom>
-          <a:solidFill>
-            <a:srgbClr val="FFFFFF"/>
-          </a:solidFill>
-          <a:ln w="9525">
+            <a:off x="533400" y="6362700"/>
+            <a:ext cx="11125200" cy="0"/>
+          </a:xfrm>
+          <a:prstGeom prst="line">
+            <a:avLst/>
+          </a:prstGeom>
+          <a:noFill/>
+          <a:ln w="19050">
             <a:solidFill>
-              <a:srgbClr val="2459A6"/>
+              <a:srgbClr val="CDD6E1"/>
             </a:solidFill>
             <a:prstDash val="solid"/>
           </a:ln>
@@ -1719,176 +2105,30 @@
       </p:sp>
       <p:sp>
         <p:nvSpPr>
-          <p:cNvPr id="10" name="Text 8"/>
-          <p:cNvSpPr txBox="1"/>
-          <p:nvPr/>
-        </p:nvSpPr>
-        <p:spPr>
-          <a:xfrm>
-            <a:off x="6819900" y="2619375"/>
-            <a:ext cx="4476750" cy="476250"/>
-          </a:xfrm>
-          <a:prstGeom prst="rect">
-            <a:avLst/>
-          </a:prstGeom>
-          <a:noFill/>
-          <a:ln/>
-        </p:spPr>
-        <p:txBody>
-          <a:bodyPr wrap="square" lIns="0" tIns="0" rIns="0" bIns="0" rtlCol="0" anchor="t"/>
-          <a:lstStyle/>
-          <a:p>
-            <a:pPr algn="l" indent="0" marL="0">
-              <a:buNone/>
-            </a:pPr>
-            <a:r>
-              <a:rPr lang="ko-KR" sz="2550" b="1" dirty="0">
-                <a:solidFill>
-                  <a:srgbClr val="2459A6"/>
-                </a:solidFill>
-                <a:latin typeface="Pretendard" pitchFamily="34" charset="0"/>
-                <a:ea typeface="Pretendard" pitchFamily="34" charset="-122"/>
-                <a:cs typeface="Pretendard" pitchFamily="34" charset="-120"/>
-              </a:rPr>
-              <a:t>태블릿 검수 기록</a:t>
-            </a:r>
-            <a:endParaRPr lang="ko-KR" sz="2550" dirty="0">
-              <a:ea typeface="Pretendard"/>
-            </a:endParaRPr>
-          </a:p>
-        </p:txBody>
-      </p:sp>
-      <p:sp>
-        <p:nvSpPr>
-          <p:cNvPr id="11" name="Text 9"/>
-          <p:cNvSpPr txBox="1"/>
-          <p:nvPr/>
-        </p:nvSpPr>
-        <p:spPr>
-          <a:xfrm>
-            <a:off x="6819900" y="3381375"/>
-            <a:ext cx="4191000" cy="361950"/>
-          </a:xfrm>
-          <a:prstGeom prst="rect">
-            <a:avLst/>
-          </a:prstGeom>
-          <a:noFill/>
-          <a:ln/>
-        </p:spPr>
-        <p:txBody>
-          <a:bodyPr wrap="square" lIns="0" tIns="0" rIns="0" bIns="0" rtlCol="0" anchor="t"/>
-          <a:lstStyle/>
-          <a:p>
-            <a:pPr algn="l" indent="0" marL="0">
-              <a:buNone/>
-            </a:pPr>
-            <a:r>
-              <a:rPr lang="ko-KR" sz="2025" dirty="0">
-                <a:solidFill>
-                  <a:srgbClr val="192A40"/>
-                </a:solidFill>
-                <a:latin typeface="Pretendard" pitchFamily="34" charset="0"/>
-                <a:ea typeface="Pretendard" pitchFamily="34" charset="-122"/>
-                <a:cs typeface="Pretendard" pitchFamily="34" charset="-120"/>
-              </a:rPr>
-              <a:t>상품 코드 조회</a:t>
-            </a:r>
-            <a:endParaRPr lang="ko-KR" sz="2025" dirty="0">
-              <a:ea typeface="Pretendard"/>
-            </a:endParaRPr>
-          </a:p>
-        </p:txBody>
-      </p:sp>
-      <p:sp>
-        <p:nvSpPr>
-          <p:cNvPr id="12" name="Shape 10"/>
-          <p:cNvSpPr/>
-          <p:nvPr/>
-        </p:nvSpPr>
-        <p:spPr>
-          <a:xfrm>
-            <a:off x="6838950" y="3876675"/>
-            <a:ext cx="4448175" cy="0"/>
-          </a:xfrm>
-          <a:prstGeom prst="line">
-            <a:avLst/>
-          </a:prstGeom>
-          <a:noFill/>
-          <a:ln w="19050">
-            <a:solidFill>
-              <a:srgbClr val="2459A6"/>
-            </a:solidFill>
-            <a:prstDash val="solid"/>
-          </a:ln>
-        </p:spPr>
-      </p:sp>
-      <p:sp>
-        <p:nvSpPr>
-          <p:cNvPr id="13" name="Text 11"/>
-          <p:cNvSpPr txBox="1"/>
-          <p:nvPr/>
-        </p:nvSpPr>
-        <p:spPr>
-          <a:xfrm>
-            <a:off x="6819900" y="4171950"/>
-            <a:ext cx="4286250" cy="428625"/>
-          </a:xfrm>
-          <a:prstGeom prst="rect">
-            <a:avLst/>
-          </a:prstGeom>
-          <a:noFill/>
-          <a:ln/>
-        </p:spPr>
-        <p:txBody>
-          <a:bodyPr wrap="square" lIns="0" tIns="0" rIns="0" bIns="0" rtlCol="0" anchor="t"/>
-          <a:lstStyle/>
-          <a:p>
-            <a:pPr algn="l" indent="0" marL="0">
-              <a:buNone/>
-            </a:pPr>
-            <a:r>
-              <a:rPr lang="ko-KR" sz="2250" dirty="0">
-                <a:solidFill>
-                  <a:srgbClr val="192A40"/>
-                </a:solidFill>
-                <a:latin typeface="Pretendard" pitchFamily="34" charset="0"/>
-                <a:ea typeface="Pretendard" pitchFamily="34" charset="-122"/>
-                <a:cs typeface="Pretendard" pitchFamily="34" charset="-120"/>
-              </a:rPr>
-              <a:t>상태 · 사진 · 저장</a:t>
-            </a:r>
-            <a:endParaRPr lang="ko-KR" sz="2250" dirty="0">
-              <a:ea typeface="Pretendard"/>
-            </a:endParaRPr>
-          </a:p>
-        </p:txBody>
-      </p:sp>
-      <p:sp>
-        <p:nvSpPr>
-          <p:cNvPr id="14" name="Text 12"/>
-          <p:cNvSpPr txBox="1"/>
-          <p:nvPr/>
-        </p:nvSpPr>
-        <p:spPr>
-          <a:xfrm>
-            <a:off x="533400" y="5638800"/>
-            <a:ext cx="9048750" cy="304800"/>
-          </a:xfrm>
-          <a:prstGeom prst="rect">
-            <a:avLst/>
-          </a:prstGeom>
-          <a:noFill/>
-          <a:ln/>
-        </p:spPr>
-        <p:txBody>
-          <a:bodyPr wrap="square" lIns="0" tIns="0" rIns="0" bIns="0" rtlCol="0" anchor="t"/>
-          <a:lstStyle/>
-          <a:p>
-            <a:pPr algn="l" indent="0" marL="0">
-              <a:buNone/>
-            </a:pPr>
-            <a:r>
-              <a:rPr lang="ko-KR" sz="1500" dirty="0">
+          <p:cNvPr id="19" name="Text 17"/>
+          <p:cNvSpPr txBox="1"/>
+          <p:nvPr/>
+        </p:nvSpPr>
+        <p:spPr>
+          <a:xfrm>
+            <a:off x="533400" y="6496050"/>
+            <a:ext cx="10477500" cy="190500"/>
+          </a:xfrm>
+          <a:prstGeom prst="rect">
+            <a:avLst/>
+          </a:prstGeom>
+          <a:noFill/>
+          <a:ln/>
+        </p:spPr>
+        <p:txBody>
+          <a:bodyPr wrap="square" lIns="0" tIns="0" rIns="0" bIns="0" rtlCol="0" anchor="t"/>
+          <a:lstStyle/>
+          <a:p>
+            <a:pPr algn="l" indent="0" marL="0">
+              <a:buNone/>
+            </a:pPr>
+            <a:r>
+              <a:rPr lang="ko-KR" sz="900" dirty="0">
                 <a:solidFill>
                   <a:srgbClr val="526174"/>
                 </a:solidFill>
@@ -1896,9 +2136,50 @@
                 <a:ea typeface="Pretendard" pitchFamily="34" charset="-122"/>
                 <a:cs typeface="Pretendard" pitchFamily="34" charset="-120"/>
               </a:rPr>
-              <a:t>4분 발표  /  현장 운영 담당자</a:t>
-            </a:r>
-            <a:endParaRPr lang="ko-KR" sz="1500" dirty="0">
+              <a:t>Clean PPT  |  가상 예제</a:t>
+            </a:r>
+            <a:endParaRPr lang="ko-KR" sz="900" dirty="0">
+              <a:ea typeface="Pretendard"/>
+            </a:endParaRPr>
+          </a:p>
+        </p:txBody>
+      </p:sp>
+      <p:sp>
+        <p:nvSpPr>
+          <p:cNvPr id="20" name="Text 18"/>
+          <p:cNvSpPr txBox="1"/>
+          <p:nvPr/>
+        </p:nvSpPr>
+        <p:spPr>
+          <a:xfrm>
+            <a:off x="10858500" y="6477000"/>
+            <a:ext cx="800100" cy="209550"/>
+          </a:xfrm>
+          <a:prstGeom prst="rect">
+            <a:avLst/>
+          </a:prstGeom>
+          <a:noFill/>
+          <a:ln/>
+        </p:spPr>
+        <p:txBody>
+          <a:bodyPr wrap="square" lIns="0" tIns="0" rIns="0" bIns="0" rtlCol="0" anchor="t"/>
+          <a:lstStyle/>
+          <a:p>
+            <a:pPr algn="l" indent="0" marL="0">
+              <a:buNone/>
+            </a:pPr>
+            <a:r>
+              <a:rPr lang="ko-KR" sz="1050" dirty="0">
+                <a:solidFill>
+                  <a:srgbClr val="526174"/>
+                </a:solidFill>
+                <a:latin typeface="Pretendard" pitchFamily="34" charset="0"/>
+                <a:ea typeface="Pretendard" pitchFamily="34" charset="-122"/>
+                <a:cs typeface="Pretendard" pitchFamily="34" charset="-120"/>
+              </a:rPr>
+              <a:t>01 / 06</a:t>
+            </a:r>
+            <a:endParaRPr lang="ko-KR" sz="1050" dirty="0">
               <a:ea typeface="Pretendard"/>
             </a:endParaRPr>
           </a:p>
@@ -3223,33 +3504,33 @@
         <p:spPr>
           <a:xfrm>
             <a:off x="533400" y="285750"/>
-            <a:ext cx="11125200" cy="228600"/>
-          </a:xfrm>
-          <a:prstGeom prst="rect">
-            <a:avLst/>
-          </a:prstGeom>
-          <a:noFill/>
-          <a:ln/>
-        </p:spPr>
-        <p:txBody>
-          <a:bodyPr wrap="square" lIns="0" tIns="0" rIns="0" bIns="0" rtlCol="0" anchor="t"/>
-          <a:lstStyle/>
-          <a:p>
-            <a:pPr algn="l" indent="0" marL="0">
-              <a:buNone/>
-            </a:pPr>
-            <a:r>
-              <a:rPr lang="ko-KR" sz="975" dirty="0">
-                <a:solidFill>
-                  <a:srgbClr val="526174"/>
-                </a:solidFill>
-                <a:latin typeface="Pretendard" pitchFamily="34" charset="0"/>
-                <a:ea typeface="Pretendard" pitchFamily="34" charset="-122"/>
-                <a:cs typeface="Pretendard" pitchFamily="34" charset="-120"/>
-              </a:rPr>
-              <a:t>02 · 태블릿 사용</a:t>
-            </a:r>
-            <a:endParaRPr lang="ko-KR" sz="975" dirty="0">
+            <a:ext cx="10477500" cy="228600"/>
+          </a:xfrm>
+          <a:prstGeom prst="rect">
+            <a:avLst/>
+          </a:prstGeom>
+          <a:noFill/>
+          <a:ln/>
+        </p:spPr>
+        <p:txBody>
+          <a:bodyPr wrap="square" lIns="0" tIns="0" rIns="0" bIns="0" rtlCol="0" anchor="t"/>
+          <a:lstStyle/>
+          <a:p>
+            <a:pPr algn="l" indent="0" marL="0">
+              <a:buNone/>
+            </a:pPr>
+            <a:r>
+              <a:rPr lang="ko-KR" sz="1200" b="1" dirty="0">
+                <a:solidFill>
+                  <a:srgbClr val="2459A6"/>
+                </a:solidFill>
+                <a:latin typeface="Pretendard" pitchFamily="34" charset="0"/>
+                <a:ea typeface="Pretendard" pitchFamily="34" charset="-122"/>
+                <a:cs typeface="Pretendard" pitchFamily="34" charset="-120"/>
+              </a:rPr>
+              <a:t>CLEAN PPT  /  BUSINESS PRESENTATION</a:t>
+            </a:r>
+            <a:endParaRPr lang="ko-KR" sz="1200" dirty="0">
               <a:ea typeface="Pretendard"/>
             </a:endParaRPr>
           </a:p>
@@ -3304,24 +3585,24 @@
         </p:nvSpPr>
         <p:spPr>
           <a:xfrm>
-            <a:off x="10668000" y="6438900"/>
-            <a:ext cx="990600" cy="190500"/>
-          </a:xfrm>
-          <a:prstGeom prst="rect">
-            <a:avLst/>
-          </a:prstGeom>
-          <a:noFill/>
-          <a:ln/>
-        </p:spPr>
-        <p:txBody>
-          <a:bodyPr wrap="square" lIns="0" tIns="0" rIns="0" bIns="0" rtlCol="0" anchor="t"/>
-          <a:lstStyle/>
-          <a:p>
-            <a:pPr algn="r" indent="0" marL="0">
-              <a:buNone/>
-            </a:pPr>
-            <a:r>
-              <a:rPr lang="ko-KR" sz="975" dirty="0">
+            <a:off x="533400" y="1495425"/>
+            <a:ext cx="11125200" cy="381000"/>
+          </a:xfrm>
+          <a:prstGeom prst="rect">
+            <a:avLst/>
+          </a:prstGeom>
+          <a:noFill/>
+          <a:ln/>
+        </p:spPr>
+        <p:txBody>
+          <a:bodyPr wrap="square" lIns="0" tIns="0" rIns="0" bIns="0" rtlCol="0" anchor="t"/>
+          <a:lstStyle/>
+          <a:p>
+            <a:pPr algn="l" indent="0" marL="0">
+              <a:buNone/>
+            </a:pPr>
+            <a:r>
+              <a:rPr lang="ko-KR" sz="1575" dirty="0">
                 <a:solidFill>
                   <a:srgbClr val="526174"/>
                 </a:solidFill>
@@ -3329,75 +3610,34 @@
                 <a:ea typeface="Pretendard" pitchFamily="34" charset="-122"/>
                 <a:cs typeface="Pretendard" pitchFamily="34" charset="-120"/>
               </a:rPr>
-              <a:t>3 / 6</a:t>
-            </a:r>
-            <a:endParaRPr lang="ko-KR" sz="975" dirty="0">
-              <a:ea typeface="Pretendard"/>
-            </a:endParaRPr>
-          </a:p>
-        </p:txBody>
-      </p:sp>
-      <p:sp>
-        <p:nvSpPr>
-          <p:cNvPr id="5" name="Text 3"/>
-          <p:cNvSpPr txBox="1"/>
-          <p:nvPr/>
-        </p:nvSpPr>
-        <p:spPr>
-          <a:xfrm>
-            <a:off x="533400" y="1514475"/>
-            <a:ext cx="11125200" cy="419100"/>
-          </a:xfrm>
-          <a:prstGeom prst="rect">
-            <a:avLst/>
-          </a:prstGeom>
-          <a:noFill/>
-          <a:ln/>
-        </p:spPr>
-        <p:txBody>
-          <a:bodyPr wrap="square" lIns="0" tIns="0" rIns="0" bIns="0" rtlCol="0" anchor="t"/>
-          <a:lstStyle/>
-          <a:p>
-            <a:pPr algn="l" indent="0" marL="0">
-              <a:buNone/>
-            </a:pPr>
-            <a:r>
-              <a:rPr lang="ko-KR" sz="2025" dirty="0">
-                <a:solidFill>
-                  <a:srgbClr val="526174"/>
-                </a:solidFill>
-                <a:latin typeface="Pretendard" pitchFamily="34" charset="0"/>
-                <a:ea typeface="Pretendard" pitchFamily="34" charset="-122"/>
-                <a:cs typeface="Pretendard" pitchFamily="34" charset="-120"/>
-              </a:rPr>
-              <a:t>상품 확인부터 기록 저장까지 한 기기에서 진행</a:t>
-            </a:r>
-            <a:endParaRPr lang="ko-KR" sz="2025" dirty="0">
-              <a:ea typeface="Pretendard"/>
-            </a:endParaRPr>
-          </a:p>
-        </p:txBody>
-      </p:sp>
-      <p:sp>
-        <p:nvSpPr>
-          <p:cNvPr id="6" name="Shape 4"/>
+              <a:t>태블릿 입력은 기록을 돕고, 최종 판단은 담당자가 맡습니다.</a:t>
+            </a:r>
+            <a:endParaRPr lang="ko-KR" sz="1575" dirty="0">
+              <a:ea typeface="Pretendard"/>
+            </a:endParaRPr>
+          </a:p>
+        </p:txBody>
+      </p:sp>
+      <p:sp>
+        <p:nvSpPr>
+          <p:cNvPr id="5" name="Shape 3"/>
           <p:cNvSpPr/>
           <p:nvPr/>
         </p:nvSpPr>
         <p:spPr>
           <a:xfrm>
-            <a:off x="533400" y="2571750"/>
-            <a:ext cx="2324100" cy="1476375"/>
+            <a:off x="533400" y="2305050"/>
+            <a:ext cx="2495550" cy="590550"/>
           </a:xfrm>
           <a:prstGeom prst="rect">
             <a:avLst/>
           </a:prstGeom>
           <a:solidFill>
-            <a:srgbClr val="EEF3F9"/>
+            <a:srgbClr val="F0F4FA"/>
           </a:solidFill>
-          <a:ln w="9525">
+          <a:ln w="12700">
             <a:solidFill>
-              <a:srgbClr val="EEF3F9"/>
+              <a:srgbClr val="F0F4FA"/>
             </a:solidFill>
             <a:prstDash val="solid"/>
           </a:ln>
@@ -3405,71 +3645,71 @@
       </p:sp>
       <p:sp>
         <p:nvSpPr>
+          <p:cNvPr id="6" name="Text 4"/>
+          <p:cNvSpPr txBox="1"/>
+          <p:nvPr/>
+        </p:nvSpPr>
+        <p:spPr>
+          <a:xfrm>
+            <a:off x="723900" y="2438400"/>
+            <a:ext cx="2114550" cy="381000"/>
+          </a:xfrm>
+          <a:prstGeom prst="rect">
+            <a:avLst/>
+          </a:prstGeom>
+          <a:noFill/>
+          <a:ln/>
+        </p:spPr>
+        <p:txBody>
+          <a:bodyPr wrap="square" lIns="0" tIns="0" rIns="0" bIns="0" rtlCol="0" anchor="t"/>
+          <a:lstStyle/>
+          <a:p>
+            <a:pPr algn="l" indent="0" marL="0">
+              <a:buNone/>
+            </a:pPr>
+            <a:r>
+              <a:rPr lang="ko-KR" sz="1875" b="1" dirty="0">
+                <a:solidFill>
+                  <a:srgbClr val="2459A6"/>
+                </a:solidFill>
+                <a:latin typeface="Pretendard" pitchFamily="34" charset="0"/>
+                <a:ea typeface="Pretendard" pitchFamily="34" charset="-122"/>
+                <a:cs typeface="Pretendard" pitchFamily="34" charset="-120"/>
+              </a:rPr>
+              <a:t>01  제품 확인</a:t>
+            </a:r>
+            <a:endParaRPr lang="ko-KR" sz="1875" dirty="0">
+              <a:ea typeface="Pretendard"/>
+            </a:endParaRPr>
+          </a:p>
+        </p:txBody>
+      </p:sp>
+      <p:sp>
+        <p:nvSpPr>
           <p:cNvPr id="7" name="Text 5"/>
           <p:cNvSpPr txBox="1"/>
           <p:nvPr/>
         </p:nvSpPr>
         <p:spPr>
           <a:xfrm>
-            <a:off x="742950" y="2743200"/>
-            <a:ext cx="1905000" cy="361950"/>
-          </a:xfrm>
-          <a:prstGeom prst="rect">
-            <a:avLst/>
-          </a:prstGeom>
-          <a:noFill/>
-          <a:ln/>
-        </p:spPr>
-        <p:txBody>
-          <a:bodyPr wrap="square" lIns="0" tIns="0" rIns="0" bIns="0" rtlCol="0" anchor="t"/>
-          <a:lstStyle/>
-          <a:p>
-            <a:pPr algn="l" indent="0" marL="0">
-              <a:buNone/>
-            </a:pPr>
-            <a:r>
-              <a:rPr lang="ko-KR" sz="1650" b="1" dirty="0">
-                <a:solidFill>
-                  <a:srgbClr val="2459A6"/>
-                </a:solidFill>
-                <a:latin typeface="Pretendard" pitchFamily="34" charset="0"/>
-                <a:ea typeface="Pretendard" pitchFamily="34" charset="-122"/>
-                <a:cs typeface="Pretendard" pitchFamily="34" charset="-120"/>
-              </a:rPr>
-              <a:t>01</a:t>
-            </a:r>
-            <a:endParaRPr lang="ko-KR" sz="1650" dirty="0">
-              <a:ea typeface="Pretendard"/>
-            </a:endParaRPr>
-          </a:p>
-        </p:txBody>
-      </p:sp>
-      <p:sp>
-        <p:nvSpPr>
-          <p:cNvPr id="8" name="Text 6"/>
-          <p:cNvSpPr txBox="1"/>
-          <p:nvPr/>
-        </p:nvSpPr>
-        <p:spPr>
-          <a:xfrm>
-            <a:off x="742950" y="3314700"/>
-            <a:ext cx="1905000" cy="457200"/>
-          </a:xfrm>
-          <a:prstGeom prst="rect">
-            <a:avLst/>
-          </a:prstGeom>
-          <a:noFill/>
-          <a:ln/>
-        </p:spPr>
-        <p:txBody>
-          <a:bodyPr wrap="square" lIns="0" tIns="0" rIns="0" bIns="0" rtlCol="0" anchor="t"/>
-          <a:lstStyle/>
-          <a:p>
-            <a:pPr algn="l" indent="0" marL="0">
-              <a:buNone/>
-            </a:pPr>
-            <a:r>
-              <a:rPr lang="ko-KR" sz="2175" b="1" dirty="0">
+            <a:off x="533400" y="3209925"/>
+            <a:ext cx="2495550" cy="1428750"/>
+          </a:xfrm>
+          <a:prstGeom prst="rect">
+            <a:avLst/>
+          </a:prstGeom>
+          <a:noFill/>
+          <a:ln/>
+        </p:spPr>
+        <p:txBody>
+          <a:bodyPr wrap="square" lIns="0" tIns="0" rIns="0" bIns="0" rtlCol="0" anchor="t"/>
+          <a:lstStyle/>
+          <a:p>
+            <a:pPr algn="l" indent="0" marL="0">
+              <a:buNone/>
+            </a:pPr>
+            <a:r>
+              <a:rPr lang="ko-KR" sz="1875" dirty="0">
                 <a:solidFill>
                   <a:srgbClr val="192A40"/>
                 </a:solidFill>
@@ -3477,34 +3717,51 @@
                 <a:ea typeface="Pretendard" pitchFamily="34" charset="-122"/>
                 <a:cs typeface="Pretendard" pitchFamily="34" charset="-120"/>
               </a:rPr>
-              <a:t>상품 코드 조회</a:t>
-            </a:r>
-            <a:endParaRPr lang="ko-KR" sz="2175" dirty="0">
-              <a:ea typeface="Pretendard"/>
-            </a:endParaRPr>
-          </a:p>
-        </p:txBody>
-      </p:sp>
-      <p:sp>
-        <p:nvSpPr>
-          <p:cNvPr id="9" name="Shape 7"/>
+              <a:t>제품 코드를</a:t>
+            </a:r>
+            <a:endParaRPr lang="ko-KR" sz="1875" dirty="0">
+              <a:ea typeface="Pretendard"/>
+            </a:endParaRPr>
+          </a:p>
+          <a:p>
+            <a:pPr algn="l" indent="0" marL="0">
+              <a:buNone/>
+            </a:pPr>
+            <a:r>
+              <a:rPr lang="ko-KR" sz="1875" dirty="0">
+                <a:solidFill>
+                  <a:srgbClr val="192A40"/>
+                </a:solidFill>
+                <a:latin typeface="Pretendard" pitchFamily="34" charset="0"/>
+                <a:ea typeface="Pretendard" pitchFamily="34" charset="-122"/>
+                <a:cs typeface="Pretendard" pitchFamily="34" charset="-120"/>
+              </a:rPr>
+              <a:t>먼저 확인합니다.</a:t>
+            </a:r>
+            <a:endParaRPr lang="ko-KR" sz="1875" dirty="0">
+              <a:ea typeface="Pretendard"/>
+            </a:endParaRPr>
+          </a:p>
+        </p:txBody>
+      </p:sp>
+      <p:sp>
+        <p:nvSpPr>
+          <p:cNvPr id="8" name="Shape 6"/>
           <p:cNvSpPr/>
           <p:nvPr/>
         </p:nvSpPr>
         <p:spPr>
           <a:xfrm>
-            <a:off x="3467100" y="2571750"/>
-            <a:ext cx="2324100" cy="1476375"/>
-          </a:xfrm>
-          <a:prstGeom prst="rect">
-            <a:avLst/>
-          </a:prstGeom>
-          <a:solidFill>
-            <a:srgbClr val="EEF3F9"/>
-          </a:solidFill>
-          <a:ln w="9525">
+            <a:off x="533400" y="4829175"/>
+            <a:ext cx="2495550" cy="0"/>
+          </a:xfrm>
+          <a:prstGeom prst="line">
+            <a:avLst/>
+          </a:prstGeom>
+          <a:noFill/>
+          <a:ln w="19050">
             <a:solidFill>
-              <a:srgbClr val="EEF3F9"/>
+              <a:srgbClr val="CDD6E1"/>
             </a:solidFill>
             <a:prstDash val="solid"/>
           </a:ln>
@@ -3512,310 +3769,14 @@
       </p:sp>
       <p:sp>
         <p:nvSpPr>
-          <p:cNvPr id="10" name="Text 8"/>
-          <p:cNvSpPr txBox="1"/>
-          <p:nvPr/>
-        </p:nvSpPr>
-        <p:spPr>
-          <a:xfrm>
-            <a:off x="3676650" y="2743200"/>
-            <a:ext cx="1905000" cy="361950"/>
-          </a:xfrm>
-          <a:prstGeom prst="rect">
-            <a:avLst/>
-          </a:prstGeom>
-          <a:noFill/>
-          <a:ln/>
-        </p:spPr>
-        <p:txBody>
-          <a:bodyPr wrap="square" lIns="0" tIns="0" rIns="0" bIns="0" rtlCol="0" anchor="t"/>
-          <a:lstStyle/>
-          <a:p>
-            <a:pPr algn="l" indent="0" marL="0">
-              <a:buNone/>
-            </a:pPr>
-            <a:r>
-              <a:rPr lang="ko-KR" sz="1650" b="1" dirty="0">
-                <a:solidFill>
-                  <a:srgbClr val="2459A6"/>
-                </a:solidFill>
-                <a:latin typeface="Pretendard" pitchFamily="34" charset="0"/>
-                <a:ea typeface="Pretendard" pitchFamily="34" charset="-122"/>
-                <a:cs typeface="Pretendard" pitchFamily="34" charset="-120"/>
-              </a:rPr>
-              <a:t>02</a:t>
-            </a:r>
-            <a:endParaRPr lang="ko-KR" sz="1650" dirty="0">
-              <a:ea typeface="Pretendard"/>
-            </a:endParaRPr>
-          </a:p>
-        </p:txBody>
-      </p:sp>
-      <p:sp>
-        <p:nvSpPr>
-          <p:cNvPr id="11" name="Text 9"/>
-          <p:cNvSpPr txBox="1"/>
-          <p:nvPr/>
-        </p:nvSpPr>
-        <p:spPr>
-          <a:xfrm>
-            <a:off x="3676650" y="3314700"/>
-            <a:ext cx="1905000" cy="457200"/>
-          </a:xfrm>
-          <a:prstGeom prst="rect">
-            <a:avLst/>
-          </a:prstGeom>
-          <a:noFill/>
-          <a:ln/>
-        </p:spPr>
-        <p:txBody>
-          <a:bodyPr wrap="square" lIns="0" tIns="0" rIns="0" bIns="0" rtlCol="0" anchor="t"/>
-          <a:lstStyle/>
-          <a:p>
-            <a:pPr algn="l" indent="0" marL="0">
-              <a:buNone/>
-            </a:pPr>
-            <a:r>
-              <a:rPr lang="ko-KR" sz="2175" b="1" dirty="0">
-                <a:solidFill>
-                  <a:srgbClr val="192A40"/>
-                </a:solidFill>
-                <a:latin typeface="Pretendard" pitchFamily="34" charset="0"/>
-                <a:ea typeface="Pretendard" pitchFamily="34" charset="-122"/>
-                <a:cs typeface="Pretendard" pitchFamily="34" charset="-120"/>
-              </a:rPr>
-              <a:t>상태 체크</a:t>
-            </a:r>
-            <a:endParaRPr lang="ko-KR" sz="2175" dirty="0">
-              <a:ea typeface="Pretendard"/>
-            </a:endParaRPr>
-          </a:p>
-        </p:txBody>
-      </p:sp>
-      <p:sp>
-        <p:nvSpPr>
-          <p:cNvPr id="12" name="Shape 10"/>
+          <p:cNvPr id="9" name="Shape 7"/>
           <p:cNvSpPr/>
           <p:nvPr/>
         </p:nvSpPr>
         <p:spPr>
           <a:xfrm>
-            <a:off x="6400800" y="2571750"/>
-            <a:ext cx="2324100" cy="1476375"/>
-          </a:xfrm>
-          <a:prstGeom prst="rect">
-            <a:avLst/>
-          </a:prstGeom>
-          <a:solidFill>
-            <a:srgbClr val="EEF3F9"/>
-          </a:solidFill>
-          <a:ln w="9525">
-            <a:solidFill>
-              <a:srgbClr val="EEF3F9"/>
-            </a:solidFill>
-            <a:prstDash val="solid"/>
-          </a:ln>
-        </p:spPr>
-      </p:sp>
-      <p:sp>
-        <p:nvSpPr>
-          <p:cNvPr id="13" name="Text 11"/>
-          <p:cNvSpPr txBox="1"/>
-          <p:nvPr/>
-        </p:nvSpPr>
-        <p:spPr>
-          <a:xfrm>
-            <a:off x="6610350" y="2743200"/>
-            <a:ext cx="1905000" cy="361950"/>
-          </a:xfrm>
-          <a:prstGeom prst="rect">
-            <a:avLst/>
-          </a:prstGeom>
-          <a:noFill/>
-          <a:ln/>
-        </p:spPr>
-        <p:txBody>
-          <a:bodyPr wrap="square" lIns="0" tIns="0" rIns="0" bIns="0" rtlCol="0" anchor="t"/>
-          <a:lstStyle/>
-          <a:p>
-            <a:pPr algn="l" indent="0" marL="0">
-              <a:buNone/>
-            </a:pPr>
-            <a:r>
-              <a:rPr lang="ko-KR" sz="1650" b="1" dirty="0">
-                <a:solidFill>
-                  <a:srgbClr val="2459A6"/>
-                </a:solidFill>
-                <a:latin typeface="Pretendard" pitchFamily="34" charset="0"/>
-                <a:ea typeface="Pretendard" pitchFamily="34" charset="-122"/>
-                <a:cs typeface="Pretendard" pitchFamily="34" charset="-120"/>
-              </a:rPr>
-              <a:t>03</a:t>
-            </a:r>
-            <a:endParaRPr lang="ko-KR" sz="1650" dirty="0">
-              <a:ea typeface="Pretendard"/>
-            </a:endParaRPr>
-          </a:p>
-        </p:txBody>
-      </p:sp>
-      <p:sp>
-        <p:nvSpPr>
-          <p:cNvPr id="14" name="Text 12"/>
-          <p:cNvSpPr txBox="1"/>
-          <p:nvPr/>
-        </p:nvSpPr>
-        <p:spPr>
-          <a:xfrm>
-            <a:off x="6610350" y="3314700"/>
-            <a:ext cx="1905000" cy="457200"/>
-          </a:xfrm>
-          <a:prstGeom prst="rect">
-            <a:avLst/>
-          </a:prstGeom>
-          <a:noFill/>
-          <a:ln/>
-        </p:spPr>
-        <p:txBody>
-          <a:bodyPr wrap="square" lIns="0" tIns="0" rIns="0" bIns="0" rtlCol="0" anchor="t"/>
-          <a:lstStyle/>
-          <a:p>
-            <a:pPr algn="l" indent="0" marL="0">
-              <a:buNone/>
-            </a:pPr>
-            <a:r>
-              <a:rPr lang="ko-KR" sz="2175" b="1" dirty="0">
-                <a:solidFill>
-                  <a:srgbClr val="192A40"/>
-                </a:solidFill>
-                <a:latin typeface="Pretendard" pitchFamily="34" charset="0"/>
-                <a:ea typeface="Pretendard" pitchFamily="34" charset="-122"/>
-                <a:cs typeface="Pretendard" pitchFamily="34" charset="-120"/>
-              </a:rPr>
-              <a:t>사진 첨부</a:t>
-            </a:r>
-            <a:endParaRPr lang="ko-KR" sz="2175" dirty="0">
-              <a:ea typeface="Pretendard"/>
-            </a:endParaRPr>
-          </a:p>
-        </p:txBody>
-      </p:sp>
-      <p:sp>
-        <p:nvSpPr>
-          <p:cNvPr id="15" name="Shape 13"/>
-          <p:cNvSpPr/>
-          <p:nvPr/>
-        </p:nvSpPr>
-        <p:spPr>
-          <a:xfrm>
-            <a:off x="9334500" y="2571750"/>
-            <a:ext cx="2324100" cy="1476375"/>
-          </a:xfrm>
-          <a:prstGeom prst="rect">
-            <a:avLst/>
-          </a:prstGeom>
-          <a:solidFill>
-            <a:srgbClr val="EEF3F9"/>
-          </a:solidFill>
-          <a:ln w="9525">
-            <a:solidFill>
-              <a:srgbClr val="EEF3F9"/>
-            </a:solidFill>
-            <a:prstDash val="solid"/>
-          </a:ln>
-        </p:spPr>
-      </p:sp>
-      <p:sp>
-        <p:nvSpPr>
-          <p:cNvPr id="16" name="Text 14"/>
-          <p:cNvSpPr txBox="1"/>
-          <p:nvPr/>
-        </p:nvSpPr>
-        <p:spPr>
-          <a:xfrm>
-            <a:off x="9544050" y="2743200"/>
-            <a:ext cx="1905000" cy="361950"/>
-          </a:xfrm>
-          <a:prstGeom prst="rect">
-            <a:avLst/>
-          </a:prstGeom>
-          <a:noFill/>
-          <a:ln/>
-        </p:spPr>
-        <p:txBody>
-          <a:bodyPr wrap="square" lIns="0" tIns="0" rIns="0" bIns="0" rtlCol="0" anchor="t"/>
-          <a:lstStyle/>
-          <a:p>
-            <a:pPr algn="l" indent="0" marL="0">
-              <a:buNone/>
-            </a:pPr>
-            <a:r>
-              <a:rPr lang="ko-KR" sz="1650" b="1" dirty="0">
-                <a:solidFill>
-                  <a:srgbClr val="2459A6"/>
-                </a:solidFill>
-                <a:latin typeface="Pretendard" pitchFamily="34" charset="0"/>
-                <a:ea typeface="Pretendard" pitchFamily="34" charset="-122"/>
-                <a:cs typeface="Pretendard" pitchFamily="34" charset="-120"/>
-              </a:rPr>
-              <a:t>04</a:t>
-            </a:r>
-            <a:endParaRPr lang="ko-KR" sz="1650" dirty="0">
-              <a:ea typeface="Pretendard"/>
-            </a:endParaRPr>
-          </a:p>
-        </p:txBody>
-      </p:sp>
-      <p:sp>
-        <p:nvSpPr>
-          <p:cNvPr id="17" name="Text 15"/>
-          <p:cNvSpPr txBox="1"/>
-          <p:nvPr/>
-        </p:nvSpPr>
-        <p:spPr>
-          <a:xfrm>
-            <a:off x="9544050" y="3314700"/>
-            <a:ext cx="1905000" cy="457200"/>
-          </a:xfrm>
-          <a:prstGeom prst="rect">
-            <a:avLst/>
-          </a:prstGeom>
-          <a:noFill/>
-          <a:ln/>
-        </p:spPr>
-        <p:txBody>
-          <a:bodyPr wrap="square" lIns="0" tIns="0" rIns="0" bIns="0" rtlCol="0" anchor="t"/>
-          <a:lstStyle/>
-          <a:p>
-            <a:pPr algn="l" indent="0" marL="0">
-              <a:buNone/>
-            </a:pPr>
-            <a:r>
-              <a:rPr lang="ko-KR" sz="2175" b="1" dirty="0">
-                <a:solidFill>
-                  <a:srgbClr val="192A40"/>
-                </a:solidFill>
-                <a:latin typeface="Pretendard" pitchFamily="34" charset="0"/>
-                <a:ea typeface="Pretendard" pitchFamily="34" charset="-122"/>
-                <a:cs typeface="Pretendard" pitchFamily="34" charset="-120"/>
-              </a:rPr>
-              <a:t>기록 저장</a:t>
-            </a:r>
-            <a:endParaRPr lang="ko-KR" sz="2175" dirty="0">
-              <a:ea typeface="Pretendard"/>
-            </a:endParaRPr>
-          </a:p>
-        </p:txBody>
-      </p:sp>
-      <p:sp>
-        <p:nvSpPr>
-          <p:cNvPr id="18" name="Shape 16"/>
-          <p:cNvSpPr/>
-          <p:nvPr/>
-        </p:nvSpPr>
-        <p:spPr>
-          <a:xfrm>
-            <a:off x="2933700" y="3305175"/>
-            <a:ext cx="400050" cy="0"/>
+            <a:off x="3086100" y="2600325"/>
+            <a:ext cx="257175" cy="0"/>
           </a:xfrm>
           <a:prstGeom prst="line">
             <a:avLst/>
@@ -3832,14 +3793,163 @@
       </p:sp>
       <p:sp>
         <p:nvSpPr>
-          <p:cNvPr id="19" name="Shape 17"/>
+          <p:cNvPr id="10" name="Shape 8"/>
           <p:cNvSpPr/>
           <p:nvPr/>
         </p:nvSpPr>
         <p:spPr>
           <a:xfrm>
-            <a:off x="5867400" y="3305175"/>
-            <a:ext cx="400050" cy="0"/>
+            <a:off x="3409950" y="2305050"/>
+            <a:ext cx="2495550" cy="590550"/>
+          </a:xfrm>
+          <a:prstGeom prst="rect">
+            <a:avLst/>
+          </a:prstGeom>
+          <a:solidFill>
+            <a:srgbClr val="F0F4FA"/>
+          </a:solidFill>
+          <a:ln w="12700">
+            <a:solidFill>
+              <a:srgbClr val="F0F4FA"/>
+            </a:solidFill>
+            <a:prstDash val="solid"/>
+          </a:ln>
+        </p:spPr>
+      </p:sp>
+      <p:sp>
+        <p:nvSpPr>
+          <p:cNvPr id="11" name="Text 9"/>
+          <p:cNvSpPr txBox="1"/>
+          <p:nvPr/>
+        </p:nvSpPr>
+        <p:spPr>
+          <a:xfrm>
+            <a:off x="3600450" y="2438400"/>
+            <a:ext cx="2114550" cy="381000"/>
+          </a:xfrm>
+          <a:prstGeom prst="rect">
+            <a:avLst/>
+          </a:prstGeom>
+          <a:noFill/>
+          <a:ln/>
+        </p:spPr>
+        <p:txBody>
+          <a:bodyPr wrap="square" lIns="0" tIns="0" rIns="0" bIns="0" rtlCol="0" anchor="t"/>
+          <a:lstStyle/>
+          <a:p>
+            <a:pPr algn="l" indent="0" marL="0">
+              <a:buNone/>
+            </a:pPr>
+            <a:r>
+              <a:rPr lang="ko-KR" sz="1875" b="1" dirty="0">
+                <a:solidFill>
+                  <a:srgbClr val="2459A6"/>
+                </a:solidFill>
+                <a:latin typeface="Pretendard" pitchFamily="34" charset="0"/>
+                <a:ea typeface="Pretendard" pitchFamily="34" charset="-122"/>
+                <a:cs typeface="Pretendard" pitchFamily="34" charset="-120"/>
+              </a:rPr>
+              <a:t>02  상태 입력</a:t>
+            </a:r>
+            <a:endParaRPr lang="ko-KR" sz="1875" dirty="0">
+              <a:ea typeface="Pretendard"/>
+            </a:endParaRPr>
+          </a:p>
+        </p:txBody>
+      </p:sp>
+      <p:sp>
+        <p:nvSpPr>
+          <p:cNvPr id="12" name="Text 10"/>
+          <p:cNvSpPr txBox="1"/>
+          <p:nvPr/>
+        </p:nvSpPr>
+        <p:spPr>
+          <a:xfrm>
+            <a:off x="3409950" y="3209925"/>
+            <a:ext cx="2495550" cy="1428750"/>
+          </a:xfrm>
+          <a:prstGeom prst="rect">
+            <a:avLst/>
+          </a:prstGeom>
+          <a:noFill/>
+          <a:ln/>
+        </p:spPr>
+        <p:txBody>
+          <a:bodyPr wrap="square" lIns="0" tIns="0" rIns="0" bIns="0" rtlCol="0" anchor="t"/>
+          <a:lstStyle/>
+          <a:p>
+            <a:pPr algn="l" indent="0" marL="0">
+              <a:buNone/>
+            </a:pPr>
+            <a:r>
+              <a:rPr lang="ko-KR" sz="1875" dirty="0">
+                <a:solidFill>
+                  <a:srgbClr val="192A40"/>
+                </a:solidFill>
+                <a:latin typeface="Pretendard" pitchFamily="34" charset="0"/>
+                <a:ea typeface="Pretendard" pitchFamily="34" charset="-122"/>
+                <a:cs typeface="Pretendard" pitchFamily="34" charset="-120"/>
+              </a:rPr>
+              <a:t>검수 상태를</a:t>
+            </a:r>
+            <a:endParaRPr lang="ko-KR" sz="1875" dirty="0">
+              <a:ea typeface="Pretendard"/>
+            </a:endParaRPr>
+          </a:p>
+          <a:p>
+            <a:pPr algn="l" indent="0" marL="0">
+              <a:buNone/>
+            </a:pPr>
+            <a:r>
+              <a:rPr lang="ko-KR" sz="1875" dirty="0">
+                <a:solidFill>
+                  <a:srgbClr val="192A40"/>
+                </a:solidFill>
+                <a:latin typeface="Pretendard" pitchFamily="34" charset="0"/>
+                <a:ea typeface="Pretendard" pitchFamily="34" charset="-122"/>
+                <a:cs typeface="Pretendard" pitchFamily="34" charset="-120"/>
+              </a:rPr>
+              <a:t>선택합니다.</a:t>
+            </a:r>
+            <a:endParaRPr lang="ko-KR" sz="1875" dirty="0">
+              <a:ea typeface="Pretendard"/>
+            </a:endParaRPr>
+          </a:p>
+        </p:txBody>
+      </p:sp>
+      <p:sp>
+        <p:nvSpPr>
+          <p:cNvPr id="13" name="Shape 11"/>
+          <p:cNvSpPr/>
+          <p:nvPr/>
+        </p:nvSpPr>
+        <p:spPr>
+          <a:xfrm>
+            <a:off x="3409950" y="4829175"/>
+            <a:ext cx="2495550" cy="0"/>
+          </a:xfrm>
+          <a:prstGeom prst="line">
+            <a:avLst/>
+          </a:prstGeom>
+          <a:noFill/>
+          <a:ln w="19050">
+            <a:solidFill>
+              <a:srgbClr val="CDD6E1"/>
+            </a:solidFill>
+            <a:prstDash val="solid"/>
+          </a:ln>
+        </p:spPr>
+      </p:sp>
+      <p:sp>
+        <p:nvSpPr>
+          <p:cNvPr id="14" name="Shape 12"/>
+          <p:cNvSpPr/>
+          <p:nvPr/>
+        </p:nvSpPr>
+        <p:spPr>
+          <a:xfrm>
+            <a:off x="5962650" y="2600325"/>
+            <a:ext cx="257175" cy="0"/>
           </a:xfrm>
           <a:prstGeom prst="line">
             <a:avLst/>
@@ -3856,14 +3966,163 @@
       </p:sp>
       <p:sp>
         <p:nvSpPr>
-          <p:cNvPr id="20" name="Shape 18"/>
+          <p:cNvPr id="15" name="Shape 13"/>
           <p:cNvSpPr/>
           <p:nvPr/>
         </p:nvSpPr>
         <p:spPr>
           <a:xfrm>
-            <a:off x="8801100" y="3305175"/>
-            <a:ext cx="400050" cy="0"/>
+            <a:off x="6286500" y="2305050"/>
+            <a:ext cx="2495550" cy="590550"/>
+          </a:xfrm>
+          <a:prstGeom prst="rect">
+            <a:avLst/>
+          </a:prstGeom>
+          <a:solidFill>
+            <a:srgbClr val="F0F4FA"/>
+          </a:solidFill>
+          <a:ln w="12700">
+            <a:solidFill>
+              <a:srgbClr val="F0F4FA"/>
+            </a:solidFill>
+            <a:prstDash val="solid"/>
+          </a:ln>
+        </p:spPr>
+      </p:sp>
+      <p:sp>
+        <p:nvSpPr>
+          <p:cNvPr id="16" name="Text 14"/>
+          <p:cNvSpPr txBox="1"/>
+          <p:nvPr/>
+        </p:nvSpPr>
+        <p:spPr>
+          <a:xfrm>
+            <a:off x="6477000" y="2438400"/>
+            <a:ext cx="2114550" cy="381000"/>
+          </a:xfrm>
+          <a:prstGeom prst="rect">
+            <a:avLst/>
+          </a:prstGeom>
+          <a:noFill/>
+          <a:ln/>
+        </p:spPr>
+        <p:txBody>
+          <a:bodyPr wrap="square" lIns="0" tIns="0" rIns="0" bIns="0" rtlCol="0" anchor="t"/>
+          <a:lstStyle/>
+          <a:p>
+            <a:pPr algn="l" indent="0" marL="0">
+              <a:buNone/>
+            </a:pPr>
+            <a:r>
+              <a:rPr lang="ko-KR" sz="1875" b="1" dirty="0">
+                <a:solidFill>
+                  <a:srgbClr val="2459A6"/>
+                </a:solidFill>
+                <a:latin typeface="Pretendard" pitchFamily="34" charset="0"/>
+                <a:ea typeface="Pretendard" pitchFamily="34" charset="-122"/>
+                <a:cs typeface="Pretendard" pitchFamily="34" charset="-120"/>
+              </a:rPr>
+              <a:t>03  사진 첨부</a:t>
+            </a:r>
+            <a:endParaRPr lang="ko-KR" sz="1875" dirty="0">
+              <a:ea typeface="Pretendard"/>
+            </a:endParaRPr>
+          </a:p>
+        </p:txBody>
+      </p:sp>
+      <p:sp>
+        <p:nvSpPr>
+          <p:cNvPr id="17" name="Text 15"/>
+          <p:cNvSpPr txBox="1"/>
+          <p:nvPr/>
+        </p:nvSpPr>
+        <p:spPr>
+          <a:xfrm>
+            <a:off x="6286500" y="3209925"/>
+            <a:ext cx="2495550" cy="1428750"/>
+          </a:xfrm>
+          <a:prstGeom prst="rect">
+            <a:avLst/>
+          </a:prstGeom>
+          <a:noFill/>
+          <a:ln/>
+        </p:spPr>
+        <p:txBody>
+          <a:bodyPr wrap="square" lIns="0" tIns="0" rIns="0" bIns="0" rtlCol="0" anchor="t"/>
+          <a:lstStyle/>
+          <a:p>
+            <a:pPr algn="l" indent="0" marL="0">
+              <a:buNone/>
+            </a:pPr>
+            <a:r>
+              <a:rPr lang="ko-KR" sz="1875" dirty="0">
+                <a:solidFill>
+                  <a:srgbClr val="192A40"/>
+                </a:solidFill>
+                <a:latin typeface="Pretendard" pitchFamily="34" charset="0"/>
+                <a:ea typeface="Pretendard" pitchFamily="34" charset="-122"/>
+                <a:cs typeface="Pretendard" pitchFamily="34" charset="-120"/>
+              </a:rPr>
+              <a:t>제품 상태를</a:t>
+            </a:r>
+            <a:endParaRPr lang="ko-KR" sz="1875" dirty="0">
+              <a:ea typeface="Pretendard"/>
+            </a:endParaRPr>
+          </a:p>
+          <a:p>
+            <a:pPr algn="l" indent="0" marL="0">
+              <a:buNone/>
+            </a:pPr>
+            <a:r>
+              <a:rPr lang="ko-KR" sz="1875" dirty="0">
+                <a:solidFill>
+                  <a:srgbClr val="192A40"/>
+                </a:solidFill>
+                <a:latin typeface="Pretendard" pitchFamily="34" charset="0"/>
+                <a:ea typeface="Pretendard" pitchFamily="34" charset="-122"/>
+                <a:cs typeface="Pretendard" pitchFamily="34" charset="-120"/>
+              </a:rPr>
+              <a:t>사진으로 남깁니다.</a:t>
+            </a:r>
+            <a:endParaRPr lang="ko-KR" sz="1875" dirty="0">
+              <a:ea typeface="Pretendard"/>
+            </a:endParaRPr>
+          </a:p>
+        </p:txBody>
+      </p:sp>
+      <p:sp>
+        <p:nvSpPr>
+          <p:cNvPr id="18" name="Shape 16"/>
+          <p:cNvSpPr/>
+          <p:nvPr/>
+        </p:nvSpPr>
+        <p:spPr>
+          <a:xfrm>
+            <a:off x="6286500" y="4829175"/>
+            <a:ext cx="2495550" cy="0"/>
+          </a:xfrm>
+          <a:prstGeom prst="line">
+            <a:avLst/>
+          </a:prstGeom>
+          <a:noFill/>
+          <a:ln w="19050">
+            <a:solidFill>
+              <a:srgbClr val="CDD6E1"/>
+            </a:solidFill>
+            <a:prstDash val="solid"/>
+          </a:ln>
+        </p:spPr>
+      </p:sp>
+      <p:sp>
+        <p:nvSpPr>
+          <p:cNvPr id="19" name="Shape 17"/>
+          <p:cNvSpPr/>
+          <p:nvPr/>
+        </p:nvSpPr>
+        <p:spPr>
+          <a:xfrm>
+            <a:off x="8839200" y="2600325"/>
+            <a:ext cx="257175" cy="0"/>
           </a:xfrm>
           <a:prstGeom prst="line">
             <a:avLst/>
@@ -3880,20 +4139,22 @@
       </p:sp>
       <p:sp>
         <p:nvSpPr>
-          <p:cNvPr id="21" name="Shape 19"/>
+          <p:cNvPr id="20" name="Shape 18"/>
           <p:cNvSpPr/>
           <p:nvPr/>
         </p:nvSpPr>
         <p:spPr>
           <a:xfrm>
-            <a:off x="533400" y="4695825"/>
-            <a:ext cx="11125200" cy="0"/>
-          </a:xfrm>
-          <a:prstGeom prst="line">
-            <a:avLst/>
-          </a:prstGeom>
-          <a:noFill/>
-          <a:ln w="19050">
+            <a:off x="9163050" y="2305050"/>
+            <a:ext cx="2495550" cy="590550"/>
+          </a:xfrm>
+          <a:prstGeom prst="rect">
+            <a:avLst/>
+          </a:prstGeom>
+          <a:solidFill>
+            <a:srgbClr val="2459A6"/>
+          </a:solidFill>
+          <a:ln w="12700">
             <a:solidFill>
               <a:srgbClr val="2459A6"/>
             </a:solidFill>
@@ -3903,30 +4164,71 @@
       </p:sp>
       <p:sp>
         <p:nvSpPr>
+          <p:cNvPr id="21" name="Text 19"/>
+          <p:cNvSpPr txBox="1"/>
+          <p:nvPr/>
+        </p:nvSpPr>
+        <p:spPr>
+          <a:xfrm>
+            <a:off x="9353550" y="2438400"/>
+            <a:ext cx="2114550" cy="381000"/>
+          </a:xfrm>
+          <a:prstGeom prst="rect">
+            <a:avLst/>
+          </a:prstGeom>
+          <a:noFill/>
+          <a:ln/>
+        </p:spPr>
+        <p:txBody>
+          <a:bodyPr wrap="square" lIns="0" tIns="0" rIns="0" bIns="0" rtlCol="0" anchor="t"/>
+          <a:lstStyle/>
+          <a:p>
+            <a:pPr algn="l" indent="0" marL="0">
+              <a:buNone/>
+            </a:pPr>
+            <a:r>
+              <a:rPr lang="ko-KR" sz="1875" b="1" dirty="0">
+                <a:solidFill>
+                  <a:srgbClr val="FFFFFF"/>
+                </a:solidFill>
+                <a:latin typeface="Pretendard" pitchFamily="34" charset="0"/>
+                <a:ea typeface="Pretendard" pitchFamily="34" charset="-122"/>
+                <a:cs typeface="Pretendard" pitchFamily="34" charset="-120"/>
+              </a:rPr>
+              <a:t>04  기록 저장</a:t>
+            </a:r>
+            <a:endParaRPr lang="ko-KR" sz="1875" dirty="0">
+              <a:ea typeface="Pretendard"/>
+            </a:endParaRPr>
+          </a:p>
+        </p:txBody>
+      </p:sp>
+      <p:sp>
+        <p:nvSpPr>
           <p:cNvPr id="22" name="Text 20"/>
           <p:cNvSpPr txBox="1"/>
           <p:nvPr/>
         </p:nvSpPr>
         <p:spPr>
           <a:xfrm>
-            <a:off x="533400" y="5048250"/>
-            <a:ext cx="6762750" cy="428625"/>
-          </a:xfrm>
-          <a:prstGeom prst="rect">
-            <a:avLst/>
-          </a:prstGeom>
-          <a:noFill/>
-          <a:ln/>
-        </p:spPr>
-        <p:txBody>
-          <a:bodyPr wrap="square" lIns="0" tIns="0" rIns="0" bIns="0" rtlCol="0" anchor="t"/>
-          <a:lstStyle/>
-          <a:p>
-            <a:pPr algn="l" indent="0" marL="0">
-              <a:buNone/>
-            </a:pPr>
-            <a:r>
-              <a:rPr lang="ko-KR" sz="2250" b="1" dirty="0">
+            <a:off x="9163050" y="3209925"/>
+            <a:ext cx="2495550" cy="1428750"/>
+          </a:xfrm>
+          <a:prstGeom prst="rect">
+            <a:avLst/>
+          </a:prstGeom>
+          <a:noFill/>
+          <a:ln/>
+        </p:spPr>
+        <p:txBody>
+          <a:bodyPr wrap="square" lIns="0" tIns="0" rIns="0" bIns="0" rtlCol="0" anchor="t"/>
+          <a:lstStyle/>
+          <a:p>
+            <a:pPr algn="l" indent="0" marL="0">
+              <a:buNone/>
+            </a:pPr>
+            <a:r>
+              <a:rPr lang="ko-KR" sz="1875" dirty="0">
                 <a:solidFill>
                   <a:srgbClr val="192A40"/>
                 </a:solidFill>
@@ -3934,40 +4236,82 @@
                 <a:ea typeface="Pretendard" pitchFamily="34" charset="-122"/>
                 <a:cs typeface="Pretendard" pitchFamily="34" charset="-120"/>
               </a:rPr>
-              <a:t>담당자 최종 검수 확정</a:t>
-            </a:r>
-            <a:endParaRPr lang="ko-KR" sz="2250" dirty="0">
-              <a:ea typeface="Pretendard"/>
-            </a:endParaRPr>
-          </a:p>
-        </p:txBody>
-      </p:sp>
-      <p:sp>
-        <p:nvSpPr>
-          <p:cNvPr id="23" name="Text 21"/>
-          <p:cNvSpPr txBox="1"/>
-          <p:nvPr/>
-        </p:nvSpPr>
-        <p:spPr>
-          <a:xfrm>
-            <a:off x="8572500" y="5076825"/>
-            <a:ext cx="3086100" cy="400050"/>
-          </a:xfrm>
-          <a:prstGeom prst="rect">
-            <a:avLst/>
-          </a:prstGeom>
-          <a:noFill/>
-          <a:ln/>
-        </p:spPr>
-        <p:txBody>
-          <a:bodyPr wrap="square" lIns="0" tIns="0" rIns="0" bIns="0" rtlCol="0" anchor="t"/>
-          <a:lstStyle/>
-          <a:p>
-            <a:pPr algn="l" indent="0" marL="0">
-              <a:buNone/>
-            </a:pPr>
-            <a:r>
-              <a:rPr lang="ko-KR" sz="2025" b="1" dirty="0">
+              <a:t>입력 내용을</a:t>
+            </a:r>
+            <a:endParaRPr lang="ko-KR" sz="1875" dirty="0">
+              <a:ea typeface="Pretendard"/>
+            </a:endParaRPr>
+          </a:p>
+          <a:p>
+            <a:pPr algn="l" indent="0" marL="0">
+              <a:buNone/>
+            </a:pPr>
+            <a:r>
+              <a:rPr lang="ko-KR" sz="1875" dirty="0">
+                <a:solidFill>
+                  <a:srgbClr val="192A40"/>
+                </a:solidFill>
+                <a:latin typeface="Pretendard" pitchFamily="34" charset="0"/>
+                <a:ea typeface="Pretendard" pitchFamily="34" charset="-122"/>
+                <a:cs typeface="Pretendard" pitchFamily="34" charset="-120"/>
+              </a:rPr>
+              <a:t>저장합니다.</a:t>
+            </a:r>
+            <a:endParaRPr lang="ko-KR" sz="1875" dirty="0">
+              <a:ea typeface="Pretendard"/>
+            </a:endParaRPr>
+          </a:p>
+        </p:txBody>
+      </p:sp>
+      <p:sp>
+        <p:nvSpPr>
+          <p:cNvPr id="23" name="Shape 21"/>
+          <p:cNvSpPr/>
+          <p:nvPr/>
+        </p:nvSpPr>
+        <p:spPr>
+          <a:xfrm>
+            <a:off x="9163050" y="4829175"/>
+            <a:ext cx="2495550" cy="0"/>
+          </a:xfrm>
+          <a:prstGeom prst="line">
+            <a:avLst/>
+          </a:prstGeom>
+          <a:noFill/>
+          <a:ln w="19050">
+            <a:solidFill>
+              <a:srgbClr val="CDD6E1"/>
+            </a:solidFill>
+            <a:prstDash val="solid"/>
+          </a:ln>
+        </p:spPr>
+      </p:sp>
+      <p:sp>
+        <p:nvSpPr>
+          <p:cNvPr id="24" name="Text 22"/>
+          <p:cNvSpPr txBox="1"/>
+          <p:nvPr/>
+        </p:nvSpPr>
+        <p:spPr>
+          <a:xfrm>
+            <a:off x="533400" y="5267325"/>
+            <a:ext cx="1809750" cy="342900"/>
+          </a:xfrm>
+          <a:prstGeom prst="rect">
+            <a:avLst/>
+          </a:prstGeom>
+          <a:noFill/>
+          <a:ln/>
+        </p:spPr>
+        <p:txBody>
+          <a:bodyPr wrap="square" lIns="0" tIns="0" rIns="0" bIns="0" rtlCol="0" anchor="t"/>
+          <a:lstStyle/>
+          <a:p>
+            <a:pPr algn="l" indent="0" marL="0">
+              <a:buNone/>
+            </a:pPr>
+            <a:r>
+              <a:rPr lang="ko-KR" sz="1575" b="1" dirty="0">
                 <a:solidFill>
                   <a:srgbClr val="2459A6"/>
                 </a:solidFill>
@@ -3975,9 +4319,155 @@
                 <a:ea typeface="Pretendard" pitchFamily="34" charset="-122"/>
                 <a:cs typeface="Pretendard" pitchFamily="34" charset="-120"/>
               </a:rPr>
-              <a:t>자동 환불 없음</a:t>
-            </a:r>
-            <a:endParaRPr lang="ko-KR" sz="2025" dirty="0">
+              <a:t>확인할 경계</a:t>
+            </a:r>
+            <a:endParaRPr lang="ko-KR" sz="1575" dirty="0">
+              <a:ea typeface="Pretendard"/>
+            </a:endParaRPr>
+          </a:p>
+        </p:txBody>
+      </p:sp>
+      <p:sp>
+        <p:nvSpPr>
+          <p:cNvPr id="25" name="Text 23"/>
+          <p:cNvSpPr txBox="1"/>
+          <p:nvPr/>
+        </p:nvSpPr>
+        <p:spPr>
+          <a:xfrm>
+            <a:off x="2476500" y="5219700"/>
+            <a:ext cx="9144000" cy="714375"/>
+          </a:xfrm>
+          <a:prstGeom prst="rect">
+            <a:avLst/>
+          </a:prstGeom>
+          <a:noFill/>
+          <a:ln/>
+        </p:spPr>
+        <p:txBody>
+          <a:bodyPr wrap="square" lIns="0" tIns="0" rIns="0" bIns="0" rtlCol="0" anchor="t"/>
+          <a:lstStyle/>
+          <a:p>
+            <a:pPr algn="l" indent="0" marL="0">
+              <a:buNone/>
+            </a:pPr>
+            <a:r>
+              <a:rPr lang="ko-KR" sz="1800" dirty="0">
+                <a:solidFill>
+                  <a:srgbClr val="192A40"/>
+                </a:solidFill>
+                <a:latin typeface="Pretendard" pitchFamily="34" charset="0"/>
+                <a:ea typeface="Pretendard" pitchFamily="34" charset="-122"/>
+                <a:cs typeface="Pretendard" pitchFamily="34" charset="-120"/>
+              </a:rPr>
+              <a:t>담당자가 최종 검수합니다. 환불은 자동으로 처리하지 않습니다.</a:t>
+            </a:r>
+            <a:endParaRPr lang="ko-KR" sz="1800" dirty="0">
+              <a:ea typeface="Pretendard"/>
+            </a:endParaRPr>
+          </a:p>
+        </p:txBody>
+      </p:sp>
+      <p:sp>
+        <p:nvSpPr>
+          <p:cNvPr id="26" name="Shape 24"/>
+          <p:cNvSpPr/>
+          <p:nvPr/>
+        </p:nvSpPr>
+        <p:spPr>
+          <a:xfrm>
+            <a:off x="533400" y="6362700"/>
+            <a:ext cx="11125200" cy="0"/>
+          </a:xfrm>
+          <a:prstGeom prst="line">
+            <a:avLst/>
+          </a:prstGeom>
+          <a:noFill/>
+          <a:ln w="19050">
+            <a:solidFill>
+              <a:srgbClr val="CDD6E1"/>
+            </a:solidFill>
+            <a:prstDash val="solid"/>
+          </a:ln>
+        </p:spPr>
+      </p:sp>
+      <p:sp>
+        <p:nvSpPr>
+          <p:cNvPr id="27" name="Text 25"/>
+          <p:cNvSpPr txBox="1"/>
+          <p:nvPr/>
+        </p:nvSpPr>
+        <p:spPr>
+          <a:xfrm>
+            <a:off x="533400" y="6496050"/>
+            <a:ext cx="10477500" cy="190500"/>
+          </a:xfrm>
+          <a:prstGeom prst="rect">
+            <a:avLst/>
+          </a:prstGeom>
+          <a:noFill/>
+          <a:ln/>
+        </p:spPr>
+        <p:txBody>
+          <a:bodyPr wrap="square" lIns="0" tIns="0" rIns="0" bIns="0" rtlCol="0" anchor="t"/>
+          <a:lstStyle/>
+          <a:p>
+            <a:pPr algn="l" indent="0" marL="0">
+              <a:buNone/>
+            </a:pPr>
+            <a:r>
+              <a:rPr lang="ko-KR" sz="900" dirty="0">
+                <a:solidFill>
+                  <a:srgbClr val="526174"/>
+                </a:solidFill>
+                <a:latin typeface="Pretendard" pitchFamily="34" charset="0"/>
+                <a:ea typeface="Pretendard" pitchFamily="34" charset="-122"/>
+                <a:cs typeface="Pretendard" pitchFamily="34" charset="-120"/>
+              </a:rPr>
+              <a:t>Clean PPT  |  가상 예제</a:t>
+            </a:r>
+            <a:endParaRPr lang="ko-KR" sz="900" dirty="0">
+              <a:ea typeface="Pretendard"/>
+            </a:endParaRPr>
+          </a:p>
+        </p:txBody>
+      </p:sp>
+      <p:sp>
+        <p:nvSpPr>
+          <p:cNvPr id="28" name="Text 26"/>
+          <p:cNvSpPr txBox="1"/>
+          <p:nvPr/>
+        </p:nvSpPr>
+        <p:spPr>
+          <a:xfrm>
+            <a:off x="10858500" y="6477000"/>
+            <a:ext cx="800100" cy="209550"/>
+          </a:xfrm>
+          <a:prstGeom prst="rect">
+            <a:avLst/>
+          </a:prstGeom>
+          <a:noFill/>
+          <a:ln/>
+        </p:spPr>
+        <p:txBody>
+          <a:bodyPr wrap="square" lIns="0" tIns="0" rIns="0" bIns="0" rtlCol="0" anchor="t"/>
+          <a:lstStyle/>
+          <a:p>
+            <a:pPr algn="l" indent="0" marL="0">
+              <a:buNone/>
+            </a:pPr>
+            <a:r>
+              <a:rPr lang="ko-KR" sz="1050" dirty="0">
+                <a:solidFill>
+                  <a:srgbClr val="526174"/>
+                </a:solidFill>
+                <a:latin typeface="Pretendard" pitchFamily="34" charset="0"/>
+                <a:ea typeface="Pretendard" pitchFamily="34" charset="-122"/>
+                <a:cs typeface="Pretendard" pitchFamily="34" charset="-120"/>
+              </a:rPr>
+              <a:t>03 / 06</a:t>
+            </a:r>
+            <a:endParaRPr lang="ko-KR" sz="1050" dirty="0">
               <a:ea typeface="Pretendard"/>
             </a:endParaRPr>
           </a:p>
@@ -5400,33 +5890,33 @@
         <p:spPr>
           <a:xfrm>
             <a:off x="533400" y="285750"/>
-            <a:ext cx="11125200" cy="228600"/>
-          </a:xfrm>
-          <a:prstGeom prst="rect">
-            <a:avLst/>
-          </a:prstGeom>
-          <a:noFill/>
-          <a:ln/>
-        </p:spPr>
-        <p:txBody>
-          <a:bodyPr wrap="square" lIns="0" tIns="0" rIns="0" bIns="0" rtlCol="0" anchor="t"/>
-          <a:lstStyle/>
-          <a:p>
-            <a:pPr algn="l" indent="0" marL="0">
-              <a:buNone/>
-            </a:pPr>
-            <a:r>
-              <a:rPr lang="ko-KR" sz="975" dirty="0">
-                <a:solidFill>
-                  <a:srgbClr val="526174"/>
-                </a:solidFill>
-                <a:latin typeface="Pretendard" pitchFamily="34" charset="0"/>
-                <a:ea typeface="Pretendard" pitchFamily="34" charset="-122"/>
-                <a:cs typeface="Pretendard" pitchFamily="34" charset="-120"/>
-              </a:rPr>
-              <a:t>04 · 판단 기준</a:t>
-            </a:r>
-            <a:endParaRPr lang="ko-KR" sz="975" dirty="0">
+            <a:ext cx="10477500" cy="228600"/>
+          </a:xfrm>
+          <a:prstGeom prst="rect">
+            <a:avLst/>
+          </a:prstGeom>
+          <a:noFill/>
+          <a:ln/>
+        </p:spPr>
+        <p:txBody>
+          <a:bodyPr wrap="square" lIns="0" tIns="0" rIns="0" bIns="0" rtlCol="0" anchor="t"/>
+          <a:lstStyle/>
+          <a:p>
+            <a:pPr algn="l" indent="0" marL="0">
+              <a:buNone/>
+            </a:pPr>
+            <a:r>
+              <a:rPr lang="ko-KR" sz="1200" b="1" dirty="0">
+                <a:solidFill>
+                  <a:srgbClr val="2459A6"/>
+                </a:solidFill>
+                <a:latin typeface="Pretendard" pitchFamily="34" charset="0"/>
+                <a:ea typeface="Pretendard" pitchFamily="34" charset="-122"/>
+                <a:cs typeface="Pretendard" pitchFamily="34" charset="-120"/>
+              </a:rPr>
+              <a:t>CLEAN PPT  /  BUSINESS PRESENTATION</a:t>
+            </a:r>
+            <a:endParaRPr lang="ko-KR" sz="1200" dirty="0">
               <a:ea typeface="Pretendard"/>
             </a:endParaRPr>
           </a:p>
@@ -5481,24 +5971,24 @@
         </p:nvSpPr>
         <p:spPr>
           <a:xfrm>
-            <a:off x="10668000" y="6438900"/>
-            <a:ext cx="990600" cy="190500"/>
-          </a:xfrm>
-          <a:prstGeom prst="rect">
-            <a:avLst/>
-          </a:prstGeom>
-          <a:noFill/>
-          <a:ln/>
-        </p:spPr>
-        <p:txBody>
-          <a:bodyPr wrap="square" lIns="0" tIns="0" rIns="0" bIns="0" rtlCol="0" anchor="t"/>
-          <a:lstStyle/>
-          <a:p>
-            <a:pPr algn="r" indent="0" marL="0">
-              <a:buNone/>
-            </a:pPr>
-            <a:r>
-              <a:rPr lang="ko-KR" sz="975" dirty="0">
+            <a:off x="533400" y="1495425"/>
+            <a:ext cx="11125200" cy="381000"/>
+          </a:xfrm>
+          <a:prstGeom prst="rect">
+            <a:avLst/>
+          </a:prstGeom>
+          <a:noFill/>
+          <a:ln/>
+        </p:spPr>
+        <p:txBody>
+          <a:bodyPr wrap="square" lIns="0" tIns="0" rIns="0" bIns="0" rtlCol="0" anchor="t"/>
+          <a:lstStyle/>
+          <a:p>
+            <a:pPr algn="l" indent="0" marL="0">
+              <a:buNone/>
+            </a:pPr>
+            <a:r>
+              <a:rPr lang="ko-KR" sz="1575" dirty="0">
                 <a:solidFill>
                   <a:srgbClr val="526174"/>
                 </a:solidFill>
@@ -5506,174 +5996,34 @@
                 <a:ea typeface="Pretendard" pitchFamily="34" charset="-122"/>
                 <a:cs typeface="Pretendard" pitchFamily="34" charset="-120"/>
               </a:rPr>
-              <a:t>5 / 6</a:t>
-            </a:r>
-            <a:endParaRPr lang="ko-KR" sz="975" dirty="0">
-              <a:ea typeface="Pretendard"/>
-            </a:endParaRPr>
-          </a:p>
-        </p:txBody>
-      </p:sp>
-      <p:sp>
-        <p:nvSpPr>
-          <p:cNvPr id="5" name="Text 3"/>
-          <p:cNvSpPr txBox="1"/>
-          <p:nvPr/>
-        </p:nvSpPr>
-        <p:spPr>
-          <a:xfrm>
-            <a:off x="533400" y="1514475"/>
-            <a:ext cx="11125200" cy="419100"/>
-          </a:xfrm>
-          <a:prstGeom prst="rect">
-            <a:avLst/>
-          </a:prstGeom>
-          <a:noFill/>
-          <a:ln/>
-        </p:spPr>
-        <p:txBody>
-          <a:bodyPr wrap="square" lIns="0" tIns="0" rIns="0" bIns="0" rtlCol="0" anchor="t"/>
-          <a:lstStyle/>
-          <a:p>
-            <a:pPr algn="l" indent="0" marL="0">
-              <a:buNone/>
-            </a:pPr>
-            <a:r>
-              <a:rPr lang="ko-KR" sz="2025" dirty="0">
-                <a:solidFill>
-                  <a:srgbClr val="526174"/>
-                </a:solidFill>
-                <a:latin typeface="Pretendard" pitchFamily="34" charset="0"/>
-                <a:ea typeface="Pretendard" pitchFamily="34" charset="-122"/>
-                <a:cs typeface="Pretendard" pitchFamily="34" charset="-120"/>
-              </a:rPr>
-              <a:t>좋아진 기록 방식과 검증해야 할 성능을 구분</a:t>
-            </a:r>
-            <a:endParaRPr lang="ko-KR" sz="2025" dirty="0">
-              <a:ea typeface="Pretendard"/>
-            </a:endParaRPr>
-          </a:p>
-        </p:txBody>
-      </p:sp>
-      <p:sp>
-        <p:nvSpPr>
-          <p:cNvPr id="6" name="Text 4"/>
-          <p:cNvSpPr txBox="1"/>
-          <p:nvPr/>
-        </p:nvSpPr>
-        <p:spPr>
-          <a:xfrm>
-            <a:off x="533400" y="2381250"/>
-            <a:ext cx="2667000" cy="476250"/>
-          </a:xfrm>
-          <a:prstGeom prst="rect">
-            <a:avLst/>
-          </a:prstGeom>
-          <a:noFill/>
-          <a:ln/>
-        </p:spPr>
-        <p:txBody>
-          <a:bodyPr wrap="square" lIns="0" tIns="0" rIns="0" bIns="0" rtlCol="0" anchor="t"/>
-          <a:lstStyle/>
-          <a:p>
-            <a:pPr algn="l" indent="0" marL="0">
-              <a:buNone/>
-            </a:pPr>
-            <a:r>
-              <a:rPr lang="ko-KR" sz="2175" b="1" dirty="0">
-                <a:solidFill>
-                  <a:srgbClr val="2459A6"/>
-                </a:solidFill>
-                <a:latin typeface="Pretendard" pitchFamily="34" charset="0"/>
-                <a:ea typeface="Pretendard" pitchFamily="34" charset="-122"/>
-                <a:cs typeface="Pretendard" pitchFamily="34" charset="-120"/>
-              </a:rPr>
-              <a:t>자료 성격</a:t>
-            </a:r>
-            <a:endParaRPr lang="ko-KR" sz="2175" dirty="0">
-              <a:ea typeface="Pretendard"/>
-            </a:endParaRPr>
-          </a:p>
-        </p:txBody>
-      </p:sp>
-      <p:sp>
-        <p:nvSpPr>
-          <p:cNvPr id="7" name="Text 5"/>
-          <p:cNvSpPr txBox="1"/>
-          <p:nvPr/>
-        </p:nvSpPr>
-        <p:spPr>
-          <a:xfrm>
-            <a:off x="3667125" y="2333625"/>
-            <a:ext cx="7810500" cy="809625"/>
-          </a:xfrm>
-          <a:prstGeom prst="rect">
-            <a:avLst/>
-          </a:prstGeom>
-          <a:noFill/>
-          <a:ln/>
-        </p:spPr>
-        <p:txBody>
-          <a:bodyPr wrap="square" lIns="0" tIns="0" rIns="0" bIns="0" rtlCol="0" anchor="t"/>
-          <a:lstStyle/>
-          <a:p>
-            <a:pPr algn="l" indent="0" marL="0">
-              <a:buNone/>
-            </a:pPr>
-            <a:r>
-              <a:rPr lang="ko-KR" sz="2100" dirty="0">
-                <a:solidFill>
-                  <a:srgbClr val="192A40"/>
-                </a:solidFill>
-                <a:latin typeface="Pretendard" pitchFamily="34" charset="0"/>
-                <a:ea typeface="Pretendard" pitchFamily="34" charset="-122"/>
-                <a:cs typeface="Pretendard" pitchFamily="34" charset="-120"/>
-              </a:rPr>
-              <a:t>가상 연습 자료</a:t>
-            </a:r>
-            <a:endParaRPr lang="ko-KR" sz="2100" dirty="0">
-              <a:ea typeface="Pretendard"/>
-            </a:endParaRPr>
-          </a:p>
-          <a:p>
-            <a:pPr algn="l" indent="0" marL="0">
-              <a:buNone/>
-            </a:pPr>
-            <a:r>
-              <a:rPr lang="ko-KR" sz="2100" dirty="0">
-                <a:solidFill>
-                  <a:srgbClr val="192A40"/>
-                </a:solidFill>
-                <a:latin typeface="Pretendard" pitchFamily="34" charset="0"/>
-                <a:ea typeface="Pretendard" pitchFamily="34" charset="-122"/>
-                <a:cs typeface="Pretendard" pitchFamily="34" charset="-120"/>
-              </a:rPr>
-              <a:t>실제 고객·운영 실적이 아님</a:t>
-            </a:r>
-            <a:endParaRPr lang="ko-KR" sz="2100" dirty="0">
-              <a:ea typeface="Pretendard"/>
-            </a:endParaRPr>
-          </a:p>
-        </p:txBody>
-      </p:sp>
-      <p:sp>
-        <p:nvSpPr>
-          <p:cNvPr id="8" name="Shape 6"/>
+              <a:t>자동화할 기록과 사람이 판단할 업무를 구분합니다.</a:t>
+            </a:r>
+            <a:endParaRPr lang="ko-KR" sz="1575" dirty="0">
+              <a:ea typeface="Pretendard"/>
+            </a:endParaRPr>
+          </a:p>
+        </p:txBody>
+      </p:sp>
+      <p:sp>
+        <p:nvSpPr>
+          <p:cNvPr id="5" name="Shape 3"/>
           <p:cNvSpPr/>
           <p:nvPr/>
         </p:nvSpPr>
         <p:spPr>
           <a:xfrm>
-            <a:off x="533400" y="3390900"/>
-            <a:ext cx="11125200" cy="0"/>
-          </a:xfrm>
-          <a:prstGeom prst="line">
-            <a:avLst/>
-          </a:prstGeom>
-          <a:noFill/>
-          <a:ln w="19050">
+            <a:off x="533400" y="2209800"/>
+            <a:ext cx="2857500" cy="3467100"/>
+          </a:xfrm>
+          <a:prstGeom prst="rect">
+            <a:avLst/>
+          </a:prstGeom>
+          <a:solidFill>
+            <a:srgbClr val="F0F4FA"/>
+          </a:solidFill>
+          <a:ln w="12700">
             <a:solidFill>
-              <a:srgbClr val="2459A6"/>
+              <a:srgbClr val="F0F4FA"/>
             </a:solidFill>
             <a:prstDash val="solid"/>
           </a:ln>
@@ -5681,40 +6031,182 @@
       </p:sp>
       <p:sp>
         <p:nvSpPr>
+          <p:cNvPr id="6" name="Text 4"/>
+          <p:cNvSpPr txBox="1"/>
+          <p:nvPr/>
+        </p:nvSpPr>
+        <p:spPr>
+          <a:xfrm>
+            <a:off x="781050" y="2486025"/>
+            <a:ext cx="2381250" cy="381000"/>
+          </a:xfrm>
+          <a:prstGeom prst="rect">
+            <a:avLst/>
+          </a:prstGeom>
+          <a:noFill/>
+          <a:ln/>
+        </p:spPr>
+        <p:txBody>
+          <a:bodyPr wrap="square" lIns="0" tIns="0" rIns="0" bIns="0" rtlCol="0" anchor="t"/>
+          <a:lstStyle/>
+          <a:p>
+            <a:pPr algn="l" indent="0" marL="0">
+              <a:buNone/>
+            </a:pPr>
+            <a:r>
+              <a:rPr lang="ko-KR" sz="2025" b="1" dirty="0">
+                <a:solidFill>
+                  <a:srgbClr val="2459A6"/>
+                </a:solidFill>
+                <a:latin typeface="Pretendard" pitchFamily="34" charset="0"/>
+                <a:ea typeface="Pretendard" pitchFamily="34" charset="-122"/>
+                <a:cs typeface="Pretendard" pitchFamily="34" charset="-120"/>
+              </a:rPr>
+              <a:t>적용 원칙</a:t>
+            </a:r>
+            <a:endParaRPr lang="ko-KR" sz="2025" dirty="0">
+              <a:ea typeface="Pretendard"/>
+            </a:endParaRPr>
+          </a:p>
+        </p:txBody>
+      </p:sp>
+      <p:sp>
+        <p:nvSpPr>
+          <p:cNvPr id="7" name="Text 5"/>
+          <p:cNvSpPr txBox="1"/>
+          <p:nvPr/>
+        </p:nvSpPr>
+        <p:spPr>
+          <a:xfrm>
+            <a:off x="781050" y="3095625"/>
+            <a:ext cx="2362200" cy="1524000"/>
+          </a:xfrm>
+          <a:prstGeom prst="rect">
+            <a:avLst/>
+          </a:prstGeom>
+          <a:noFill/>
+          <a:ln/>
+        </p:spPr>
+        <p:txBody>
+          <a:bodyPr wrap="square" lIns="0" tIns="0" rIns="0" bIns="0" rtlCol="0" anchor="t"/>
+          <a:lstStyle/>
+          <a:p>
+            <a:pPr algn="l" indent="0" marL="0">
+              <a:buNone/>
+            </a:pPr>
+            <a:r>
+              <a:rPr lang="ko-KR" sz="2400" b="1" dirty="0">
+                <a:solidFill>
+                  <a:srgbClr val="192A40"/>
+                </a:solidFill>
+                <a:latin typeface="Pretendard" pitchFamily="34" charset="0"/>
+                <a:ea typeface="Pretendard" pitchFamily="34" charset="-122"/>
+                <a:cs typeface="Pretendard" pitchFamily="34" charset="-120"/>
+              </a:rPr>
+              <a:t>기록은 현장에서</a:t>
+            </a:r>
+            <a:endParaRPr lang="ko-KR" sz="2400" dirty="0">
+              <a:ea typeface="Pretendard"/>
+            </a:endParaRPr>
+          </a:p>
+          <a:p>
+            <a:pPr algn="l" indent="0" marL="0">
+              <a:buNone/>
+            </a:pPr>
+            <a:r>
+              <a:rPr lang="ko-KR" sz="2400" b="1" dirty="0">
+                <a:solidFill>
+                  <a:srgbClr val="192A40"/>
+                </a:solidFill>
+                <a:latin typeface="Pretendard" pitchFamily="34" charset="0"/>
+                <a:ea typeface="Pretendard" pitchFamily="34" charset="-122"/>
+                <a:cs typeface="Pretendard" pitchFamily="34" charset="-120"/>
+              </a:rPr>
+              <a:t>판단은 담당자가</a:t>
+            </a:r>
+            <a:endParaRPr lang="ko-KR" sz="2400" dirty="0">
+              <a:ea typeface="Pretendard"/>
+            </a:endParaRPr>
+          </a:p>
+        </p:txBody>
+      </p:sp>
+      <p:sp>
+        <p:nvSpPr>
+          <p:cNvPr id="8" name="Text 6"/>
+          <p:cNvSpPr txBox="1"/>
+          <p:nvPr/>
+        </p:nvSpPr>
+        <p:spPr>
+          <a:xfrm>
+            <a:off x="3790950" y="2276475"/>
+            <a:ext cx="1809750" cy="381000"/>
+          </a:xfrm>
+          <a:prstGeom prst="rect">
+            <a:avLst/>
+          </a:prstGeom>
+          <a:noFill/>
+          <a:ln/>
+        </p:spPr>
+        <p:txBody>
+          <a:bodyPr wrap="square" lIns="0" tIns="0" rIns="0" bIns="0" rtlCol="0" anchor="t"/>
+          <a:lstStyle/>
+          <a:p>
+            <a:pPr algn="l" indent="0" marL="0">
+              <a:buNone/>
+            </a:pPr>
+            <a:r>
+              <a:rPr lang="ko-KR" sz="1875" b="1" dirty="0">
+                <a:solidFill>
+                  <a:srgbClr val="2459A6"/>
+                </a:solidFill>
+                <a:latin typeface="Pretendard" pitchFamily="34" charset="0"/>
+                <a:ea typeface="Pretendard" pitchFamily="34" charset="-122"/>
+                <a:cs typeface="Pretendard" pitchFamily="34" charset="-120"/>
+              </a:rPr>
+              <a:t>기록</a:t>
+            </a:r>
+            <a:endParaRPr lang="ko-KR" sz="1875" dirty="0">
+              <a:ea typeface="Pretendard"/>
+            </a:endParaRPr>
+          </a:p>
+        </p:txBody>
+      </p:sp>
+      <p:sp>
+        <p:nvSpPr>
           <p:cNvPr id="9" name="Text 7"/>
           <p:cNvSpPr txBox="1"/>
           <p:nvPr/>
         </p:nvSpPr>
         <p:spPr>
           <a:xfrm>
-            <a:off x="533400" y="3657600"/>
-            <a:ext cx="2667000" cy="476250"/>
-          </a:xfrm>
-          <a:prstGeom prst="rect">
-            <a:avLst/>
-          </a:prstGeom>
-          <a:noFill/>
-          <a:ln/>
-        </p:spPr>
-        <p:txBody>
-          <a:bodyPr wrap="square" lIns="0" tIns="0" rIns="0" bIns="0" rtlCol="0" anchor="t"/>
-          <a:lstStyle/>
-          <a:p>
-            <a:pPr algn="l" indent="0" marL="0">
-              <a:buNone/>
-            </a:pPr>
-            <a:r>
-              <a:rPr lang="ko-KR" sz="2175" b="1" dirty="0">
-                <a:solidFill>
-                  <a:srgbClr val="2459A6"/>
-                </a:solidFill>
-                <a:latin typeface="Pretendard" pitchFamily="34" charset="0"/>
-                <a:ea typeface="Pretendard" pitchFamily="34" charset="-122"/>
-                <a:cs typeface="Pretendard" pitchFamily="34" charset="-120"/>
-              </a:rPr>
-              <a:t>검증 범위</a:t>
-            </a:r>
-            <a:endParaRPr lang="ko-KR" sz="2175" dirty="0">
+            <a:off x="5905500" y="2276475"/>
+            <a:ext cx="5524500" cy="428625"/>
+          </a:xfrm>
+          <a:prstGeom prst="rect">
+            <a:avLst/>
+          </a:prstGeom>
+          <a:noFill/>
+          <a:ln/>
+        </p:spPr>
+        <p:txBody>
+          <a:bodyPr wrap="square" lIns="0" tIns="0" rIns="0" bIns="0" rtlCol="0" anchor="t"/>
+          <a:lstStyle/>
+          <a:p>
+            <a:pPr algn="l" indent="0" marL="0">
+              <a:buNone/>
+            </a:pPr>
+            <a:r>
+              <a:rPr lang="ko-KR" sz="2025" b="1" dirty="0">
+                <a:solidFill>
+                  <a:srgbClr val="192A40"/>
+                </a:solidFill>
+                <a:latin typeface="Pretendard" pitchFamily="34" charset="0"/>
+                <a:ea typeface="Pretendard" pitchFamily="34" charset="-122"/>
+                <a:cs typeface="Pretendard" pitchFamily="34" charset="-120"/>
+              </a:rPr>
+              <a:t>태블릿으로 입력</a:t>
+            </a:r>
+            <a:endParaRPr lang="ko-KR" sz="2025" dirty="0">
               <a:ea typeface="Pretendard"/>
             </a:endParaRPr>
           </a:p>
@@ -5728,53 +6220,34 @@
         </p:nvSpPr>
         <p:spPr>
           <a:xfrm>
-            <a:off x="3667125" y="3609975"/>
-            <a:ext cx="7810500" cy="809625"/>
-          </a:xfrm>
-          <a:prstGeom prst="rect">
-            <a:avLst/>
-          </a:prstGeom>
-          <a:noFill/>
-          <a:ln/>
-        </p:spPr>
-        <p:txBody>
-          <a:bodyPr wrap="square" lIns="0" tIns="0" rIns="0" bIns="0" rtlCol="0" anchor="t"/>
-          <a:lstStyle/>
-          <a:p>
-            <a:pPr algn="l" indent="0" marL="0">
-              <a:buNone/>
-            </a:pPr>
-            <a:r>
-              <a:rPr lang="ko-KR" sz="2100" dirty="0">
-                <a:solidFill>
-                  <a:srgbClr val="192A40"/>
-                </a:solidFill>
-                <a:latin typeface="Pretendard" pitchFamily="34" charset="0"/>
-                <a:ea typeface="Pretendard" pitchFamily="34" charset="-122"/>
-                <a:cs typeface="Pretendard" pitchFamily="34" charset="-120"/>
-              </a:rPr>
-              <a:t>기존·개선 각 20건</a:t>
-            </a:r>
-            <a:endParaRPr lang="ko-KR" sz="2100" dirty="0">
-              <a:ea typeface="Pretendard"/>
-            </a:endParaRPr>
-          </a:p>
-          <a:p>
-            <a:pPr algn="l" indent="0" marL="0">
-              <a:buNone/>
-            </a:pPr>
-            <a:r>
-              <a:rPr lang="ko-KR" sz="2100" dirty="0">
-                <a:solidFill>
-                  <a:srgbClr val="192A40"/>
-                </a:solidFill>
-                <a:latin typeface="Pretendard" pitchFamily="34" charset="0"/>
-                <a:ea typeface="Pretendard" pitchFamily="34" charset="-122"/>
-                <a:cs typeface="Pretendard" pitchFamily="34" charset="-120"/>
-              </a:rPr>
-              <a:t>일반 성능으로 확대하지 않음</a:t>
-            </a:r>
-            <a:endParaRPr lang="ko-KR" sz="2100" dirty="0">
+            <a:off x="5905500" y="2743200"/>
+            <a:ext cx="5524500" cy="476250"/>
+          </a:xfrm>
+          <a:prstGeom prst="rect">
+            <a:avLst/>
+          </a:prstGeom>
+          <a:noFill/>
+          <a:ln/>
+        </p:spPr>
+        <p:txBody>
+          <a:bodyPr wrap="square" lIns="0" tIns="0" rIns="0" bIns="0" rtlCol="0" anchor="t"/>
+          <a:lstStyle/>
+          <a:p>
+            <a:pPr algn="l" indent="0" marL="0">
+              <a:buNone/>
+            </a:pPr>
+            <a:r>
+              <a:rPr lang="ko-KR" sz="1575" dirty="0">
+                <a:solidFill>
+                  <a:srgbClr val="526174"/>
+                </a:solidFill>
+                <a:latin typeface="Pretendard" pitchFamily="34" charset="0"/>
+                <a:ea typeface="Pretendard" pitchFamily="34" charset="-122"/>
+                <a:cs typeface="Pretendard" pitchFamily="34" charset="-120"/>
+              </a:rPr>
+              <a:t>제품 코드, 상태와 사진을 함께 저장합니다.</a:t>
+            </a:r>
+            <a:endParaRPr lang="ko-KR" sz="1575" dirty="0">
               <a:ea typeface="Pretendard"/>
             </a:endParaRPr>
           </a:p>
@@ -5788,8 +6261,8 @@
         </p:nvSpPr>
         <p:spPr>
           <a:xfrm>
-            <a:off x="533400" y="4667250"/>
-            <a:ext cx="11125200" cy="0"/>
+            <a:off x="3790950" y="3238500"/>
+            <a:ext cx="7867650" cy="0"/>
           </a:xfrm>
           <a:prstGeom prst="line">
             <a:avLst/>
@@ -5797,7 +6270,7 @@
           <a:noFill/>
           <a:ln w="19050">
             <a:solidFill>
-              <a:srgbClr val="2459A6"/>
+              <a:srgbClr val="CDD6E1"/>
             </a:solidFill>
             <a:prstDash val="solid"/>
           </a:ln>
@@ -5811,24 +6284,24 @@
         </p:nvSpPr>
         <p:spPr>
           <a:xfrm>
-            <a:off x="533400" y="4933950"/>
-            <a:ext cx="2667000" cy="476250"/>
-          </a:xfrm>
-          <a:prstGeom prst="rect">
-            <a:avLst/>
-          </a:prstGeom>
-          <a:noFill/>
-          <a:ln/>
-        </p:spPr>
-        <p:txBody>
-          <a:bodyPr wrap="square" lIns="0" tIns="0" rIns="0" bIns="0" rtlCol="0" anchor="t"/>
-          <a:lstStyle/>
-          <a:p>
-            <a:pPr algn="l" indent="0" marL="0">
-              <a:buNone/>
-            </a:pPr>
-            <a:r>
-              <a:rPr lang="ko-KR" sz="2175" b="1" dirty="0">
+            <a:off x="3790950" y="3438525"/>
+            <a:ext cx="1809750" cy="381000"/>
+          </a:xfrm>
+          <a:prstGeom prst="rect">
+            <a:avLst/>
+          </a:prstGeom>
+          <a:noFill/>
+          <a:ln/>
+        </p:spPr>
+        <p:txBody>
+          <a:bodyPr wrap="square" lIns="0" tIns="0" rIns="0" bIns="0" rtlCol="0" anchor="t"/>
+          <a:lstStyle/>
+          <a:p>
+            <a:pPr algn="l" indent="0" marL="0">
+              <a:buNone/>
+            </a:pPr>
+            <a:r>
+              <a:rPr lang="ko-KR" sz="1875" b="1" dirty="0">
                 <a:solidFill>
                   <a:srgbClr val="2459A6"/>
                 </a:solidFill>
@@ -5836,9 +6309,9 @@
                 <a:ea typeface="Pretendard" pitchFamily="34" charset="-122"/>
                 <a:cs typeface="Pretendard" pitchFamily="34" charset="-120"/>
               </a:rPr>
-              <a:t>업무 책임</a:t>
-            </a:r>
-            <a:endParaRPr lang="ko-KR" sz="2175" dirty="0">
+              <a:t>책임</a:t>
+            </a:r>
+            <a:endParaRPr lang="ko-KR" sz="1875" dirty="0">
               <a:ea typeface="Pretendard"/>
             </a:endParaRPr>
           </a:p>
@@ -5852,24 +6325,24 @@
         </p:nvSpPr>
         <p:spPr>
           <a:xfrm>
-            <a:off x="3667125" y="4886325"/>
-            <a:ext cx="7810500" cy="809625"/>
-          </a:xfrm>
-          <a:prstGeom prst="rect">
-            <a:avLst/>
-          </a:prstGeom>
-          <a:noFill/>
-          <a:ln/>
-        </p:spPr>
-        <p:txBody>
-          <a:bodyPr wrap="square" lIns="0" tIns="0" rIns="0" bIns="0" rtlCol="0" anchor="t"/>
-          <a:lstStyle/>
-          <a:p>
-            <a:pPr algn="l" indent="0" marL="0">
-              <a:buNone/>
-            </a:pPr>
-            <a:r>
-              <a:rPr lang="ko-KR" sz="2100" dirty="0">
+            <a:off x="5905500" y="3438525"/>
+            <a:ext cx="5524500" cy="428625"/>
+          </a:xfrm>
+          <a:prstGeom prst="rect">
+            <a:avLst/>
+          </a:prstGeom>
+          <a:noFill/>
+          <a:ln/>
+        </p:spPr>
+        <p:txBody>
+          <a:bodyPr wrap="square" lIns="0" tIns="0" rIns="0" bIns="0" rtlCol="0" anchor="t"/>
+          <a:lstStyle/>
+          <a:p>
+            <a:pPr algn="l" indent="0" marL="0">
+              <a:buNone/>
+            </a:pPr>
+            <a:r>
+              <a:rPr lang="ko-KR" sz="2025" b="1" dirty="0">
                 <a:solidFill>
                   <a:srgbClr val="192A40"/>
                 </a:solidFill>
@@ -5877,18 +6350,145 @@
                 <a:ea typeface="Pretendard" pitchFamily="34" charset="-122"/>
                 <a:cs typeface="Pretendard" pitchFamily="34" charset="-120"/>
               </a:rPr>
-              <a:t>담당자가 최종 검수 확정</a:t>
-            </a:r>
-            <a:endParaRPr lang="ko-KR" sz="2100" dirty="0">
-              <a:ea typeface="Pretendard"/>
-            </a:endParaRPr>
-          </a:p>
-          <a:p>
-            <a:pPr algn="l" indent="0" marL="0">
-              <a:buNone/>
-            </a:pPr>
-            <a:r>
-              <a:rPr lang="ko-KR" sz="2100" dirty="0">
+              <a:t>최종 검수는 사람이 수행</a:t>
+            </a:r>
+            <a:endParaRPr lang="ko-KR" sz="2025" dirty="0">
+              <a:ea typeface="Pretendard"/>
+            </a:endParaRPr>
+          </a:p>
+        </p:txBody>
+      </p:sp>
+      <p:sp>
+        <p:nvSpPr>
+          <p:cNvPr id="14" name="Text 12"/>
+          <p:cNvSpPr txBox="1"/>
+          <p:nvPr/>
+        </p:nvSpPr>
+        <p:spPr>
+          <a:xfrm>
+            <a:off x="5905500" y="3905250"/>
+            <a:ext cx="5524500" cy="476250"/>
+          </a:xfrm>
+          <a:prstGeom prst="rect">
+            <a:avLst/>
+          </a:prstGeom>
+          <a:noFill/>
+          <a:ln/>
+        </p:spPr>
+        <p:txBody>
+          <a:bodyPr wrap="square" lIns="0" tIns="0" rIns="0" bIns="0" rtlCol="0" anchor="t"/>
+          <a:lstStyle/>
+          <a:p>
+            <a:pPr algn="l" indent="0" marL="0">
+              <a:buNone/>
+            </a:pPr>
+            <a:r>
+              <a:rPr lang="ko-KR" sz="1575" dirty="0">
+                <a:solidFill>
+                  <a:srgbClr val="526174"/>
+                </a:solidFill>
+                <a:latin typeface="Pretendard" pitchFamily="34" charset="0"/>
+                <a:ea typeface="Pretendard" pitchFamily="34" charset="-122"/>
+                <a:cs typeface="Pretendard" pitchFamily="34" charset="-120"/>
+              </a:rPr>
+              <a:t>자동 환불 기능은 포함하지 않습니다.</a:t>
+            </a:r>
+            <a:endParaRPr lang="ko-KR" sz="1575" dirty="0">
+              <a:ea typeface="Pretendard"/>
+            </a:endParaRPr>
+          </a:p>
+        </p:txBody>
+      </p:sp>
+      <p:sp>
+        <p:nvSpPr>
+          <p:cNvPr id="15" name="Shape 13"/>
+          <p:cNvSpPr/>
+          <p:nvPr/>
+        </p:nvSpPr>
+        <p:spPr>
+          <a:xfrm>
+            <a:off x="3790950" y="4400550"/>
+            <a:ext cx="7867650" cy="0"/>
+          </a:xfrm>
+          <a:prstGeom prst="line">
+            <a:avLst/>
+          </a:prstGeom>
+          <a:noFill/>
+          <a:ln w="19050">
+            <a:solidFill>
+              <a:srgbClr val="CDD6E1"/>
+            </a:solidFill>
+            <a:prstDash val="solid"/>
+          </a:ln>
+        </p:spPr>
+      </p:sp>
+      <p:sp>
+        <p:nvSpPr>
+          <p:cNvPr id="16" name="Text 14"/>
+          <p:cNvSpPr txBox="1"/>
+          <p:nvPr/>
+        </p:nvSpPr>
+        <p:spPr>
+          <a:xfrm>
+            <a:off x="3790950" y="4600575"/>
+            <a:ext cx="1809750" cy="381000"/>
+          </a:xfrm>
+          <a:prstGeom prst="rect">
+            <a:avLst/>
+          </a:prstGeom>
+          <a:noFill/>
+          <a:ln/>
+        </p:spPr>
+        <p:txBody>
+          <a:bodyPr wrap="square" lIns="0" tIns="0" rIns="0" bIns="0" rtlCol="0" anchor="t"/>
+          <a:lstStyle/>
+          <a:p>
+            <a:pPr algn="l" indent="0" marL="0">
+              <a:buNone/>
+            </a:pPr>
+            <a:r>
+              <a:rPr lang="ko-KR" sz="1875" b="1" dirty="0">
+                <a:solidFill>
+                  <a:srgbClr val="2459A6"/>
+                </a:solidFill>
+                <a:latin typeface="Pretendard" pitchFamily="34" charset="0"/>
+                <a:ea typeface="Pretendard" pitchFamily="34" charset="-122"/>
+                <a:cs typeface="Pretendard" pitchFamily="34" charset="-120"/>
+              </a:rPr>
+              <a:t>해석</a:t>
+            </a:r>
+            <a:endParaRPr lang="ko-KR" sz="1875" dirty="0">
+              <a:ea typeface="Pretendard"/>
+            </a:endParaRPr>
+          </a:p>
+        </p:txBody>
+      </p:sp>
+      <p:sp>
+        <p:nvSpPr>
+          <p:cNvPr id="17" name="Text 15"/>
+          <p:cNvSpPr txBox="1"/>
+          <p:nvPr/>
+        </p:nvSpPr>
+        <p:spPr>
+          <a:xfrm>
+            <a:off x="5905500" y="4600575"/>
+            <a:ext cx="5524500" cy="428625"/>
+          </a:xfrm>
+          <a:prstGeom prst="rect">
+            <a:avLst/>
+          </a:prstGeom>
+          <a:noFill/>
+          <a:ln/>
+        </p:spPr>
+        <p:txBody>
+          <a:bodyPr wrap="square" lIns="0" tIns="0" rIns="0" bIns="0" rtlCol="0" anchor="t"/>
+          <a:lstStyle/>
+          <a:p>
+            <a:pPr algn="l" indent="0" marL="0">
+              <a:buNone/>
+            </a:pPr>
+            <a:r>
+              <a:rPr lang="ko-KR" sz="2025" b="1" dirty="0">
                 <a:solidFill>
                   <a:srgbClr val="192A40"/>
                 </a:solidFill>
@@ -5896,9 +6496,178 @@
                 <a:ea typeface="Pretendard" pitchFamily="34" charset="-122"/>
                 <a:cs typeface="Pretendard" pitchFamily="34" charset="-120"/>
               </a:rPr>
-              <a:t>자동 환불은 수행하지 않음</a:t>
-            </a:r>
-            <a:endParaRPr lang="ko-KR" sz="2100" dirty="0">
+              <a:t>연습 결과의 적용 범위</a:t>
+            </a:r>
+            <a:endParaRPr lang="ko-KR" sz="2025" dirty="0">
+              <a:ea typeface="Pretendard"/>
+            </a:endParaRPr>
+          </a:p>
+        </p:txBody>
+      </p:sp>
+      <p:sp>
+        <p:nvSpPr>
+          <p:cNvPr id="18" name="Text 16"/>
+          <p:cNvSpPr txBox="1"/>
+          <p:nvPr/>
+        </p:nvSpPr>
+        <p:spPr>
+          <a:xfrm>
+            <a:off x="5905500" y="5067300"/>
+            <a:ext cx="5524500" cy="476250"/>
+          </a:xfrm>
+          <a:prstGeom prst="rect">
+            <a:avLst/>
+          </a:prstGeom>
+          <a:noFill/>
+          <a:ln/>
+        </p:spPr>
+        <p:txBody>
+          <a:bodyPr wrap="square" lIns="0" tIns="0" rIns="0" bIns="0" rtlCol="0" anchor="t"/>
+          <a:lstStyle/>
+          <a:p>
+            <a:pPr algn="l" indent="0" marL="0">
+              <a:buNone/>
+            </a:pPr>
+            <a:r>
+              <a:rPr lang="ko-KR" sz="1575" dirty="0">
+                <a:solidFill>
+                  <a:srgbClr val="526174"/>
+                </a:solidFill>
+                <a:latin typeface="Pretendard" pitchFamily="34" charset="0"/>
+                <a:ea typeface="Pretendard" pitchFamily="34" charset="-122"/>
+                <a:cs typeface="Pretendard" pitchFamily="34" charset="-120"/>
+              </a:rPr>
+              <a:t>작은 표본의 수치를 전체 성과로 일반화하지 않습니다.</a:t>
+            </a:r>
+            <a:endParaRPr lang="ko-KR" sz="1575" dirty="0">
+              <a:ea typeface="Pretendard"/>
+            </a:endParaRPr>
+          </a:p>
+        </p:txBody>
+      </p:sp>
+      <p:sp>
+        <p:nvSpPr>
+          <p:cNvPr id="19" name="Shape 17"/>
+          <p:cNvSpPr/>
+          <p:nvPr/>
+        </p:nvSpPr>
+        <p:spPr>
+          <a:xfrm>
+            <a:off x="3790950" y="5562600"/>
+            <a:ext cx="7867650" cy="0"/>
+          </a:xfrm>
+          <a:prstGeom prst="line">
+            <a:avLst/>
+          </a:prstGeom>
+          <a:noFill/>
+          <a:ln w="19050">
+            <a:solidFill>
+              <a:srgbClr val="CDD6E1"/>
+            </a:solidFill>
+            <a:prstDash val="solid"/>
+          </a:ln>
+        </p:spPr>
+      </p:sp>
+      <p:sp>
+        <p:nvSpPr>
+          <p:cNvPr id="20" name="Shape 18"/>
+          <p:cNvSpPr/>
+          <p:nvPr/>
+        </p:nvSpPr>
+        <p:spPr>
+          <a:xfrm>
+            <a:off x="533400" y="6362700"/>
+            <a:ext cx="11125200" cy="0"/>
+          </a:xfrm>
+          <a:prstGeom prst="line">
+            <a:avLst/>
+          </a:prstGeom>
+          <a:noFill/>
+          <a:ln w="19050">
+            <a:solidFill>
+              <a:srgbClr val="CDD6E1"/>
+            </a:solidFill>
+            <a:prstDash val="solid"/>
+          </a:ln>
+        </p:spPr>
+      </p:sp>
+      <p:sp>
+        <p:nvSpPr>
+          <p:cNvPr id="21" name="Text 19"/>
+          <p:cNvSpPr txBox="1"/>
+          <p:nvPr/>
+        </p:nvSpPr>
+        <p:spPr>
+          <a:xfrm>
+            <a:off x="533400" y="6496050"/>
+            <a:ext cx="10477500" cy="190500"/>
+          </a:xfrm>
+          <a:prstGeom prst="rect">
+            <a:avLst/>
+          </a:prstGeom>
+          <a:noFill/>
+          <a:ln/>
+        </p:spPr>
+        <p:txBody>
+          <a:bodyPr wrap="square" lIns="0" tIns="0" rIns="0" bIns="0" rtlCol="0" anchor="t"/>
+          <a:lstStyle/>
+          <a:p>
+            <a:pPr algn="l" indent="0" marL="0">
+              <a:buNone/>
+            </a:pPr>
+            <a:r>
+              <a:rPr lang="ko-KR" sz="900" dirty="0">
+                <a:solidFill>
+                  <a:srgbClr val="526174"/>
+                </a:solidFill>
+                <a:latin typeface="Pretendard" pitchFamily="34" charset="0"/>
+                <a:ea typeface="Pretendard" pitchFamily="34" charset="-122"/>
+                <a:cs typeface="Pretendard" pitchFamily="34" charset="-120"/>
+              </a:rPr>
+              <a:t>Clean PPT  |  가상 예제</a:t>
+            </a:r>
+            <a:endParaRPr lang="ko-KR" sz="900" dirty="0">
+              <a:ea typeface="Pretendard"/>
+            </a:endParaRPr>
+          </a:p>
+        </p:txBody>
+      </p:sp>
+      <p:sp>
+        <p:nvSpPr>
+          <p:cNvPr id="22" name="Text 20"/>
+          <p:cNvSpPr txBox="1"/>
+          <p:nvPr/>
+        </p:nvSpPr>
+        <p:spPr>
+          <a:xfrm>
+            <a:off x="10858500" y="6477000"/>
+            <a:ext cx="800100" cy="209550"/>
+          </a:xfrm>
+          <a:prstGeom prst="rect">
+            <a:avLst/>
+          </a:prstGeom>
+          <a:noFill/>
+          <a:ln/>
+        </p:spPr>
+        <p:txBody>
+          <a:bodyPr wrap="square" lIns="0" tIns="0" rIns="0" bIns="0" rtlCol="0" anchor="t"/>
+          <a:lstStyle/>
+          <a:p>
+            <a:pPr algn="l" indent="0" marL="0">
+              <a:buNone/>
+            </a:pPr>
+            <a:r>
+              <a:rPr lang="ko-KR" sz="1050" dirty="0">
+                <a:solidFill>
+                  <a:srgbClr val="526174"/>
+                </a:solidFill>
+                <a:latin typeface="Pretendard" pitchFamily="34" charset="0"/>
+                <a:ea typeface="Pretendard" pitchFamily="34" charset="-122"/>
+                <a:cs typeface="Pretendard" pitchFamily="34" charset="-120"/>
+              </a:rPr>
+              <a:t>05 / 06</a:t>
+            </a:r>
+            <a:endParaRPr lang="ko-KR" sz="1050" dirty="0">
               <a:ea typeface="Pretendard"/>
             </a:endParaRPr>
           </a:p>
@@ -5945,33 +6714,33 @@
         <p:spPr>
           <a:xfrm>
             <a:off x="533400" y="285750"/>
-            <a:ext cx="11125200" cy="228600"/>
-          </a:xfrm>
-          <a:prstGeom prst="rect">
-            <a:avLst/>
-          </a:prstGeom>
-          <a:noFill/>
-          <a:ln/>
-        </p:spPr>
-        <p:txBody>
-          <a:bodyPr wrap="square" lIns="0" tIns="0" rIns="0" bIns="0" rtlCol="0" anchor="t"/>
-          <a:lstStyle/>
-          <a:p>
-            <a:pPr algn="l" indent="0" marL="0">
-              <a:buNone/>
-            </a:pPr>
-            <a:r>
-              <a:rPr lang="ko-KR" sz="975" dirty="0">
-                <a:solidFill>
-                  <a:srgbClr val="526174"/>
-                </a:solidFill>
-                <a:latin typeface="Pretendard" pitchFamily="34" charset="0"/>
-                <a:ea typeface="Pretendard" pitchFamily="34" charset="-122"/>
-                <a:cs typeface="Pretendard" pitchFamily="34" charset="-120"/>
-              </a:rPr>
-              <a:t>05 · 시험 운영</a:t>
-            </a:r>
-            <a:endParaRPr lang="ko-KR" sz="975" dirty="0">
+            <a:ext cx="10477500" cy="228600"/>
+          </a:xfrm>
+          <a:prstGeom prst="rect">
+            <a:avLst/>
+          </a:prstGeom>
+          <a:noFill/>
+          <a:ln/>
+        </p:spPr>
+        <p:txBody>
+          <a:bodyPr wrap="square" lIns="0" tIns="0" rIns="0" bIns="0" rtlCol="0" anchor="t"/>
+          <a:lstStyle/>
+          <a:p>
+            <a:pPr algn="l" indent="0" marL="0">
+              <a:buNone/>
+            </a:pPr>
+            <a:r>
+              <a:rPr lang="ko-KR" sz="1200" b="1" dirty="0">
+                <a:solidFill>
+                  <a:srgbClr val="2459A6"/>
+                </a:solidFill>
+                <a:latin typeface="Pretendard" pitchFamily="34" charset="0"/>
+                <a:ea typeface="Pretendard" pitchFamily="34" charset="-122"/>
+                <a:cs typeface="Pretendard" pitchFamily="34" charset="-120"/>
+              </a:rPr>
+              <a:t>CLEAN PPT  /  BUSINESS PRESENTATION</a:t>
+            </a:r>
+            <a:endParaRPr lang="ko-KR" sz="1200" dirty="0">
               <a:ea typeface="Pretendard"/>
             </a:endParaRPr>
           </a:p>
@@ -6026,24 +6795,24 @@
         </p:nvSpPr>
         <p:spPr>
           <a:xfrm>
-            <a:off x="10668000" y="6438900"/>
-            <a:ext cx="990600" cy="190500"/>
-          </a:xfrm>
-          <a:prstGeom prst="rect">
-            <a:avLst/>
-          </a:prstGeom>
-          <a:noFill/>
-          <a:ln/>
-        </p:spPr>
-        <p:txBody>
-          <a:bodyPr wrap="square" lIns="0" tIns="0" rIns="0" bIns="0" rtlCol="0" anchor="t"/>
-          <a:lstStyle/>
-          <a:p>
-            <a:pPr algn="r" indent="0" marL="0">
-              <a:buNone/>
-            </a:pPr>
-            <a:r>
-              <a:rPr lang="ko-KR" sz="975" dirty="0">
+            <a:off x="533400" y="1495425"/>
+            <a:ext cx="11125200" cy="381000"/>
+          </a:xfrm>
+          <a:prstGeom prst="rect">
+            <a:avLst/>
+          </a:prstGeom>
+          <a:noFill/>
+          <a:ln/>
+        </p:spPr>
+        <p:txBody>
+          <a:bodyPr wrap="square" lIns="0" tIns="0" rIns="0" bIns="0" rtlCol="0" anchor="t"/>
+          <a:lstStyle/>
+          <a:p>
+            <a:pPr algn="l" indent="0" marL="0">
+              <a:buNone/>
+            </a:pPr>
+            <a:r>
+              <a:rPr lang="ko-KR" sz="1575" dirty="0">
                 <a:solidFill>
                   <a:srgbClr val="526174"/>
                 </a:solidFill>
@@ -6051,75 +6820,34 @@
                 <a:ea typeface="Pretendard" pitchFamily="34" charset="-122"/>
                 <a:cs typeface="Pretendard" pitchFamily="34" charset="-120"/>
               </a:rPr>
-              <a:t>6 / 6</a:t>
-            </a:r>
-            <a:endParaRPr lang="ko-KR" sz="975" dirty="0">
-              <a:ea typeface="Pretendard"/>
-            </a:endParaRPr>
-          </a:p>
-        </p:txBody>
-      </p:sp>
-      <p:sp>
-        <p:nvSpPr>
-          <p:cNvPr id="5" name="Text 3"/>
-          <p:cNvSpPr txBox="1"/>
-          <p:nvPr/>
-        </p:nvSpPr>
-        <p:spPr>
-          <a:xfrm>
-            <a:off x="533400" y="1695450"/>
-            <a:ext cx="11125200" cy="619125"/>
-          </a:xfrm>
-          <a:prstGeom prst="rect">
-            <a:avLst/>
-          </a:prstGeom>
-          <a:noFill/>
-          <a:ln/>
-        </p:spPr>
-        <p:txBody>
-          <a:bodyPr wrap="square" lIns="0" tIns="0" rIns="0" bIns="0" rtlCol="0" anchor="t"/>
-          <a:lstStyle/>
-          <a:p>
-            <a:pPr algn="l" indent="0" marL="0">
-              <a:buNone/>
-            </a:pPr>
-            <a:r>
-              <a:rPr lang="ko-KR" sz="2925" b="1" dirty="0">
-                <a:solidFill>
-                  <a:srgbClr val="2459A6"/>
-                </a:solidFill>
-                <a:latin typeface="Pretendard" pitchFamily="34" charset="0"/>
-                <a:ea typeface="Pretendard" pitchFamily="34" charset="-122"/>
-                <a:cs typeface="Pretendard" pitchFamily="34" charset="-120"/>
-              </a:rPr>
-              <a:t>다른 품목으로 1주간 시험 운영</a:t>
-            </a:r>
-            <a:endParaRPr lang="ko-KR" sz="2925" dirty="0">
-              <a:ea typeface="Pretendard"/>
-            </a:endParaRPr>
-          </a:p>
-        </p:txBody>
-      </p:sp>
-      <p:sp>
-        <p:nvSpPr>
-          <p:cNvPr id="6" name="Shape 4"/>
+              <a:t>다른 제품군에서도 같은 기록 방식이 맞는지 확인합니다.</a:t>
+            </a:r>
+            <a:endParaRPr lang="ko-KR" sz="1575" dirty="0">
+              <a:ea typeface="Pretendard"/>
+            </a:endParaRPr>
+          </a:p>
+        </p:txBody>
+      </p:sp>
+      <p:sp>
+        <p:nvSpPr>
+          <p:cNvPr id="5" name="Shape 3"/>
           <p:cNvSpPr/>
           <p:nvPr/>
         </p:nvSpPr>
         <p:spPr>
           <a:xfrm>
-            <a:off x="533400" y="2752725"/>
-            <a:ext cx="3381375" cy="2762250"/>
+            <a:off x="533400" y="2238375"/>
+            <a:ext cx="3429000" cy="3457575"/>
           </a:xfrm>
           <a:prstGeom prst="rect">
             <a:avLst/>
           </a:prstGeom>
           <a:solidFill>
-            <a:srgbClr val="EEF3F9"/>
+            <a:srgbClr val="F0F4FA"/>
           </a:solidFill>
-          <a:ln w="9525">
+          <a:ln w="12700">
             <a:solidFill>
-              <a:srgbClr val="EEF3F9"/>
+              <a:srgbClr val="F0F4FA"/>
             </a:solidFill>
             <a:prstDash val="solid"/>
           </a:ln>
@@ -6127,30 +6855,71 @@
       </p:sp>
       <p:sp>
         <p:nvSpPr>
+          <p:cNvPr id="6" name="Text 4"/>
+          <p:cNvSpPr txBox="1"/>
+          <p:nvPr/>
+        </p:nvSpPr>
+        <p:spPr>
+          <a:xfrm>
+            <a:off x="838200" y="2505075"/>
+            <a:ext cx="2667000" cy="381000"/>
+          </a:xfrm>
+          <a:prstGeom prst="rect">
+            <a:avLst/>
+          </a:prstGeom>
+          <a:noFill/>
+          <a:ln/>
+        </p:spPr>
+        <p:txBody>
+          <a:bodyPr wrap="square" lIns="0" tIns="0" rIns="0" bIns="0" rtlCol="0" anchor="t"/>
+          <a:lstStyle/>
+          <a:p>
+            <a:pPr algn="l" indent="0" marL="0">
+              <a:buNone/>
+            </a:pPr>
+            <a:r>
+              <a:rPr lang="ko-KR" sz="1800" b="1" dirty="0">
+                <a:solidFill>
+                  <a:srgbClr val="2459A6"/>
+                </a:solidFill>
+                <a:latin typeface="Pretendard" pitchFamily="34" charset="0"/>
+                <a:ea typeface="Pretendard" pitchFamily="34" charset="-122"/>
+                <a:cs typeface="Pretendard" pitchFamily="34" charset="-120"/>
+              </a:rPr>
+              <a:t>추가 시험 기간</a:t>
+            </a:r>
+            <a:endParaRPr lang="ko-KR" sz="1800" dirty="0">
+              <a:ea typeface="Pretendard"/>
+            </a:endParaRPr>
+          </a:p>
+        </p:txBody>
+      </p:sp>
+      <p:sp>
+        <p:nvSpPr>
           <p:cNvPr id="7" name="Text 5"/>
           <p:cNvSpPr txBox="1"/>
           <p:nvPr/>
         </p:nvSpPr>
         <p:spPr>
           <a:xfrm>
-            <a:off x="809625" y="3000375"/>
-            <a:ext cx="2762250" cy="952500"/>
-          </a:xfrm>
-          <a:prstGeom prst="rect">
-            <a:avLst/>
-          </a:prstGeom>
-          <a:noFill/>
-          <a:ln/>
-        </p:spPr>
-        <p:txBody>
-          <a:bodyPr wrap="square" lIns="0" tIns="0" rIns="0" bIns="0" rtlCol="0" anchor="t"/>
-          <a:lstStyle/>
-          <a:p>
-            <a:pPr algn="l" indent="0" marL="0">
-              <a:buNone/>
-            </a:pPr>
-            <a:r>
-              <a:rPr lang="ko-KR" sz="5700" b="1" dirty="0">
+            <a:off x="838200" y="3143250"/>
+            <a:ext cx="2381250" cy="1047750"/>
+          </a:xfrm>
+          <a:prstGeom prst="rect">
+            <a:avLst/>
+          </a:prstGeom>
+          <a:noFill/>
+          <a:ln/>
+        </p:spPr>
+        <p:txBody>
+          <a:bodyPr wrap="square" lIns="0" tIns="0" rIns="0" bIns="0" rtlCol="0" anchor="t"/>
+          <a:lstStyle/>
+          <a:p>
+            <a:pPr algn="l" indent="0" marL="0">
+              <a:buNone/>
+            </a:pPr>
+            <a:r>
+              <a:rPr lang="ko-KR" sz="6150" b="1" dirty="0">
                 <a:solidFill>
                   <a:srgbClr val="2459A6"/>
                 </a:solidFill>
@@ -6160,7 +6929,7 @@
               </a:rPr>
               <a:t>1주</a:t>
             </a:r>
-            <a:endParaRPr lang="ko-KR" sz="5700" dirty="0">
+            <a:endParaRPr lang="ko-KR" sz="6150" dirty="0">
               <a:ea typeface="Pretendard"/>
             </a:endParaRPr>
           </a:p>
@@ -6174,24 +6943,24 @@
         </p:nvSpPr>
         <p:spPr>
           <a:xfrm>
-            <a:off x="809625" y="4276725"/>
-            <a:ext cx="2762250" cy="428625"/>
-          </a:xfrm>
-          <a:prstGeom prst="rect">
-            <a:avLst/>
-          </a:prstGeom>
-          <a:noFill/>
-          <a:ln/>
-        </p:spPr>
-        <p:txBody>
-          <a:bodyPr wrap="square" lIns="0" tIns="0" rIns="0" bIns="0" rtlCol="0" anchor="t"/>
-          <a:lstStyle/>
-          <a:p>
-            <a:pPr algn="l" indent="0" marL="0">
-              <a:buNone/>
-            </a:pPr>
-            <a:r>
-              <a:rPr lang="ko-KR" sz="2100" dirty="0">
+            <a:off x="838200" y="4495800"/>
+            <a:ext cx="2619375" cy="809625"/>
+          </a:xfrm>
+          <a:prstGeom prst="rect">
+            <a:avLst/>
+          </a:prstGeom>
+          <a:noFill/>
+          <a:ln/>
+        </p:spPr>
+        <p:txBody>
+          <a:bodyPr wrap="square" lIns="0" tIns="0" rIns="0" bIns="0" rtlCol="0" anchor="t"/>
+          <a:lstStyle/>
+          <a:p>
+            <a:pPr algn="l" indent="0" marL="0">
+              <a:buNone/>
+            </a:pPr>
+            <a:r>
+              <a:rPr lang="ko-KR" sz="2025" dirty="0">
                 <a:solidFill>
                   <a:srgbClr val="192A40"/>
                 </a:solidFill>
@@ -6199,9 +6968,28 @@
                 <a:ea typeface="Pretendard" pitchFamily="34" charset="-122"/>
                 <a:cs typeface="Pretendard" pitchFamily="34" charset="-120"/>
               </a:rPr>
-              <a:t>시험 운영 기간</a:t>
-            </a:r>
-            <a:endParaRPr lang="ko-KR" sz="2100" dirty="0">
+              <a:t>다른 제품군에</a:t>
+            </a:r>
+            <a:endParaRPr lang="ko-KR" sz="2025" dirty="0">
+              <a:ea typeface="Pretendard"/>
+            </a:endParaRPr>
+          </a:p>
+          <a:p>
+            <a:pPr algn="l" indent="0" marL="0">
+              <a:buNone/>
+            </a:pPr>
+            <a:r>
+              <a:rPr lang="ko-KR" sz="2025" dirty="0">
+                <a:solidFill>
+                  <a:srgbClr val="192A40"/>
+                </a:solidFill>
+                <a:latin typeface="Pretendard" pitchFamily="34" charset="0"/>
+                <a:ea typeface="Pretendard" pitchFamily="34" charset="-122"/>
+                <a:cs typeface="Pretendard" pitchFamily="34" charset="-120"/>
+              </a:rPr>
+              <a:t>적용해 봅니다.</a:t>
+            </a:r>
+            <a:endParaRPr lang="ko-KR" sz="2025" dirty="0">
               <a:ea typeface="Pretendard"/>
             </a:endParaRPr>
           </a:p>
@@ -6215,24 +7003,24 @@
         </p:nvSpPr>
         <p:spPr>
           <a:xfrm>
-            <a:off x="4533900" y="2838450"/>
-            <a:ext cx="6953250" cy="428625"/>
-          </a:xfrm>
-          <a:prstGeom prst="rect">
-            <a:avLst/>
-          </a:prstGeom>
-          <a:noFill/>
-          <a:ln/>
-        </p:spPr>
-        <p:txBody>
-          <a:bodyPr wrap="square" lIns="0" tIns="0" rIns="0" bIns="0" rtlCol="0" anchor="t"/>
-          <a:lstStyle/>
-          <a:p>
-            <a:pPr algn="l" indent="0" marL="0">
-              <a:buNone/>
-            </a:pPr>
-            <a:r>
-              <a:rPr lang="ko-KR" sz="2100" b="1" dirty="0">
+            <a:off x="4476750" y="2276475"/>
+            <a:ext cx="6858000" cy="400050"/>
+          </a:xfrm>
+          <a:prstGeom prst="rect">
+            <a:avLst/>
+          </a:prstGeom>
+          <a:noFill/>
+          <a:ln/>
+        </p:spPr>
+        <p:txBody>
+          <a:bodyPr wrap="square" lIns="0" tIns="0" rIns="0" bIns="0" rtlCol="0" anchor="t"/>
+          <a:lstStyle/>
+          <a:p>
+            <a:pPr algn="l" indent="0" marL="0">
+              <a:buNone/>
+            </a:pPr>
+            <a:r>
+              <a:rPr lang="ko-KR" sz="2250" b="1" dirty="0">
                 <a:solidFill>
                   <a:srgbClr val="192A40"/>
                 </a:solidFill>
@@ -6240,9 +7028,9 @@
                 <a:ea typeface="Pretendard" pitchFamily="34" charset="-122"/>
                 <a:cs typeface="Pretendard" pitchFamily="34" charset="-120"/>
               </a:rPr>
-              <a:t>운영 범위</a:t>
-            </a:r>
-            <a:endParaRPr lang="ko-KR" sz="2100" dirty="0">
+              <a:t>01  같은 기준으로 기록</a:t>
+            </a:r>
+            <a:endParaRPr lang="ko-KR" sz="2250" dirty="0">
               <a:ea typeface="Pretendard"/>
             </a:endParaRPr>
           </a:p>
@@ -6256,24 +7044,24 @@
         </p:nvSpPr>
         <p:spPr>
           <a:xfrm>
-            <a:off x="4533900" y="3276600"/>
-            <a:ext cx="6953250" cy="457200"/>
-          </a:xfrm>
-          <a:prstGeom prst="rect">
-            <a:avLst/>
-          </a:prstGeom>
-          <a:noFill/>
-          <a:ln/>
-        </p:spPr>
-        <p:txBody>
-          <a:bodyPr wrap="square" lIns="0" tIns="0" rIns="0" bIns="0" rtlCol="0" anchor="t"/>
-          <a:lstStyle/>
-          <a:p>
-            <a:pPr algn="l" indent="0" marL="0">
-              <a:buNone/>
-            </a:pPr>
-            <a:r>
-              <a:rPr lang="ko-KR" sz="2325" dirty="0">
+            <a:off x="4476750" y="2895600"/>
+            <a:ext cx="6905625" cy="790575"/>
+          </a:xfrm>
+          <a:prstGeom prst="rect">
+            <a:avLst/>
+          </a:prstGeom>
+          <a:noFill/>
+          <a:ln/>
+        </p:spPr>
+        <p:txBody>
+          <a:bodyPr wrap="square" lIns="0" tIns="0" rIns="0" bIns="0" rtlCol="0" anchor="t"/>
+          <a:lstStyle/>
+          <a:p>
+            <a:pPr algn="l" indent="0" marL="0">
+              <a:buNone/>
+            </a:pPr>
+            <a:r>
+              <a:rPr lang="ko-KR" sz="2025" dirty="0">
                 <a:solidFill>
                   <a:srgbClr val="192A40"/>
                 </a:solidFill>
@@ -6281,9 +7069,28 @@
                 <a:ea typeface="Pretendard" pitchFamily="34" charset="-122"/>
                 <a:cs typeface="Pretendard" pitchFamily="34" charset="-120"/>
               </a:rPr>
-              <a:t>다른 품목으로 적용</a:t>
-            </a:r>
-            <a:endParaRPr lang="ko-KR" sz="2325" dirty="0">
+              <a:t>검수 시간과 입력 누락을</a:t>
+            </a:r>
+            <a:endParaRPr lang="ko-KR" sz="2025" dirty="0">
+              <a:ea typeface="Pretendard"/>
+            </a:endParaRPr>
+          </a:p>
+          <a:p>
+            <a:pPr algn="l" indent="0" marL="0">
+              <a:buNone/>
+            </a:pPr>
+            <a:r>
+              <a:rPr lang="ko-KR" sz="2025" dirty="0">
+                <a:solidFill>
+                  <a:srgbClr val="192A40"/>
+                </a:solidFill>
+                <a:latin typeface="Pretendard" pitchFamily="34" charset="0"/>
+                <a:ea typeface="Pretendard" pitchFamily="34" charset="-122"/>
+                <a:cs typeface="Pretendard" pitchFamily="34" charset="-120"/>
+              </a:rPr>
+              <a:t>같은 방식으로 확인합니다.</a:t>
+            </a:r>
+            <a:endParaRPr lang="ko-KR" sz="2025" dirty="0">
               <a:ea typeface="Pretendard"/>
             </a:endParaRPr>
           </a:p>
@@ -6297,8 +7104,8 @@
         </p:nvSpPr>
         <p:spPr>
           <a:xfrm>
-            <a:off x="4533900" y="3971925"/>
-            <a:ext cx="7124700" cy="0"/>
+            <a:off x="4476750" y="4000500"/>
+            <a:ext cx="7181850" cy="0"/>
           </a:xfrm>
           <a:prstGeom prst="line">
             <a:avLst/>
@@ -6306,7 +7113,7 @@
           <a:noFill/>
           <a:ln w="19050">
             <a:solidFill>
-              <a:srgbClr val="2459A6"/>
+              <a:srgbClr val="CDD6E1"/>
             </a:solidFill>
             <a:prstDash val="solid"/>
           </a:ln>
@@ -6320,34 +7127,34 @@
         </p:nvSpPr>
         <p:spPr>
           <a:xfrm>
-            <a:off x="4533900" y="4238625"/>
-            <a:ext cx="6953250" cy="419100"/>
-          </a:xfrm>
-          <a:prstGeom prst="rect">
-            <a:avLst/>
-          </a:prstGeom>
-          <a:noFill/>
-          <a:ln/>
-        </p:spPr>
-        <p:txBody>
-          <a:bodyPr wrap="square" lIns="0" tIns="0" rIns="0" bIns="0" rtlCol="0" anchor="t"/>
-          <a:lstStyle/>
-          <a:p>
-            <a:pPr algn="l" indent="0" marL="0">
-              <a:buNone/>
-            </a:pPr>
-            <a:r>
-              <a:rPr lang="ko-KR" sz="1950" b="1" dirty="0">
-                <a:solidFill>
-                  <a:srgbClr val="2459A6"/>
-                </a:solidFill>
-                <a:latin typeface="Pretendard" pitchFamily="34" charset="0"/>
-                <a:ea typeface="Pretendard" pitchFamily="34" charset="-122"/>
-                <a:cs typeface="Pretendard" pitchFamily="34" charset="-120"/>
-              </a:rPr>
-              <a:t>확인 제안</a:t>
-            </a:r>
-            <a:endParaRPr lang="ko-KR" sz="1950" dirty="0">
+            <a:off x="4476750" y="4324350"/>
+            <a:ext cx="6858000" cy="400050"/>
+          </a:xfrm>
+          <a:prstGeom prst="rect">
+            <a:avLst/>
+          </a:prstGeom>
+          <a:noFill/>
+          <a:ln/>
+        </p:spPr>
+        <p:txBody>
+          <a:bodyPr wrap="square" lIns="0" tIns="0" rIns="0" bIns="0" rtlCol="0" anchor="t"/>
+          <a:lstStyle/>
+          <a:p>
+            <a:pPr algn="l" indent="0" marL="0">
+              <a:buNone/>
+            </a:pPr>
+            <a:r>
+              <a:rPr lang="ko-KR" sz="2250" b="1" dirty="0">
+                <a:solidFill>
+                  <a:srgbClr val="192A40"/>
+                </a:solidFill>
+                <a:latin typeface="Pretendard" pitchFamily="34" charset="0"/>
+                <a:ea typeface="Pretendard" pitchFamily="34" charset="-122"/>
+                <a:cs typeface="Pretendard" pitchFamily="34" charset="-120"/>
+              </a:rPr>
+              <a:t>02  결과를 보고 적용 판단</a:t>
+            </a:r>
+            <a:endParaRPr lang="ko-KR" sz="2250" dirty="0">
               <a:ea typeface="Pretendard"/>
             </a:endParaRPr>
           </a:p>
@@ -6361,24 +7168,24 @@
         </p:nvSpPr>
         <p:spPr>
           <a:xfrm>
-            <a:off x="4533900" y="4705350"/>
-            <a:ext cx="6953250" cy="457200"/>
-          </a:xfrm>
-          <a:prstGeom prst="rect">
-            <a:avLst/>
-          </a:prstGeom>
-          <a:noFill/>
-          <a:ln/>
-        </p:spPr>
-        <p:txBody>
-          <a:bodyPr wrap="square" lIns="0" tIns="0" rIns="0" bIns="0" rtlCol="0" anchor="t"/>
-          <a:lstStyle/>
-          <a:p>
-            <a:pPr algn="l" indent="0" marL="0">
-              <a:buNone/>
-            </a:pPr>
-            <a:r>
-              <a:rPr lang="ko-KR" sz="2175" dirty="0">
+            <a:off x="4476750" y="4933950"/>
+            <a:ext cx="6905625" cy="809625"/>
+          </a:xfrm>
+          <a:prstGeom prst="rect">
+            <a:avLst/>
+          </a:prstGeom>
+          <a:noFill/>
+          <a:ln/>
+        </p:spPr>
+        <p:txBody>
+          <a:bodyPr wrap="square" lIns="0" tIns="0" rIns="0" bIns="0" rtlCol="0" anchor="t"/>
+          <a:lstStyle/>
+          <a:p>
+            <a:pPr algn="l" indent="0" marL="0">
+              <a:buNone/>
+            </a:pPr>
+            <a:r>
+              <a:rPr lang="ko-KR" sz="2025" dirty="0">
                 <a:solidFill>
                   <a:srgbClr val="192A40"/>
                 </a:solidFill>
@@ -6386,40 +7193,82 @@
                 <a:ea typeface="Pretendard" pitchFamily="34" charset="-122"/>
                 <a:cs typeface="Pretendard" pitchFamily="34" charset="-120"/>
               </a:rPr>
-              <a:t>건당 평균 시간 · 입력 누락</a:t>
-            </a:r>
-            <a:endParaRPr lang="ko-KR" sz="2175" dirty="0">
-              <a:ea typeface="Pretendard"/>
-            </a:endParaRPr>
-          </a:p>
-        </p:txBody>
-      </p:sp>
-      <p:sp>
-        <p:nvSpPr>
-          <p:cNvPr id="14" name="Text 12"/>
-          <p:cNvSpPr txBox="1"/>
-          <p:nvPr/>
-        </p:nvSpPr>
-        <p:spPr>
-          <a:xfrm>
-            <a:off x="533400" y="5791200"/>
-            <a:ext cx="11125200" cy="342900"/>
-          </a:xfrm>
-          <a:prstGeom prst="rect">
-            <a:avLst/>
-          </a:prstGeom>
-          <a:noFill/>
-          <a:ln/>
-        </p:spPr>
-        <p:txBody>
-          <a:bodyPr wrap="square" lIns="0" tIns="0" rIns="0" bIns="0" rtlCol="0" anchor="t"/>
-          <a:lstStyle/>
-          <a:p>
-            <a:pPr algn="l" indent="0" marL="0">
-              <a:buNone/>
-            </a:pPr>
-            <a:r>
-              <a:rPr lang="ko-KR" sz="1725" dirty="0">
+              <a:t>담당자의 검수 부담과</a:t>
+            </a:r>
+            <a:endParaRPr lang="ko-KR" sz="2025" dirty="0">
+              <a:ea typeface="Pretendard"/>
+            </a:endParaRPr>
+          </a:p>
+          <a:p>
+            <a:pPr algn="l" indent="0" marL="0">
+              <a:buNone/>
+            </a:pPr>
+            <a:r>
+              <a:rPr lang="ko-KR" sz="2025" dirty="0">
+                <a:solidFill>
+                  <a:srgbClr val="192A40"/>
+                </a:solidFill>
+                <a:latin typeface="Pretendard" pitchFamily="34" charset="0"/>
+                <a:ea typeface="Pretendard" pitchFamily="34" charset="-122"/>
+                <a:cs typeface="Pretendard" pitchFamily="34" charset="-120"/>
+              </a:rPr>
+              <a:t>제품별 입력 차이를 함께 살펴봅니다.</a:t>
+            </a:r>
+            <a:endParaRPr lang="ko-KR" sz="2025" dirty="0">
+              <a:ea typeface="Pretendard"/>
+            </a:endParaRPr>
+          </a:p>
+        </p:txBody>
+      </p:sp>
+      <p:sp>
+        <p:nvSpPr>
+          <p:cNvPr id="14" name="Shape 12"/>
+          <p:cNvSpPr/>
+          <p:nvPr/>
+        </p:nvSpPr>
+        <p:spPr>
+          <a:xfrm>
+            <a:off x="533400" y="6362700"/>
+            <a:ext cx="11125200" cy="0"/>
+          </a:xfrm>
+          <a:prstGeom prst="line">
+            <a:avLst/>
+          </a:prstGeom>
+          <a:noFill/>
+          <a:ln w="19050">
+            <a:solidFill>
+              <a:srgbClr val="CDD6E1"/>
+            </a:solidFill>
+            <a:prstDash val="solid"/>
+          </a:ln>
+        </p:spPr>
+      </p:sp>
+      <p:sp>
+        <p:nvSpPr>
+          <p:cNvPr id="15" name="Text 13"/>
+          <p:cNvSpPr txBox="1"/>
+          <p:nvPr/>
+        </p:nvSpPr>
+        <p:spPr>
+          <a:xfrm>
+            <a:off x="533400" y="6496050"/>
+            <a:ext cx="10477500" cy="190500"/>
+          </a:xfrm>
+          <a:prstGeom prst="rect">
+            <a:avLst/>
+          </a:prstGeom>
+          <a:noFill/>
+          <a:ln/>
+        </p:spPr>
+        <p:txBody>
+          <a:bodyPr wrap="square" lIns="0" tIns="0" rIns="0" bIns="0" rtlCol="0" anchor="t"/>
+          <a:lstStyle/>
+          <a:p>
+            <a:pPr algn="l" indent="0" marL="0">
+              <a:buNone/>
+            </a:pPr>
+            <a:r>
+              <a:rPr lang="ko-KR" sz="900" dirty="0">
                 <a:solidFill>
                   <a:srgbClr val="526174"/>
                 </a:solidFill>
@@ -6427,9 +7276,50 @@
                 <a:ea typeface="Pretendard" pitchFamily="34" charset="-122"/>
                 <a:cs typeface="Pretendard" pitchFamily="34" charset="-120"/>
               </a:rPr>
-              <a:t>최종 검수 확정: 담당자</a:t>
-            </a:r>
-            <a:endParaRPr lang="ko-KR" sz="1725" dirty="0">
+              <a:t>Clean PPT  |  가상 예제</a:t>
+            </a:r>
+            <a:endParaRPr lang="ko-KR" sz="900" dirty="0">
+              <a:ea typeface="Pretendard"/>
+            </a:endParaRPr>
+          </a:p>
+        </p:txBody>
+      </p:sp>
+      <p:sp>
+        <p:nvSpPr>
+          <p:cNvPr id="16" name="Text 14"/>
+          <p:cNvSpPr txBox="1"/>
+          <p:nvPr/>
+        </p:nvSpPr>
+        <p:spPr>
+          <a:xfrm>
+            <a:off x="10858500" y="6477000"/>
+            <a:ext cx="800100" cy="209550"/>
+          </a:xfrm>
+          <a:prstGeom prst="rect">
+            <a:avLst/>
+          </a:prstGeom>
+          <a:noFill/>
+          <a:ln/>
+        </p:spPr>
+        <p:txBody>
+          <a:bodyPr wrap="square" lIns="0" tIns="0" rIns="0" bIns="0" rtlCol="0" anchor="t"/>
+          <a:lstStyle/>
+          <a:p>
+            <a:pPr algn="l" indent="0" marL="0">
+              <a:buNone/>
+            </a:pPr>
+            <a:r>
+              <a:rPr lang="ko-KR" sz="1050" dirty="0">
+                <a:solidFill>
+                  <a:srgbClr val="526174"/>
+                </a:solidFill>
+                <a:latin typeface="Pretendard" pitchFamily="34" charset="0"/>
+                <a:ea typeface="Pretendard" pitchFamily="34" charset="-122"/>
+                <a:cs typeface="Pretendard" pitchFamily="34" charset="-120"/>
+              </a:rPr>
+              <a:t>06 / 06</a:t>
+            </a:r>
+            <a:endParaRPr lang="ko-KR" sz="1050" dirty="0">
               <a:ea typeface="Pretendard"/>
             </a:endParaRPr>
           </a:p>
